--- a/TE - Lecture-8-4Aug2026.pptx
+++ b/TE - Lecture-8-4Aug2026.pptx
@@ -5,15 +5,31 @@
     <p:sldMasterId id="2147483692" r:id="rId1"/>
   </p:sldMasterIdLst>
   <p:notesMasterIdLst>
-    <p:notesMasterId r:id="rId5"/>
+    <p:notesMasterId r:id="rId21"/>
   </p:notesMasterIdLst>
   <p:handoutMasterIdLst>
-    <p:handoutMasterId r:id="rId6"/>
+    <p:handoutMasterId r:id="rId22"/>
   </p:handoutMasterIdLst>
   <p:sldIdLst>
     <p:sldId id="257" r:id="rId2"/>
     <p:sldId id="267" r:id="rId3"/>
-    <p:sldId id="268" r:id="rId4"/>
+    <p:sldId id="269" r:id="rId4"/>
+    <p:sldId id="270" r:id="rId5"/>
+    <p:sldId id="271" r:id="rId6"/>
+    <p:sldId id="272" r:id="rId7"/>
+    <p:sldId id="273" r:id="rId8"/>
+    <p:sldId id="268" r:id="rId9"/>
+    <p:sldId id="274" r:id="rId10"/>
+    <p:sldId id="275" r:id="rId11"/>
+    <p:sldId id="276" r:id="rId12"/>
+    <p:sldId id="277" r:id="rId13"/>
+    <p:sldId id="278" r:id="rId14"/>
+    <p:sldId id="279" r:id="rId15"/>
+    <p:sldId id="280" r:id="rId16"/>
+    <p:sldId id="281" r:id="rId17"/>
+    <p:sldId id="282" r:id="rId18"/>
+    <p:sldId id="283" r:id="rId19"/>
+    <p:sldId id="284" r:id="rId20"/>
   </p:sldIdLst>
   <p:sldSz cx="12188825" cy="6858000"/>
   <p:notesSz cx="6858000" cy="9144000"/>
@@ -265,7 +281,7 @@
                   <a:schemeClr val="tx2"/>
                 </a:solidFill>
               </a:rPr>
-              <a:t>7/31/2026</a:t>
+              <a:t>8/9/2026</a:t>
             </a:fld>
             <a:endParaRPr>
               <a:solidFill>
@@ -455,7 +471,7 @@
             <a:fld id="{F95CF31C-F757-429C-A789-86504F04C3BE}" type="datetimeFigureOut">
               <a:rPr lang="en-US"/>
               <a:pPr/>
-              <a:t>7/31/2026</a:t>
+              <a:t>8/9/2026</a:t>
             </a:fld>
             <a:endParaRPr/>
           </a:p>
@@ -1199,7 +1215,7 @@
           <a:p>
             <a:fld id="{5706A09E-12D5-4B1D-B8BB-C300B1DDD423}" type="datetime1">
               <a:rPr lang="en-US" smtClean="0"/>
-              <a:t>7/31/2026</a:t>
+              <a:t>8/9/2026</a:t>
             </a:fld>
             <a:endParaRPr lang="en-US"/>
           </a:p>
@@ -1403,7 +1419,7 @@
           <a:p>
             <a:fld id="{D91CA53D-4C84-40AA-983E-A1E818A7FEFC}" type="datetime1">
               <a:rPr lang="en-US" smtClean="0"/>
-              <a:t>7/31/2026</a:t>
+              <a:t>8/9/2026</a:t>
             </a:fld>
             <a:endParaRPr lang="en-US"/>
           </a:p>
@@ -1616,7 +1632,7 @@
           <a:p>
             <a:fld id="{C8E2FCEE-AE66-4EAB-9C04-97F8A56A6354}" type="datetime1">
               <a:rPr lang="en-US" smtClean="0"/>
-              <a:t>7/31/2026</a:t>
+              <a:t>8/9/2026</a:t>
             </a:fld>
             <a:endParaRPr lang="en-US"/>
           </a:p>
@@ -1817,7 +1833,7 @@
           <a:p>
             <a:fld id="{15A9377B-053C-438C-8A98-92C419A6701C}" type="datetime1">
               <a:rPr lang="en-US" smtClean="0"/>
-              <a:t>7/31/2026</a:t>
+              <a:t>8/9/2026</a:t>
             </a:fld>
             <a:endParaRPr lang="en-US"/>
           </a:p>
@@ -2300,7 +2316,7 @@
           <a:p>
             <a:fld id="{B07CEF46-0123-4A75-9835-49DC49D53DE2}" type="datetime1">
               <a:rPr lang="en-US" smtClean="0"/>
-              <a:t>7/31/2026</a:t>
+              <a:t>8/9/2026</a:t>
             </a:fld>
             <a:endParaRPr lang="en-US"/>
           </a:p>
@@ -2617,7 +2633,7 @@
           <a:p>
             <a:fld id="{62A6378D-18AE-47D1-B10A-42F623B40082}" type="datetime1">
               <a:rPr lang="en-US" smtClean="0"/>
-              <a:t>7/31/2026</a:t>
+              <a:t>8/9/2026</a:t>
             </a:fld>
             <a:endParaRPr lang="en-US"/>
           </a:p>
@@ -3072,7 +3088,7 @@
           <a:p>
             <a:fld id="{321F6AE8-D704-41F6-B16A-5547B5672AC1}" type="datetime1">
               <a:rPr lang="en-US" smtClean="0"/>
-              <a:t>7/31/2026</a:t>
+              <a:t>8/9/2026</a:t>
             </a:fld>
             <a:endParaRPr lang="en-US"/>
           </a:p>
@@ -3205,7 +3221,7 @@
           <a:p>
             <a:fld id="{58AB9538-6F63-4C0B-916D-ED3F4E0A1B28}" type="datetime1">
               <a:rPr lang="en-US" smtClean="0"/>
-              <a:t>7/31/2026</a:t>
+              <a:t>8/9/2026</a:t>
             </a:fld>
             <a:endParaRPr lang="en-US"/>
           </a:p>
@@ -3315,7 +3331,7 @@
           <a:p>
             <a:fld id="{068F15BF-7116-4A9E-8022-5A2DC937F971}" type="datetime1">
               <a:rPr lang="en-US" smtClean="0"/>
-              <a:t>7/31/2026</a:t>
+              <a:t>8/9/2026</a:t>
             </a:fld>
             <a:endParaRPr lang="en-US"/>
           </a:p>
@@ -3679,7 +3695,7 @@
           <a:p>
             <a:fld id="{41B8DC91-5A3B-40CE-8C1D-279A8EF6E008}" type="datetime1">
               <a:rPr lang="en-US" smtClean="0"/>
-              <a:t>7/31/2026</a:t>
+              <a:t>8/9/2026</a:t>
             </a:fld>
             <a:endParaRPr lang="en-US"/>
           </a:p>
@@ -4021,7 +4037,7 @@
           <a:p>
             <a:fld id="{36B7C20A-B94A-4E20-B4B2-88A7825AE904}" type="datetime1">
               <a:rPr lang="en-US" smtClean="0"/>
-              <a:t>7/31/2026</a:t>
+              <a:t>8/9/2026</a:t>
             </a:fld>
             <a:endParaRPr lang="en-US"/>
           </a:p>
@@ -4389,7 +4405,7 @@
             <a:fld id="{859468AF-EFCF-4AAD-ACF4-3BA83EC4AF4E}" type="datetime1">
               <a:rPr lang="en-US" smtClean="0"/>
               <a:pPr/>
-              <a:t>7/31/2026</a:t>
+              <a:t>8/9/2026</a:t>
             </a:fld>
             <a:endParaRPr lang="en-US" dirty="0"/>
           </a:p>
@@ -4895,7 +4911,7 @@
           <a:p>
             <a:r>
               <a:rPr lang="en-IN" dirty="0"/>
-              <a:t>Agile Planning &amp; Estimation</a:t>
+              <a:t>Agile Quality Assurance and Testing</a:t>
             </a:r>
             <a:endParaRPr lang="en-US" dirty="0"/>
           </a:p>
@@ -4932,6 +4948,3166 @@
     <p:extLst>
       <p:ext uri="{BB962C8B-B14F-4D97-AF65-F5344CB8AC3E}">
         <p14:creationId xmlns:p14="http://schemas.microsoft.com/office/powerpoint/2010/main" val="168988781"/>
+      </p:ext>
+    </p:extLst>
+  </p:cSld>
+  <p:clrMapOvr>
+    <a:masterClrMapping/>
+  </p:clrMapOvr>
+  <mc:AlternateContent xmlns:mc="http://schemas.openxmlformats.org/markup-compatibility/2006" xmlns:p14="http://schemas.microsoft.com/office/powerpoint/2010/main">
+    <mc:Choice Requires="p14">
+      <p:transition spd="med" p14:dur="700">
+        <p:fade/>
+      </p:transition>
+    </mc:Choice>
+    <mc:Fallback xmlns="">
+      <p:transition spd="med">
+        <p:fade/>
+      </p:transition>
+    </mc:Fallback>
+  </mc:AlternateContent>
+</p:sld>
+</file>
+
+<file path=ppt/slides/slide10.xml><?xml version="1.0" encoding="utf-8"?>
+<p:sld xmlns:a="http://schemas.openxmlformats.org/drawingml/2006/main" xmlns:r="http://schemas.openxmlformats.org/officeDocument/2006/relationships" xmlns:p="http://schemas.openxmlformats.org/presentationml/2006/main">
+  <p:cSld>
+    <p:spTree>
+      <p:nvGrpSpPr>
+        <p:cNvPr id="1" name=""/>
+        <p:cNvGrpSpPr/>
+        <p:nvPr/>
+      </p:nvGrpSpPr>
+      <p:grpSpPr>
+        <a:xfrm>
+          <a:off x="0" y="0"/>
+          <a:ext cx="0" cy="0"/>
+          <a:chOff x="0" y="0"/>
+          <a:chExt cx="0" cy="0"/>
+        </a:xfrm>
+      </p:grpSpPr>
+      <p:sp>
+        <p:nvSpPr>
+          <p:cNvPr id="4" name="TextBox 3">
+            <a:extLst>
+              <a:ext uri="{FF2B5EF4-FFF2-40B4-BE49-F238E27FC236}">
+                <a16:creationId xmlns:a16="http://schemas.microsoft.com/office/drawing/2014/main" id="{4252FB50-C2AE-1F15-D85C-E3C76D86481D}"/>
+              </a:ext>
+            </a:extLst>
+          </p:cNvPr>
+          <p:cNvSpPr txBox="1"/>
+          <p:nvPr/>
+        </p:nvSpPr>
+        <p:spPr>
+          <a:xfrm>
+            <a:off x="765820" y="332656"/>
+            <a:ext cx="4807726" cy="443198"/>
+          </a:xfrm>
+          <a:prstGeom prst="rect">
+            <a:avLst/>
+          </a:prstGeom>
+          <a:noFill/>
+        </p:spPr>
+        <p:txBody>
+          <a:bodyPr wrap="none" rtlCol="0">
+            <a:spAutoFit/>
+          </a:bodyPr>
+          <a:lstStyle>
+            <a:defPPr>
+              <a:defRPr lang="en-US"/>
+            </a:defPPr>
+            <a:lvl1pPr>
+              <a:lnSpc>
+                <a:spcPct val="95000"/>
+              </a:lnSpc>
+              <a:defRPr sz="2200" b="1">
+                <a:solidFill>
+                  <a:srgbClr val="FF0000"/>
+                </a:solidFill>
+              </a:defRPr>
+            </a:lvl1pPr>
+          </a:lstStyle>
+          <a:p>
+            <a:r>
+              <a:rPr lang="en-IN" dirty="0"/>
+              <a:t>Test Driven Development (TDD)</a:t>
+            </a:r>
+          </a:p>
+        </p:txBody>
+      </p:sp>
+      <p:sp>
+        <p:nvSpPr>
+          <p:cNvPr id="5" name="TextBox 4">
+            <a:extLst>
+              <a:ext uri="{FF2B5EF4-FFF2-40B4-BE49-F238E27FC236}">
+                <a16:creationId xmlns:a16="http://schemas.microsoft.com/office/drawing/2014/main" id="{E91E60A9-146F-565A-6800-5914C1D73E5B}"/>
+              </a:ext>
+            </a:extLst>
+          </p:cNvPr>
+          <p:cNvSpPr txBox="1"/>
+          <p:nvPr/>
+        </p:nvSpPr>
+        <p:spPr>
+          <a:xfrm>
+            <a:off x="765821" y="731604"/>
+            <a:ext cx="4752528" cy="1043619"/>
+          </a:xfrm>
+          <a:prstGeom prst="rect">
+            <a:avLst/>
+          </a:prstGeom>
+          <a:noFill/>
+        </p:spPr>
+        <p:txBody>
+          <a:bodyPr wrap="square" rtlCol="0">
+            <a:spAutoFit/>
+          </a:bodyPr>
+          <a:lstStyle>
+            <a:defPPr>
+              <a:defRPr lang="en-US"/>
+            </a:defPPr>
+            <a:lvl1pPr>
+              <a:lnSpc>
+                <a:spcPct val="150000"/>
+              </a:lnSpc>
+              <a:defRPr sz="2200"/>
+            </a:lvl1pPr>
+          </a:lstStyle>
+          <a:p>
+            <a:r>
+              <a:rPr lang="en-US" dirty="0"/>
+              <a:t>Write the test before writing the code</a:t>
+            </a:r>
+            <a:endParaRPr lang="en-IN" dirty="0"/>
+          </a:p>
+        </p:txBody>
+      </p:sp>
+      <p:sp>
+        <p:nvSpPr>
+          <p:cNvPr id="6" name="TextBox 5">
+            <a:extLst>
+              <a:ext uri="{FF2B5EF4-FFF2-40B4-BE49-F238E27FC236}">
+                <a16:creationId xmlns:a16="http://schemas.microsoft.com/office/drawing/2014/main" id="{287B000A-8884-B7F6-7E97-787DF334B2FA}"/>
+              </a:ext>
+            </a:extLst>
+          </p:cNvPr>
+          <p:cNvSpPr txBox="1"/>
+          <p:nvPr/>
+        </p:nvSpPr>
+        <p:spPr>
+          <a:xfrm>
+            <a:off x="765820" y="1781713"/>
+            <a:ext cx="3312368" cy="3582776"/>
+          </a:xfrm>
+          <a:prstGeom prst="rect">
+            <a:avLst/>
+          </a:prstGeom>
+          <a:noFill/>
+        </p:spPr>
+        <p:txBody>
+          <a:bodyPr wrap="square" rtlCol="0">
+            <a:spAutoFit/>
+          </a:bodyPr>
+          <a:lstStyle>
+            <a:defPPr>
+              <a:defRPr lang="en-US"/>
+            </a:defPPr>
+            <a:lvl1pPr>
+              <a:lnSpc>
+                <a:spcPct val="150000"/>
+              </a:lnSpc>
+              <a:defRPr sz="2200"/>
+            </a:lvl1pPr>
+          </a:lstStyle>
+          <a:p>
+            <a:r>
+              <a:rPr lang="en-US" b="1" dirty="0"/>
+              <a:t>Benefits of TDD</a:t>
+            </a:r>
+          </a:p>
+          <a:p>
+            <a:pPr marL="342900" indent="-342900">
+              <a:buFont typeface="Arial" panose="020B0604020202020204" pitchFamily="34" charset="0"/>
+              <a:buChar char="•"/>
+            </a:pPr>
+            <a:r>
+              <a:rPr lang="en-US" dirty="0"/>
+              <a:t>Better quality </a:t>
+            </a:r>
+          </a:p>
+          <a:p>
+            <a:pPr marL="342900" indent="-342900">
+              <a:buFont typeface="Arial" panose="020B0604020202020204" pitchFamily="34" charset="0"/>
+              <a:buChar char="•"/>
+            </a:pPr>
+            <a:r>
+              <a:rPr lang="en-US" dirty="0"/>
+              <a:t>Fewer bugs </a:t>
+            </a:r>
+          </a:p>
+          <a:p>
+            <a:pPr marL="342900" indent="-342900">
+              <a:buFont typeface="Arial" panose="020B0604020202020204" pitchFamily="34" charset="0"/>
+              <a:buChar char="•"/>
+            </a:pPr>
+            <a:r>
+              <a:rPr lang="en-US" dirty="0"/>
+              <a:t>Cleaner code </a:t>
+            </a:r>
+          </a:p>
+          <a:p>
+            <a:pPr marL="342900" indent="-342900">
+              <a:buFont typeface="Arial" panose="020B0604020202020204" pitchFamily="34" charset="0"/>
+              <a:buChar char="•"/>
+            </a:pPr>
+            <a:r>
+              <a:rPr lang="en-US" dirty="0"/>
+              <a:t>High confidence </a:t>
+            </a:r>
+          </a:p>
+          <a:p>
+            <a:pPr marL="342900" indent="-342900">
+              <a:buFont typeface="Arial" panose="020B0604020202020204" pitchFamily="34" charset="0"/>
+              <a:buChar char="•"/>
+            </a:pPr>
+            <a:r>
+              <a:rPr lang="en-US" dirty="0"/>
+              <a:t>Easier maintenance</a:t>
+            </a:r>
+          </a:p>
+          <a:p>
+            <a:endParaRPr lang="en-IN" dirty="0"/>
+          </a:p>
+        </p:txBody>
+      </p:sp>
+      <p:sp>
+        <p:nvSpPr>
+          <p:cNvPr id="7" name="TextBox 6">
+            <a:extLst>
+              <a:ext uri="{FF2B5EF4-FFF2-40B4-BE49-F238E27FC236}">
+                <a16:creationId xmlns:a16="http://schemas.microsoft.com/office/drawing/2014/main" id="{FB3139D1-620D-4D81-DDC4-3D2868AB36A6}"/>
+              </a:ext>
+            </a:extLst>
+          </p:cNvPr>
+          <p:cNvSpPr txBox="1"/>
+          <p:nvPr/>
+        </p:nvSpPr>
+        <p:spPr>
+          <a:xfrm>
+            <a:off x="6454452" y="332656"/>
+            <a:ext cx="2635658" cy="413959"/>
+          </a:xfrm>
+          <a:prstGeom prst="rect">
+            <a:avLst/>
+          </a:prstGeom>
+          <a:noFill/>
+        </p:spPr>
+        <p:txBody>
+          <a:bodyPr wrap="none" rtlCol="0">
+            <a:spAutoFit/>
+          </a:bodyPr>
+          <a:lstStyle>
+            <a:defPPr>
+              <a:defRPr lang="en-US"/>
+            </a:defPPr>
+            <a:lvl1pPr>
+              <a:lnSpc>
+                <a:spcPct val="95000"/>
+              </a:lnSpc>
+              <a:defRPr sz="2200" b="1">
+                <a:solidFill>
+                  <a:srgbClr val="FF0000"/>
+                </a:solidFill>
+              </a:defRPr>
+            </a:lvl1pPr>
+          </a:lstStyle>
+          <a:p>
+            <a:r>
+              <a:rPr lang="en-IN" dirty="0"/>
+              <a:t>Acceptance Tests</a:t>
+            </a:r>
+          </a:p>
+        </p:txBody>
+      </p:sp>
+      <p:sp>
+        <p:nvSpPr>
+          <p:cNvPr id="8" name="TextBox 7">
+            <a:extLst>
+              <a:ext uri="{FF2B5EF4-FFF2-40B4-BE49-F238E27FC236}">
+                <a16:creationId xmlns:a16="http://schemas.microsoft.com/office/drawing/2014/main" id="{AF7D7161-C611-81F0-99F2-E8F153971D22}"/>
+              </a:ext>
+            </a:extLst>
+          </p:cNvPr>
+          <p:cNvSpPr txBox="1"/>
+          <p:nvPr/>
+        </p:nvSpPr>
+        <p:spPr>
+          <a:xfrm>
+            <a:off x="6437718" y="746615"/>
+            <a:ext cx="5201309" cy="3582776"/>
+          </a:xfrm>
+          <a:prstGeom prst="rect">
+            <a:avLst/>
+          </a:prstGeom>
+          <a:noFill/>
+        </p:spPr>
+        <p:txBody>
+          <a:bodyPr wrap="square" rtlCol="0">
+            <a:spAutoFit/>
+          </a:bodyPr>
+          <a:lstStyle>
+            <a:defPPr>
+              <a:defRPr lang="en-US"/>
+            </a:defPPr>
+            <a:lvl1pPr>
+              <a:lnSpc>
+                <a:spcPct val="150000"/>
+              </a:lnSpc>
+              <a:defRPr sz="2200"/>
+            </a:lvl1pPr>
+          </a:lstStyle>
+          <a:p>
+            <a:r>
+              <a:rPr lang="en-US" dirty="0"/>
+              <a:t>Acceptance Tests verify: Does the software satisfy customer requirements?</a:t>
+            </a:r>
+          </a:p>
+          <a:p>
+            <a:endParaRPr lang="en-US" dirty="0"/>
+          </a:p>
+          <a:p>
+            <a:r>
+              <a:rPr lang="en-US" dirty="0"/>
+              <a:t>If everything works then the Requirement is accepted.</a:t>
+            </a:r>
+          </a:p>
+          <a:p>
+            <a:endParaRPr lang="en-IN" dirty="0"/>
+          </a:p>
+        </p:txBody>
+      </p:sp>
+    </p:spTree>
+    <p:extLst>
+      <p:ext uri="{BB962C8B-B14F-4D97-AF65-F5344CB8AC3E}">
+        <p14:creationId xmlns:p14="http://schemas.microsoft.com/office/powerpoint/2010/main" val="1894387754"/>
+      </p:ext>
+    </p:extLst>
+  </p:cSld>
+  <p:clrMapOvr>
+    <a:masterClrMapping/>
+  </p:clrMapOvr>
+  <mc:AlternateContent xmlns:mc="http://schemas.openxmlformats.org/markup-compatibility/2006" xmlns:p14="http://schemas.microsoft.com/office/powerpoint/2010/main">
+    <mc:Choice Requires="p14">
+      <p:transition spd="med" p14:dur="700">
+        <p:fade/>
+      </p:transition>
+    </mc:Choice>
+    <mc:Fallback xmlns="">
+      <p:transition spd="med">
+        <p:fade/>
+      </p:transition>
+    </mc:Fallback>
+  </mc:AlternateContent>
+</p:sld>
+</file>
+
+<file path=ppt/slides/slide11.xml><?xml version="1.0" encoding="utf-8"?>
+<p:sld xmlns:a="http://schemas.openxmlformats.org/drawingml/2006/main" xmlns:r="http://schemas.openxmlformats.org/officeDocument/2006/relationships" xmlns:p="http://schemas.openxmlformats.org/presentationml/2006/main">
+  <p:cSld>
+    <p:spTree>
+      <p:nvGrpSpPr>
+        <p:cNvPr id="1" name=""/>
+        <p:cNvGrpSpPr/>
+        <p:nvPr/>
+      </p:nvGrpSpPr>
+      <p:grpSpPr>
+        <a:xfrm>
+          <a:off x="0" y="0"/>
+          <a:ext cx="0" cy="0"/>
+          <a:chOff x="0" y="0"/>
+          <a:chExt cx="0" cy="0"/>
+        </a:xfrm>
+      </p:grpSpPr>
+      <p:sp>
+        <p:nvSpPr>
+          <p:cNvPr id="4" name="TextBox 3">
+            <a:extLst>
+              <a:ext uri="{FF2B5EF4-FFF2-40B4-BE49-F238E27FC236}">
+                <a16:creationId xmlns:a16="http://schemas.microsoft.com/office/drawing/2014/main" id="{8B15D8FB-7C2B-386A-6B00-980DF9BB0694}"/>
+              </a:ext>
+            </a:extLst>
+          </p:cNvPr>
+          <p:cNvSpPr txBox="1"/>
+          <p:nvPr/>
+        </p:nvSpPr>
+        <p:spPr>
+          <a:xfrm>
+            <a:off x="909836" y="190340"/>
+            <a:ext cx="1754006" cy="413959"/>
+          </a:xfrm>
+          <a:prstGeom prst="rect">
+            <a:avLst/>
+          </a:prstGeom>
+          <a:noFill/>
+        </p:spPr>
+        <p:txBody>
+          <a:bodyPr wrap="none" rtlCol="0">
+            <a:spAutoFit/>
+          </a:bodyPr>
+          <a:lstStyle>
+            <a:defPPr>
+              <a:defRPr lang="en-US"/>
+            </a:defPPr>
+            <a:lvl1pPr>
+              <a:lnSpc>
+                <a:spcPct val="95000"/>
+              </a:lnSpc>
+              <a:defRPr sz="2200" b="1">
+                <a:solidFill>
+                  <a:srgbClr val="FF0000"/>
+                </a:solidFill>
+              </a:defRPr>
+            </a:lvl1pPr>
+          </a:lstStyle>
+          <a:p>
+            <a:r>
+              <a:rPr lang="en-IN" dirty="0"/>
+              <a:t>Refactoring</a:t>
+            </a:r>
+          </a:p>
+        </p:txBody>
+      </p:sp>
+      <p:sp>
+        <p:nvSpPr>
+          <p:cNvPr id="5" name="TextBox 4">
+            <a:extLst>
+              <a:ext uri="{FF2B5EF4-FFF2-40B4-BE49-F238E27FC236}">
+                <a16:creationId xmlns:a16="http://schemas.microsoft.com/office/drawing/2014/main" id="{AD2D76C5-93DB-0525-E68D-E6C8ED3DE431}"/>
+              </a:ext>
+            </a:extLst>
+          </p:cNvPr>
+          <p:cNvSpPr txBox="1"/>
+          <p:nvPr/>
+        </p:nvSpPr>
+        <p:spPr>
+          <a:xfrm>
+            <a:off x="909836" y="604299"/>
+            <a:ext cx="4176464" cy="1551450"/>
+          </a:xfrm>
+          <a:prstGeom prst="rect">
+            <a:avLst/>
+          </a:prstGeom>
+          <a:noFill/>
+        </p:spPr>
+        <p:txBody>
+          <a:bodyPr wrap="square" rtlCol="0">
+            <a:spAutoFit/>
+          </a:bodyPr>
+          <a:lstStyle>
+            <a:defPPr>
+              <a:defRPr lang="en-US"/>
+            </a:defPPr>
+            <a:lvl1pPr>
+              <a:lnSpc>
+                <a:spcPct val="150000"/>
+              </a:lnSpc>
+              <a:defRPr sz="2200"/>
+            </a:lvl1pPr>
+          </a:lstStyle>
+          <a:p>
+            <a:r>
+              <a:rPr lang="en-US" dirty="0"/>
+              <a:t>Refactoring means: Improving code without changing its functionality</a:t>
+            </a:r>
+            <a:endParaRPr lang="en-IN" dirty="0"/>
+          </a:p>
+        </p:txBody>
+      </p:sp>
+      <p:sp>
+        <p:nvSpPr>
+          <p:cNvPr id="6" name="TextBox 5">
+            <a:extLst>
+              <a:ext uri="{FF2B5EF4-FFF2-40B4-BE49-F238E27FC236}">
+                <a16:creationId xmlns:a16="http://schemas.microsoft.com/office/drawing/2014/main" id="{F6713975-A8C4-44C6-8610-84CDC4D30102}"/>
+              </a:ext>
+            </a:extLst>
+          </p:cNvPr>
+          <p:cNvSpPr txBox="1"/>
+          <p:nvPr/>
+        </p:nvSpPr>
+        <p:spPr>
+          <a:xfrm>
+            <a:off x="909836" y="2370073"/>
+            <a:ext cx="3562194" cy="4090607"/>
+          </a:xfrm>
+          <a:prstGeom prst="rect">
+            <a:avLst/>
+          </a:prstGeom>
+          <a:noFill/>
+        </p:spPr>
+        <p:txBody>
+          <a:bodyPr wrap="square" rtlCol="0">
+            <a:spAutoFit/>
+          </a:bodyPr>
+          <a:lstStyle>
+            <a:defPPr>
+              <a:defRPr lang="en-US"/>
+            </a:defPPr>
+            <a:lvl1pPr>
+              <a:lnSpc>
+                <a:spcPct val="150000"/>
+              </a:lnSpc>
+              <a:defRPr sz="2200"/>
+            </a:lvl1pPr>
+          </a:lstStyle>
+          <a:p>
+            <a:r>
+              <a:rPr lang="en-US" dirty="0"/>
+              <a:t>Bad Code</a:t>
+            </a:r>
+          </a:p>
+          <a:p>
+            <a:r>
+              <a:rPr lang="en-US" dirty="0"/>
+              <a:t>if(a==true)</a:t>
+            </a:r>
+          </a:p>
+          <a:p>
+            <a:endParaRPr lang="en-US" dirty="0"/>
+          </a:p>
+          <a:p>
+            <a:r>
+              <a:rPr lang="en-US" dirty="0"/>
+              <a:t>Better</a:t>
+            </a:r>
+          </a:p>
+          <a:p>
+            <a:r>
+              <a:rPr lang="en-US" dirty="0"/>
+              <a:t>if(a)</a:t>
+            </a:r>
+          </a:p>
+          <a:p>
+            <a:endParaRPr lang="en-US" dirty="0"/>
+          </a:p>
+          <a:p>
+            <a:r>
+              <a:rPr lang="en-US" dirty="0"/>
+              <a:t>Output remains same.</a:t>
+            </a:r>
+          </a:p>
+          <a:p>
+            <a:r>
+              <a:rPr lang="en-US" dirty="0"/>
+              <a:t>Code becomes cleaner.</a:t>
+            </a:r>
+            <a:endParaRPr lang="en-IN" dirty="0"/>
+          </a:p>
+        </p:txBody>
+      </p:sp>
+      <p:sp>
+        <p:nvSpPr>
+          <p:cNvPr id="8" name="TextBox 7">
+            <a:extLst>
+              <a:ext uri="{FF2B5EF4-FFF2-40B4-BE49-F238E27FC236}">
+                <a16:creationId xmlns:a16="http://schemas.microsoft.com/office/drawing/2014/main" id="{4131E5CC-4A1E-504B-C2CD-3E8B68FCD343}"/>
+              </a:ext>
+            </a:extLst>
+          </p:cNvPr>
+          <p:cNvSpPr txBox="1"/>
+          <p:nvPr/>
+        </p:nvSpPr>
+        <p:spPr>
+          <a:xfrm>
+            <a:off x="6958508" y="190340"/>
+            <a:ext cx="1782860" cy="413959"/>
+          </a:xfrm>
+          <a:prstGeom prst="rect">
+            <a:avLst/>
+          </a:prstGeom>
+          <a:noFill/>
+        </p:spPr>
+        <p:txBody>
+          <a:bodyPr wrap="none" rtlCol="0">
+            <a:spAutoFit/>
+          </a:bodyPr>
+          <a:lstStyle>
+            <a:defPPr>
+              <a:defRPr lang="en-US"/>
+            </a:defPPr>
+            <a:lvl1pPr>
+              <a:lnSpc>
+                <a:spcPct val="95000"/>
+              </a:lnSpc>
+              <a:defRPr sz="2200" b="1">
+                <a:solidFill>
+                  <a:srgbClr val="FF0000"/>
+                </a:solidFill>
+              </a:defRPr>
+            </a:lvl1pPr>
+          </a:lstStyle>
+          <a:p>
+            <a:r>
+              <a:rPr lang="en-IN" dirty="0"/>
+              <a:t>Automation</a:t>
+            </a:r>
+          </a:p>
+        </p:txBody>
+      </p:sp>
+      <p:sp>
+        <p:nvSpPr>
+          <p:cNvPr id="9" name="TextBox 8">
+            <a:extLst>
+              <a:ext uri="{FF2B5EF4-FFF2-40B4-BE49-F238E27FC236}">
+                <a16:creationId xmlns:a16="http://schemas.microsoft.com/office/drawing/2014/main" id="{900D8B8E-9068-AAEF-418B-54F2954FC7B7}"/>
+              </a:ext>
+            </a:extLst>
+          </p:cNvPr>
+          <p:cNvSpPr txBox="1"/>
+          <p:nvPr/>
+        </p:nvSpPr>
+        <p:spPr>
+          <a:xfrm>
+            <a:off x="6906571" y="604299"/>
+            <a:ext cx="3669594" cy="535788"/>
+          </a:xfrm>
+          <a:prstGeom prst="rect">
+            <a:avLst/>
+          </a:prstGeom>
+          <a:noFill/>
+        </p:spPr>
+        <p:txBody>
+          <a:bodyPr wrap="square" rtlCol="0">
+            <a:spAutoFit/>
+          </a:bodyPr>
+          <a:lstStyle>
+            <a:defPPr>
+              <a:defRPr lang="en-US"/>
+            </a:defPPr>
+            <a:lvl1pPr>
+              <a:lnSpc>
+                <a:spcPct val="150000"/>
+              </a:lnSpc>
+              <a:defRPr sz="2200"/>
+            </a:lvl1pPr>
+          </a:lstStyle>
+          <a:p>
+            <a:r>
+              <a:rPr lang="en-IN" dirty="0"/>
+              <a:t>Automate repetitive work</a:t>
+            </a:r>
+          </a:p>
+        </p:txBody>
+      </p:sp>
+      <p:sp>
+        <p:nvSpPr>
+          <p:cNvPr id="10" name="TextBox 9">
+            <a:extLst>
+              <a:ext uri="{FF2B5EF4-FFF2-40B4-BE49-F238E27FC236}">
+                <a16:creationId xmlns:a16="http://schemas.microsoft.com/office/drawing/2014/main" id="{5C07A90F-6BAD-9AB2-3CA0-FA04EE1B5C55}"/>
+              </a:ext>
+            </a:extLst>
+          </p:cNvPr>
+          <p:cNvSpPr txBox="1"/>
+          <p:nvPr/>
+        </p:nvSpPr>
+        <p:spPr>
+          <a:xfrm>
+            <a:off x="6958508" y="1380024"/>
+            <a:ext cx="3919663" cy="5106270"/>
+          </a:xfrm>
+          <a:prstGeom prst="rect">
+            <a:avLst/>
+          </a:prstGeom>
+          <a:noFill/>
+        </p:spPr>
+        <p:txBody>
+          <a:bodyPr wrap="square" rtlCol="0">
+            <a:spAutoFit/>
+          </a:bodyPr>
+          <a:lstStyle>
+            <a:defPPr>
+              <a:defRPr lang="en-US"/>
+            </a:defPPr>
+            <a:lvl1pPr>
+              <a:lnSpc>
+                <a:spcPct val="150000"/>
+              </a:lnSpc>
+              <a:defRPr sz="2200"/>
+            </a:lvl1pPr>
+          </a:lstStyle>
+          <a:p>
+            <a:r>
+              <a:rPr lang="en-US" b="1" dirty="0"/>
+              <a:t>Common Automation Tools</a:t>
+            </a:r>
+          </a:p>
+          <a:p>
+            <a:pPr marL="342900" indent="-342900">
+              <a:buFont typeface="Arial" panose="020B0604020202020204" pitchFamily="34" charset="0"/>
+              <a:buChar char="•"/>
+            </a:pPr>
+            <a:r>
+              <a:rPr lang="en-US" dirty="0"/>
+              <a:t>Selenium </a:t>
+            </a:r>
+          </a:p>
+          <a:p>
+            <a:pPr marL="342900" indent="-342900">
+              <a:buFont typeface="Arial" panose="020B0604020202020204" pitchFamily="34" charset="0"/>
+              <a:buChar char="•"/>
+            </a:pPr>
+            <a:r>
+              <a:rPr lang="en-US" dirty="0"/>
+              <a:t>Cypress </a:t>
+            </a:r>
+          </a:p>
+          <a:p>
+            <a:pPr marL="342900" indent="-342900">
+              <a:buFont typeface="Arial" panose="020B0604020202020204" pitchFamily="34" charset="0"/>
+              <a:buChar char="•"/>
+            </a:pPr>
+            <a:r>
+              <a:rPr lang="en-US" dirty="0"/>
+              <a:t>Playwright </a:t>
+            </a:r>
+          </a:p>
+          <a:p>
+            <a:pPr marL="342900" indent="-342900">
+              <a:buFont typeface="Arial" panose="020B0604020202020204" pitchFamily="34" charset="0"/>
+              <a:buChar char="•"/>
+            </a:pPr>
+            <a:r>
+              <a:rPr lang="en-US" dirty="0"/>
+              <a:t>JUnit </a:t>
+            </a:r>
+          </a:p>
+          <a:p>
+            <a:pPr marL="342900" indent="-342900">
+              <a:buFont typeface="Arial" panose="020B0604020202020204" pitchFamily="34" charset="0"/>
+              <a:buChar char="•"/>
+            </a:pPr>
+            <a:r>
+              <a:rPr lang="en-US" dirty="0" err="1"/>
+              <a:t>NUnit</a:t>
+            </a:r>
+            <a:endParaRPr lang="en-US" dirty="0"/>
+          </a:p>
+          <a:p>
+            <a:pPr marL="342900" indent="-342900">
+              <a:buFont typeface="Arial" panose="020B0604020202020204" pitchFamily="34" charset="0"/>
+              <a:buChar char="•"/>
+            </a:pPr>
+            <a:r>
+              <a:rPr lang="en-US" dirty="0"/>
+              <a:t>TestNG </a:t>
+            </a:r>
+          </a:p>
+          <a:p>
+            <a:pPr marL="342900" indent="-342900">
+              <a:buFont typeface="Arial" panose="020B0604020202020204" pitchFamily="34" charset="0"/>
+              <a:buChar char="•"/>
+            </a:pPr>
+            <a:r>
+              <a:rPr lang="en-US" dirty="0" err="1"/>
+              <a:t>PyTest</a:t>
+            </a:r>
+            <a:r>
+              <a:rPr lang="en-US" dirty="0"/>
+              <a:t> </a:t>
+            </a:r>
+          </a:p>
+          <a:p>
+            <a:pPr marL="342900" indent="-342900">
+              <a:buFont typeface="Arial" panose="020B0604020202020204" pitchFamily="34" charset="0"/>
+              <a:buChar char="•"/>
+            </a:pPr>
+            <a:r>
+              <a:rPr lang="en-US" dirty="0"/>
+              <a:t>Postman (API Testing)</a:t>
+            </a:r>
+          </a:p>
+          <a:p>
+            <a:endParaRPr lang="en-IN" dirty="0"/>
+          </a:p>
+        </p:txBody>
+      </p:sp>
+    </p:spTree>
+    <p:extLst>
+      <p:ext uri="{BB962C8B-B14F-4D97-AF65-F5344CB8AC3E}">
+        <p14:creationId xmlns:p14="http://schemas.microsoft.com/office/powerpoint/2010/main" val="3570444775"/>
+      </p:ext>
+    </p:extLst>
+  </p:cSld>
+  <p:clrMapOvr>
+    <a:masterClrMapping/>
+  </p:clrMapOvr>
+  <mc:AlternateContent xmlns:mc="http://schemas.openxmlformats.org/markup-compatibility/2006" xmlns:p14="http://schemas.microsoft.com/office/powerpoint/2010/main">
+    <mc:Choice Requires="p14">
+      <p:transition spd="med" p14:dur="700">
+        <p:fade/>
+      </p:transition>
+    </mc:Choice>
+    <mc:Fallback xmlns="">
+      <p:transition spd="med">
+        <p:fade/>
+      </p:transition>
+    </mc:Fallback>
+  </mc:AlternateContent>
+</p:sld>
+</file>
+
+<file path=ppt/slides/slide12.xml><?xml version="1.0" encoding="utf-8"?>
+<p:sld xmlns:a="http://schemas.openxmlformats.org/drawingml/2006/main" xmlns:r="http://schemas.openxmlformats.org/officeDocument/2006/relationships" xmlns:p="http://schemas.openxmlformats.org/presentationml/2006/main">
+  <p:cSld>
+    <p:spTree>
+      <p:nvGrpSpPr>
+        <p:cNvPr id="1" name=""/>
+        <p:cNvGrpSpPr/>
+        <p:nvPr/>
+      </p:nvGrpSpPr>
+      <p:grpSpPr>
+        <a:xfrm>
+          <a:off x="0" y="0"/>
+          <a:ext cx="0" cy="0"/>
+          <a:chOff x="0" y="0"/>
+          <a:chExt cx="0" cy="0"/>
+        </a:xfrm>
+      </p:grpSpPr>
+      <p:sp>
+        <p:nvSpPr>
+          <p:cNvPr id="4" name="TextBox 3">
+            <a:extLst>
+              <a:ext uri="{FF2B5EF4-FFF2-40B4-BE49-F238E27FC236}">
+                <a16:creationId xmlns:a16="http://schemas.microsoft.com/office/drawing/2014/main" id="{61E6645A-8D24-AA37-0ED3-9F43D29AD8B8}"/>
+              </a:ext>
+            </a:extLst>
+          </p:cNvPr>
+          <p:cNvSpPr txBox="1"/>
+          <p:nvPr/>
+        </p:nvSpPr>
+        <p:spPr>
+          <a:xfrm>
+            <a:off x="981844" y="260648"/>
+            <a:ext cx="3563796" cy="413959"/>
+          </a:xfrm>
+          <a:prstGeom prst="rect">
+            <a:avLst/>
+          </a:prstGeom>
+          <a:noFill/>
+        </p:spPr>
+        <p:txBody>
+          <a:bodyPr wrap="none" rtlCol="0">
+            <a:spAutoFit/>
+          </a:bodyPr>
+          <a:lstStyle>
+            <a:defPPr>
+              <a:defRPr lang="en-US"/>
+            </a:defPPr>
+            <a:lvl1pPr>
+              <a:lnSpc>
+                <a:spcPct val="95000"/>
+              </a:lnSpc>
+              <a:defRPr sz="2200" b="1">
+                <a:solidFill>
+                  <a:srgbClr val="FF0000"/>
+                </a:solidFill>
+              </a:defRPr>
+            </a:lvl1pPr>
+          </a:lstStyle>
+          <a:p>
+            <a:r>
+              <a:rPr lang="en-IN" dirty="0"/>
+              <a:t>Test Automation Pyramid</a:t>
+            </a:r>
+          </a:p>
+        </p:txBody>
+      </p:sp>
+      <p:sp>
+        <p:nvSpPr>
+          <p:cNvPr id="5" name="TextBox 4">
+            <a:extLst>
+              <a:ext uri="{FF2B5EF4-FFF2-40B4-BE49-F238E27FC236}">
+                <a16:creationId xmlns:a16="http://schemas.microsoft.com/office/drawing/2014/main" id="{BC1EEE02-3242-A8AA-6C7E-3C68F52BDED4}"/>
+              </a:ext>
+            </a:extLst>
+          </p:cNvPr>
+          <p:cNvSpPr txBox="1"/>
+          <p:nvPr/>
+        </p:nvSpPr>
+        <p:spPr>
+          <a:xfrm>
+            <a:off x="909836" y="764704"/>
+            <a:ext cx="10369152" cy="5106270"/>
+          </a:xfrm>
+          <a:prstGeom prst="rect">
+            <a:avLst/>
+          </a:prstGeom>
+          <a:noFill/>
+        </p:spPr>
+        <p:txBody>
+          <a:bodyPr wrap="square" rtlCol="0">
+            <a:spAutoFit/>
+          </a:bodyPr>
+          <a:lstStyle>
+            <a:defPPr>
+              <a:defRPr lang="en-US"/>
+            </a:defPPr>
+            <a:lvl1pPr>
+              <a:lnSpc>
+                <a:spcPct val="150000"/>
+              </a:lnSpc>
+              <a:defRPr sz="2200"/>
+            </a:lvl1pPr>
+          </a:lstStyle>
+          <a:p>
+            <a:r>
+              <a:rPr lang="en-US" dirty="0"/>
+              <a:t>The Test Automation Pyramid is a strategy that recommends having many fast Unit Tests at the bottom, fewer Integration Tests in the middle, and a small number of slower UI/End-to-End Tests at the top</a:t>
+            </a:r>
+          </a:p>
+          <a:p>
+            <a:endParaRPr lang="en-US" dirty="0"/>
+          </a:p>
+          <a:p>
+            <a:r>
+              <a:rPr lang="en-US" dirty="0"/>
+              <a:t>The Test Automation Pyramid tells us:</a:t>
+            </a:r>
+          </a:p>
+          <a:p>
+            <a:r>
+              <a:rPr lang="en-US" dirty="0"/>
+              <a:t>Write lots of small, fast tests and fewer large, slow tests</a:t>
+            </a:r>
+          </a:p>
+          <a:p>
+            <a:endParaRPr lang="en-US" dirty="0"/>
+          </a:p>
+          <a:p>
+            <a:r>
+              <a:rPr lang="en-US" dirty="0"/>
+              <a:t>The </a:t>
+            </a:r>
+            <a:r>
+              <a:rPr lang="en-US" b="1" dirty="0"/>
+              <a:t>bottom is large</a:t>
+            </a:r>
+            <a:r>
+              <a:rPr lang="en-US" dirty="0"/>
+              <a:t> because we should have </a:t>
+            </a:r>
+            <a:r>
+              <a:rPr lang="en-US" b="1" dirty="0"/>
+              <a:t>many Unit Tests</a:t>
+            </a:r>
+            <a:r>
+              <a:rPr lang="en-US" dirty="0"/>
+              <a:t>.</a:t>
+            </a:r>
+          </a:p>
+          <a:p>
+            <a:r>
+              <a:rPr lang="en-US" dirty="0"/>
+              <a:t>The </a:t>
+            </a:r>
+            <a:r>
+              <a:rPr lang="en-US" b="1" dirty="0"/>
+              <a:t>top is small</a:t>
+            </a:r>
+            <a:r>
+              <a:rPr lang="en-US" dirty="0"/>
+              <a:t> because we should have </a:t>
+            </a:r>
+            <a:r>
+              <a:rPr lang="en-US" b="1" dirty="0"/>
+              <a:t>fewer UI Tests</a:t>
+            </a:r>
+            <a:endParaRPr lang="en-US" dirty="0"/>
+          </a:p>
+          <a:p>
+            <a:endParaRPr lang="en-IN" dirty="0"/>
+          </a:p>
+        </p:txBody>
+      </p:sp>
+    </p:spTree>
+    <p:extLst>
+      <p:ext uri="{BB962C8B-B14F-4D97-AF65-F5344CB8AC3E}">
+        <p14:creationId xmlns:p14="http://schemas.microsoft.com/office/powerpoint/2010/main" val="2452234457"/>
+      </p:ext>
+    </p:extLst>
+  </p:cSld>
+  <p:clrMapOvr>
+    <a:masterClrMapping/>
+  </p:clrMapOvr>
+  <mc:AlternateContent xmlns:mc="http://schemas.openxmlformats.org/markup-compatibility/2006" xmlns:p14="http://schemas.microsoft.com/office/powerpoint/2010/main">
+    <mc:Choice Requires="p14">
+      <p:transition spd="med" p14:dur="700">
+        <p:fade/>
+      </p:transition>
+    </mc:Choice>
+    <mc:Fallback xmlns="">
+      <p:transition spd="med">
+        <p:fade/>
+      </p:transition>
+    </mc:Fallback>
+  </mc:AlternateContent>
+</p:sld>
+</file>
+
+<file path=ppt/slides/slide13.xml><?xml version="1.0" encoding="utf-8"?>
+<p:sld xmlns:a="http://schemas.openxmlformats.org/drawingml/2006/main" xmlns:r="http://schemas.openxmlformats.org/officeDocument/2006/relationships" xmlns:p="http://schemas.openxmlformats.org/presentationml/2006/main">
+  <p:cSld>
+    <p:spTree>
+      <p:nvGrpSpPr>
+        <p:cNvPr id="1" name=""/>
+        <p:cNvGrpSpPr/>
+        <p:nvPr/>
+      </p:nvGrpSpPr>
+      <p:grpSpPr>
+        <a:xfrm>
+          <a:off x="0" y="0"/>
+          <a:ext cx="0" cy="0"/>
+          <a:chOff x="0" y="0"/>
+          <a:chExt cx="0" cy="0"/>
+        </a:xfrm>
+      </p:grpSpPr>
+      <p:pic>
+        <p:nvPicPr>
+          <p:cNvPr id="5122" name="Picture 2" descr="Test Automation Pyramid: Guide, Layers &amp; Best Practices">
+            <a:extLst>
+              <a:ext uri="{FF2B5EF4-FFF2-40B4-BE49-F238E27FC236}">
+                <a16:creationId xmlns:a16="http://schemas.microsoft.com/office/drawing/2014/main" id="{A9107959-7742-ABB3-9112-95168316C679}"/>
+              </a:ext>
+            </a:extLst>
+          </p:cNvPr>
+          <p:cNvPicPr>
+            <a:picLocks noChangeAspect="1" noChangeArrowheads="1"/>
+          </p:cNvPicPr>
+          <p:nvPr/>
+        </p:nvPicPr>
+        <p:blipFill>
+          <a:blip r:embed="rId2">
+            <a:extLst>
+              <a:ext uri="{28A0092B-C50C-407E-A947-70E740481C1C}">
+                <a14:useLocalDpi xmlns:a14="http://schemas.microsoft.com/office/drawing/2010/main" val="0"/>
+              </a:ext>
+            </a:extLst>
+          </a:blip>
+          <a:srcRect/>
+          <a:stretch>
+            <a:fillRect/>
+          </a:stretch>
+        </p:blipFill>
+        <p:spPr bwMode="auto">
+          <a:xfrm>
+            <a:off x="1845940" y="116632"/>
+            <a:ext cx="8435170" cy="6408712"/>
+          </a:xfrm>
+          <a:prstGeom prst="rect">
+            <a:avLst/>
+          </a:prstGeom>
+          <a:noFill/>
+          <a:extLst>
+            <a:ext uri="{909E8E84-426E-40DD-AFC4-6F175D3DCCD1}">
+              <a14:hiddenFill xmlns:a14="http://schemas.microsoft.com/office/drawing/2010/main">
+                <a:solidFill>
+                  <a:srgbClr val="FFFFFF"/>
+                </a:solidFill>
+              </a14:hiddenFill>
+            </a:ext>
+          </a:extLst>
+        </p:spPr>
+      </p:pic>
+    </p:spTree>
+    <p:extLst>
+      <p:ext uri="{BB962C8B-B14F-4D97-AF65-F5344CB8AC3E}">
+        <p14:creationId xmlns:p14="http://schemas.microsoft.com/office/powerpoint/2010/main" val="3715886984"/>
+      </p:ext>
+    </p:extLst>
+  </p:cSld>
+  <p:clrMapOvr>
+    <a:masterClrMapping/>
+  </p:clrMapOvr>
+  <mc:AlternateContent xmlns:mc="http://schemas.openxmlformats.org/markup-compatibility/2006" xmlns:p14="http://schemas.microsoft.com/office/powerpoint/2010/main">
+    <mc:Choice Requires="p14">
+      <p:transition spd="med" p14:dur="700">
+        <p:fade/>
+      </p:transition>
+    </mc:Choice>
+    <mc:Fallback xmlns="">
+      <p:transition spd="med">
+        <p:fade/>
+      </p:transition>
+    </mc:Fallback>
+  </mc:AlternateContent>
+</p:sld>
+</file>
+
+<file path=ppt/slides/slide14.xml><?xml version="1.0" encoding="utf-8"?>
+<p:sld xmlns:a="http://schemas.openxmlformats.org/drawingml/2006/main" xmlns:r="http://schemas.openxmlformats.org/officeDocument/2006/relationships" xmlns:p="http://schemas.openxmlformats.org/presentationml/2006/main">
+  <p:cSld>
+    <p:spTree>
+      <p:nvGrpSpPr>
+        <p:cNvPr id="1" name=""/>
+        <p:cNvGrpSpPr/>
+        <p:nvPr/>
+      </p:nvGrpSpPr>
+      <p:grpSpPr>
+        <a:xfrm>
+          <a:off x="0" y="0"/>
+          <a:ext cx="0" cy="0"/>
+          <a:chOff x="0" y="0"/>
+          <a:chExt cx="0" cy="0"/>
+        </a:xfrm>
+      </p:grpSpPr>
+      <p:sp>
+        <p:nvSpPr>
+          <p:cNvPr id="4" name="TextBox 3">
+            <a:extLst>
+              <a:ext uri="{FF2B5EF4-FFF2-40B4-BE49-F238E27FC236}">
+                <a16:creationId xmlns:a16="http://schemas.microsoft.com/office/drawing/2014/main" id="{39579D0D-692F-50D3-6EE9-5A309B9C5942}"/>
+              </a:ext>
+            </a:extLst>
+          </p:cNvPr>
+          <p:cNvSpPr txBox="1"/>
+          <p:nvPr/>
+        </p:nvSpPr>
+        <p:spPr>
+          <a:xfrm>
+            <a:off x="998985" y="836712"/>
+            <a:ext cx="2504212" cy="413959"/>
+          </a:xfrm>
+          <a:prstGeom prst="rect">
+            <a:avLst/>
+          </a:prstGeom>
+          <a:noFill/>
+        </p:spPr>
+        <p:txBody>
+          <a:bodyPr wrap="none" rtlCol="0">
+            <a:spAutoFit/>
+          </a:bodyPr>
+          <a:lstStyle>
+            <a:defPPr>
+              <a:defRPr lang="en-US"/>
+            </a:defPPr>
+            <a:lvl1pPr>
+              <a:lnSpc>
+                <a:spcPct val="95000"/>
+              </a:lnSpc>
+              <a:defRPr sz="2200" b="1">
+                <a:solidFill>
+                  <a:srgbClr val="FF0000"/>
+                </a:solidFill>
+              </a:defRPr>
+            </a:lvl1pPr>
+          </a:lstStyle>
+          <a:p>
+            <a:r>
+              <a:rPr lang="en-IN" dirty="0"/>
+              <a:t>Level 1: Unit Tests</a:t>
+            </a:r>
+          </a:p>
+        </p:txBody>
+      </p:sp>
+      <p:sp>
+        <p:nvSpPr>
+          <p:cNvPr id="5" name="TextBox 4">
+            <a:extLst>
+              <a:ext uri="{FF2B5EF4-FFF2-40B4-BE49-F238E27FC236}">
+                <a16:creationId xmlns:a16="http://schemas.microsoft.com/office/drawing/2014/main" id="{0C6481D4-D042-38DC-7D29-67C415C607E2}"/>
+              </a:ext>
+            </a:extLst>
+          </p:cNvPr>
+          <p:cNvSpPr txBox="1"/>
+          <p:nvPr/>
+        </p:nvSpPr>
+        <p:spPr>
+          <a:xfrm>
+            <a:off x="981844" y="260648"/>
+            <a:ext cx="3563796" cy="413959"/>
+          </a:xfrm>
+          <a:prstGeom prst="rect">
+            <a:avLst/>
+          </a:prstGeom>
+          <a:noFill/>
+        </p:spPr>
+        <p:txBody>
+          <a:bodyPr wrap="none" rtlCol="0">
+            <a:spAutoFit/>
+          </a:bodyPr>
+          <a:lstStyle>
+            <a:defPPr>
+              <a:defRPr lang="en-US"/>
+            </a:defPPr>
+            <a:lvl1pPr>
+              <a:lnSpc>
+                <a:spcPct val="95000"/>
+              </a:lnSpc>
+              <a:defRPr sz="2200" b="1">
+                <a:solidFill>
+                  <a:srgbClr val="FF0000"/>
+                </a:solidFill>
+              </a:defRPr>
+            </a:lvl1pPr>
+          </a:lstStyle>
+          <a:p>
+            <a:r>
+              <a:rPr lang="en-IN" dirty="0"/>
+              <a:t>Test Automation Pyramid</a:t>
+            </a:r>
+          </a:p>
+        </p:txBody>
+      </p:sp>
+      <p:sp>
+        <p:nvSpPr>
+          <p:cNvPr id="6" name="TextBox 5">
+            <a:extLst>
+              <a:ext uri="{FF2B5EF4-FFF2-40B4-BE49-F238E27FC236}">
+                <a16:creationId xmlns:a16="http://schemas.microsoft.com/office/drawing/2014/main" id="{DAE6BDA5-F4B3-6F3D-AE6E-2DFC786DBF0A}"/>
+              </a:ext>
+            </a:extLst>
+          </p:cNvPr>
+          <p:cNvSpPr txBox="1"/>
+          <p:nvPr/>
+        </p:nvSpPr>
+        <p:spPr>
+          <a:xfrm>
+            <a:off x="967544" y="1340768"/>
+            <a:ext cx="10576934" cy="1551450"/>
+          </a:xfrm>
+          <a:prstGeom prst="rect">
+            <a:avLst/>
+          </a:prstGeom>
+          <a:noFill/>
+        </p:spPr>
+        <p:txBody>
+          <a:bodyPr wrap="square" rtlCol="0">
+            <a:spAutoFit/>
+          </a:bodyPr>
+          <a:lstStyle>
+            <a:defPPr>
+              <a:defRPr lang="en-US"/>
+            </a:defPPr>
+            <a:lvl1pPr>
+              <a:lnSpc>
+                <a:spcPct val="150000"/>
+              </a:lnSpc>
+              <a:defRPr sz="2200"/>
+            </a:lvl1pPr>
+          </a:lstStyle>
+          <a:p>
+            <a:r>
+              <a:rPr lang="en-US" dirty="0"/>
+              <a:t>Unit testing checks the smallest piece of code, usually a function or method.</a:t>
+            </a:r>
+          </a:p>
+          <a:p>
+            <a:r>
+              <a:rPr lang="en-US" dirty="0"/>
+              <a:t>Imagine you are developing a food-delivery application.</a:t>
+            </a:r>
+          </a:p>
+          <a:p>
+            <a:endParaRPr lang="en-IN" dirty="0"/>
+          </a:p>
+        </p:txBody>
+      </p:sp>
+      <p:sp>
+        <p:nvSpPr>
+          <p:cNvPr id="7" name="TextBox 6">
+            <a:extLst>
+              <a:ext uri="{FF2B5EF4-FFF2-40B4-BE49-F238E27FC236}">
+                <a16:creationId xmlns:a16="http://schemas.microsoft.com/office/drawing/2014/main" id="{C25292B4-CB47-3881-6826-F10DE310C0B8}"/>
+              </a:ext>
+            </a:extLst>
+          </p:cNvPr>
+          <p:cNvSpPr txBox="1"/>
+          <p:nvPr/>
+        </p:nvSpPr>
+        <p:spPr>
+          <a:xfrm>
+            <a:off x="946578" y="2509787"/>
+            <a:ext cx="3634328" cy="3582776"/>
+          </a:xfrm>
+          <a:prstGeom prst="rect">
+            <a:avLst/>
+          </a:prstGeom>
+          <a:noFill/>
+        </p:spPr>
+        <p:txBody>
+          <a:bodyPr wrap="square" rtlCol="0">
+            <a:spAutoFit/>
+          </a:bodyPr>
+          <a:lstStyle>
+            <a:defPPr>
+              <a:defRPr lang="en-US"/>
+            </a:defPPr>
+            <a:lvl1pPr>
+              <a:lnSpc>
+                <a:spcPct val="150000"/>
+              </a:lnSpc>
+              <a:defRPr sz="2200"/>
+            </a:lvl1pPr>
+          </a:lstStyle>
+          <a:p>
+            <a:r>
+              <a:rPr lang="en-US" dirty="0"/>
+              <a:t>You have a function:</a:t>
+            </a:r>
+          </a:p>
+          <a:p>
+            <a:r>
+              <a:rPr lang="en-US" dirty="0" err="1"/>
+              <a:t>calculateTotal</a:t>
+            </a:r>
+            <a:r>
+              <a:rPr lang="en-US" dirty="0"/>
+              <a:t>(price, tax)</a:t>
+            </a:r>
+          </a:p>
+          <a:p>
+            <a:endParaRPr lang="en-US" dirty="0"/>
+          </a:p>
+          <a:p>
+            <a:r>
+              <a:rPr lang="en-US" dirty="0"/>
+              <a:t>You can test:</a:t>
+            </a:r>
+          </a:p>
+          <a:p>
+            <a:r>
+              <a:rPr lang="en-US" dirty="0" err="1"/>
+              <a:t>calculateTotal</a:t>
+            </a:r>
+            <a:r>
+              <a:rPr lang="en-US" dirty="0"/>
+              <a:t>(100, 10)</a:t>
+            </a:r>
+          </a:p>
+          <a:p>
+            <a:endParaRPr lang="en-US" dirty="0"/>
+          </a:p>
+          <a:p>
+            <a:r>
+              <a:rPr lang="en-US" dirty="0"/>
+              <a:t>Expected = 110</a:t>
+            </a:r>
+          </a:p>
+        </p:txBody>
+      </p:sp>
+      <p:sp>
+        <p:nvSpPr>
+          <p:cNvPr id="9" name="TextBox 8">
+            <a:extLst>
+              <a:ext uri="{FF2B5EF4-FFF2-40B4-BE49-F238E27FC236}">
+                <a16:creationId xmlns:a16="http://schemas.microsoft.com/office/drawing/2014/main" id="{2435AA0C-D57E-485D-E677-6EB0010C3A86}"/>
+              </a:ext>
+            </a:extLst>
+          </p:cNvPr>
+          <p:cNvSpPr txBox="1"/>
+          <p:nvPr/>
+        </p:nvSpPr>
+        <p:spPr>
+          <a:xfrm>
+            <a:off x="6256011" y="4077072"/>
+            <a:ext cx="2659702" cy="812530"/>
+          </a:xfrm>
+          <a:prstGeom prst="rect">
+            <a:avLst/>
+          </a:prstGeom>
+          <a:noFill/>
+        </p:spPr>
+        <p:txBody>
+          <a:bodyPr wrap="none" rtlCol="0">
+            <a:spAutoFit/>
+          </a:bodyPr>
+          <a:lstStyle/>
+          <a:p>
+            <a:pPr>
+              <a:lnSpc>
+                <a:spcPct val="95000"/>
+              </a:lnSpc>
+            </a:pPr>
+            <a:r>
+              <a:rPr lang="en-US" b="1" dirty="0"/>
+              <a:t>That's a Unit Test.</a:t>
+            </a:r>
+            <a:endParaRPr lang="en-IN" b="1" dirty="0"/>
+          </a:p>
+          <a:p>
+            <a:pPr>
+              <a:lnSpc>
+                <a:spcPct val="95000"/>
+              </a:lnSpc>
+            </a:pPr>
+            <a:endParaRPr lang="en-IN" b="1" dirty="0"/>
+          </a:p>
+        </p:txBody>
+      </p:sp>
+    </p:spTree>
+    <p:extLst>
+      <p:ext uri="{BB962C8B-B14F-4D97-AF65-F5344CB8AC3E}">
+        <p14:creationId xmlns:p14="http://schemas.microsoft.com/office/powerpoint/2010/main" val="2578182227"/>
+      </p:ext>
+    </p:extLst>
+  </p:cSld>
+  <p:clrMapOvr>
+    <a:masterClrMapping/>
+  </p:clrMapOvr>
+  <mc:AlternateContent xmlns:mc="http://schemas.openxmlformats.org/markup-compatibility/2006" xmlns:p14="http://schemas.microsoft.com/office/powerpoint/2010/main">
+    <mc:Choice Requires="p14">
+      <p:transition spd="med" p14:dur="700">
+        <p:fade/>
+      </p:transition>
+    </mc:Choice>
+    <mc:Fallback xmlns="">
+      <p:transition spd="med">
+        <p:fade/>
+      </p:transition>
+    </mc:Fallback>
+  </mc:AlternateContent>
+</p:sld>
+</file>
+
+<file path=ppt/slides/slide15.xml><?xml version="1.0" encoding="utf-8"?>
+<p:sld xmlns:a="http://schemas.openxmlformats.org/drawingml/2006/main" xmlns:r="http://schemas.openxmlformats.org/officeDocument/2006/relationships" xmlns:p="http://schemas.openxmlformats.org/presentationml/2006/main">
+  <p:cSld>
+    <p:spTree>
+      <p:nvGrpSpPr>
+        <p:cNvPr id="1" name=""/>
+        <p:cNvGrpSpPr/>
+        <p:nvPr/>
+      </p:nvGrpSpPr>
+      <p:grpSpPr>
+        <a:xfrm>
+          <a:off x="0" y="0"/>
+          <a:ext cx="0" cy="0"/>
+          <a:chOff x="0" y="0"/>
+          <a:chExt cx="0" cy="0"/>
+        </a:xfrm>
+      </p:grpSpPr>
+      <p:sp>
+        <p:nvSpPr>
+          <p:cNvPr id="4" name="TextBox 3">
+            <a:extLst>
+              <a:ext uri="{FF2B5EF4-FFF2-40B4-BE49-F238E27FC236}">
+                <a16:creationId xmlns:a16="http://schemas.microsoft.com/office/drawing/2014/main" id="{6C6FF3E8-08A7-35EC-3862-48885BD6F089}"/>
+              </a:ext>
+            </a:extLst>
+          </p:cNvPr>
+          <p:cNvSpPr txBox="1"/>
+          <p:nvPr/>
+        </p:nvSpPr>
+        <p:spPr>
+          <a:xfrm>
+            <a:off x="981844" y="836712"/>
+            <a:ext cx="3770584" cy="443198"/>
+          </a:xfrm>
+          <a:prstGeom prst="rect">
+            <a:avLst/>
+          </a:prstGeom>
+          <a:noFill/>
+        </p:spPr>
+        <p:txBody>
+          <a:bodyPr wrap="none" rtlCol="0">
+            <a:spAutoFit/>
+          </a:bodyPr>
+          <a:lstStyle>
+            <a:defPPr>
+              <a:defRPr lang="en-US"/>
+            </a:defPPr>
+            <a:lvl1pPr>
+              <a:lnSpc>
+                <a:spcPct val="95000"/>
+              </a:lnSpc>
+              <a:defRPr sz="2200" b="1">
+                <a:solidFill>
+                  <a:srgbClr val="FF0000"/>
+                </a:solidFill>
+              </a:defRPr>
+            </a:lvl1pPr>
+          </a:lstStyle>
+          <a:p>
+            <a:r>
+              <a:rPr lang="en-IN" dirty="0"/>
+              <a:t>Level 2: Integration Tests</a:t>
+            </a:r>
+          </a:p>
+        </p:txBody>
+      </p:sp>
+      <p:sp>
+        <p:nvSpPr>
+          <p:cNvPr id="5" name="TextBox 4">
+            <a:extLst>
+              <a:ext uri="{FF2B5EF4-FFF2-40B4-BE49-F238E27FC236}">
+                <a16:creationId xmlns:a16="http://schemas.microsoft.com/office/drawing/2014/main" id="{B8B698BD-3618-D326-96FB-E2E25966244F}"/>
+              </a:ext>
+            </a:extLst>
+          </p:cNvPr>
+          <p:cNvSpPr txBox="1"/>
+          <p:nvPr/>
+        </p:nvSpPr>
+        <p:spPr>
+          <a:xfrm>
+            <a:off x="981844" y="260648"/>
+            <a:ext cx="3563796" cy="413959"/>
+          </a:xfrm>
+          <a:prstGeom prst="rect">
+            <a:avLst/>
+          </a:prstGeom>
+          <a:noFill/>
+        </p:spPr>
+        <p:txBody>
+          <a:bodyPr wrap="none" rtlCol="0">
+            <a:spAutoFit/>
+          </a:bodyPr>
+          <a:lstStyle>
+            <a:defPPr>
+              <a:defRPr lang="en-US"/>
+            </a:defPPr>
+            <a:lvl1pPr>
+              <a:lnSpc>
+                <a:spcPct val="95000"/>
+              </a:lnSpc>
+              <a:defRPr sz="2200" b="1">
+                <a:solidFill>
+                  <a:srgbClr val="FF0000"/>
+                </a:solidFill>
+              </a:defRPr>
+            </a:lvl1pPr>
+          </a:lstStyle>
+          <a:p>
+            <a:r>
+              <a:rPr lang="en-IN" dirty="0"/>
+              <a:t>Test Automation Pyramid</a:t>
+            </a:r>
+          </a:p>
+        </p:txBody>
+      </p:sp>
+      <p:sp>
+        <p:nvSpPr>
+          <p:cNvPr id="6" name="TextBox 5">
+            <a:extLst>
+              <a:ext uri="{FF2B5EF4-FFF2-40B4-BE49-F238E27FC236}">
+                <a16:creationId xmlns:a16="http://schemas.microsoft.com/office/drawing/2014/main" id="{AFD259E7-11CB-0B4B-0EA8-8330327FC75A}"/>
+              </a:ext>
+            </a:extLst>
+          </p:cNvPr>
+          <p:cNvSpPr txBox="1"/>
+          <p:nvPr/>
+        </p:nvSpPr>
+        <p:spPr>
+          <a:xfrm>
+            <a:off x="966327" y="1317824"/>
+            <a:ext cx="10009112" cy="1043619"/>
+          </a:xfrm>
+          <a:prstGeom prst="rect">
+            <a:avLst/>
+          </a:prstGeom>
+          <a:noFill/>
+        </p:spPr>
+        <p:txBody>
+          <a:bodyPr wrap="square" rtlCol="0">
+            <a:spAutoFit/>
+          </a:bodyPr>
+          <a:lstStyle>
+            <a:defPPr>
+              <a:defRPr lang="en-US"/>
+            </a:defPPr>
+            <a:lvl1pPr>
+              <a:lnSpc>
+                <a:spcPct val="150000"/>
+              </a:lnSpc>
+              <a:defRPr sz="2200"/>
+            </a:lvl1pPr>
+          </a:lstStyle>
+          <a:p>
+            <a:r>
+              <a:rPr lang="en-US" dirty="0"/>
+              <a:t>Now we know individual components work. But do they work together?</a:t>
+            </a:r>
+          </a:p>
+          <a:p>
+            <a:endParaRPr lang="en-IN" dirty="0"/>
+          </a:p>
+        </p:txBody>
+      </p:sp>
+      <p:sp>
+        <p:nvSpPr>
+          <p:cNvPr id="7" name="TextBox 6">
+            <a:extLst>
+              <a:ext uri="{FF2B5EF4-FFF2-40B4-BE49-F238E27FC236}">
+                <a16:creationId xmlns:a16="http://schemas.microsoft.com/office/drawing/2014/main" id="{DBB76731-F6AE-73C6-F53A-536B7D361270}"/>
+              </a:ext>
+            </a:extLst>
+          </p:cNvPr>
+          <p:cNvSpPr txBox="1"/>
+          <p:nvPr/>
+        </p:nvSpPr>
+        <p:spPr>
+          <a:xfrm>
+            <a:off x="981844" y="1934585"/>
+            <a:ext cx="2824812" cy="2059282"/>
+          </a:xfrm>
+          <a:prstGeom prst="rect">
+            <a:avLst/>
+          </a:prstGeom>
+          <a:noFill/>
+        </p:spPr>
+        <p:txBody>
+          <a:bodyPr wrap="square" rtlCol="0">
+            <a:spAutoFit/>
+          </a:bodyPr>
+          <a:lstStyle>
+            <a:defPPr>
+              <a:defRPr lang="en-US"/>
+            </a:defPPr>
+            <a:lvl1pPr>
+              <a:lnSpc>
+                <a:spcPct val="150000"/>
+              </a:lnSpc>
+              <a:defRPr sz="2200"/>
+            </a:lvl1pPr>
+          </a:lstStyle>
+          <a:p>
+            <a:r>
+              <a:rPr lang="en-US" dirty="0"/>
+              <a:t>A user clicks:</a:t>
+            </a:r>
+          </a:p>
+          <a:p>
+            <a:r>
+              <a:rPr lang="en-US" dirty="0"/>
+              <a:t>"Pay ₹500"</a:t>
+            </a:r>
+          </a:p>
+          <a:p>
+            <a:r>
+              <a:rPr lang="en-US" dirty="0"/>
+              <a:t>We need to check:</a:t>
+            </a:r>
+          </a:p>
+          <a:p>
+            <a:endParaRPr lang="en-IN" dirty="0"/>
+          </a:p>
+        </p:txBody>
+      </p:sp>
+      <p:sp>
+        <p:nvSpPr>
+          <p:cNvPr id="8" name="TextBox 7">
+            <a:extLst>
+              <a:ext uri="{FF2B5EF4-FFF2-40B4-BE49-F238E27FC236}">
+                <a16:creationId xmlns:a16="http://schemas.microsoft.com/office/drawing/2014/main" id="{2F38B0AF-72F8-E91C-34BC-79594DEBB2BB}"/>
+              </a:ext>
+            </a:extLst>
+          </p:cNvPr>
+          <p:cNvSpPr txBox="1"/>
+          <p:nvPr/>
+        </p:nvSpPr>
+        <p:spPr>
+          <a:xfrm>
+            <a:off x="7822604" y="2060848"/>
+            <a:ext cx="2882520" cy="4598438"/>
+          </a:xfrm>
+          <a:prstGeom prst="rect">
+            <a:avLst/>
+          </a:prstGeom>
+          <a:noFill/>
+        </p:spPr>
+        <p:txBody>
+          <a:bodyPr wrap="square" rtlCol="0">
+            <a:spAutoFit/>
+          </a:bodyPr>
+          <a:lstStyle>
+            <a:defPPr>
+              <a:defRPr lang="en-US"/>
+            </a:defPPr>
+            <a:lvl1pPr>
+              <a:lnSpc>
+                <a:spcPct val="150000"/>
+              </a:lnSpc>
+              <a:defRPr sz="2200"/>
+            </a:lvl1pPr>
+          </a:lstStyle>
+          <a:p>
+            <a:r>
+              <a:rPr lang="en-US" dirty="0"/>
+              <a:t>Payment Request</a:t>
+            </a:r>
+          </a:p>
+          <a:p>
+            <a:r>
+              <a:rPr lang="en-US" dirty="0"/>
+              <a:t>      ↓</a:t>
+            </a:r>
+          </a:p>
+          <a:p>
+            <a:r>
+              <a:rPr lang="en-US" dirty="0"/>
+              <a:t>Payment API</a:t>
+            </a:r>
+          </a:p>
+          <a:p>
+            <a:r>
+              <a:rPr lang="en-US" dirty="0"/>
+              <a:t>      ↓</a:t>
+            </a:r>
+          </a:p>
+          <a:p>
+            <a:r>
+              <a:rPr lang="en-US" dirty="0"/>
+              <a:t>Bank</a:t>
+            </a:r>
+          </a:p>
+          <a:p>
+            <a:r>
+              <a:rPr lang="en-US" dirty="0"/>
+              <a:t>      ↓</a:t>
+            </a:r>
+          </a:p>
+          <a:p>
+            <a:r>
+              <a:rPr lang="en-US" dirty="0"/>
+              <a:t>Database</a:t>
+            </a:r>
+          </a:p>
+          <a:p>
+            <a:r>
+              <a:rPr lang="en-US" dirty="0"/>
+              <a:t>      ↓</a:t>
+            </a:r>
+          </a:p>
+          <a:p>
+            <a:r>
+              <a:rPr lang="en-US" dirty="0"/>
+              <a:t>Payment Successful</a:t>
+            </a:r>
+            <a:endParaRPr lang="en-IN" dirty="0"/>
+          </a:p>
+        </p:txBody>
+      </p:sp>
+      <p:sp>
+        <p:nvSpPr>
+          <p:cNvPr id="9" name="TextBox 8">
+            <a:extLst>
+              <a:ext uri="{FF2B5EF4-FFF2-40B4-BE49-F238E27FC236}">
+                <a16:creationId xmlns:a16="http://schemas.microsoft.com/office/drawing/2014/main" id="{DCEEFE8A-6A1F-54D8-D720-CCE7C31F296B}"/>
+              </a:ext>
+            </a:extLst>
+          </p:cNvPr>
+          <p:cNvSpPr txBox="1"/>
+          <p:nvPr/>
+        </p:nvSpPr>
+        <p:spPr>
+          <a:xfrm>
+            <a:off x="981844" y="3573016"/>
+            <a:ext cx="5472608" cy="3074944"/>
+          </a:xfrm>
+          <a:prstGeom prst="rect">
+            <a:avLst/>
+          </a:prstGeom>
+          <a:noFill/>
+        </p:spPr>
+        <p:txBody>
+          <a:bodyPr wrap="square" rtlCol="0">
+            <a:spAutoFit/>
+          </a:bodyPr>
+          <a:lstStyle>
+            <a:defPPr>
+              <a:defRPr lang="en-US"/>
+            </a:defPPr>
+            <a:lvl1pPr>
+              <a:lnSpc>
+                <a:spcPct val="150000"/>
+              </a:lnSpc>
+              <a:defRPr sz="2200"/>
+            </a:lvl1pPr>
+          </a:lstStyle>
+          <a:p>
+            <a:r>
+              <a:rPr lang="en-US" dirty="0"/>
+              <a:t>Everything may work individually, but perhaps the API cannot communicate with the database.</a:t>
+            </a:r>
+          </a:p>
+          <a:p>
+            <a:r>
+              <a:rPr lang="en-US" dirty="0"/>
+              <a:t>Integration testing catches such problems</a:t>
+            </a:r>
+          </a:p>
+          <a:p>
+            <a:endParaRPr lang="en-IN" dirty="0"/>
+          </a:p>
+        </p:txBody>
+      </p:sp>
+    </p:spTree>
+    <p:extLst>
+      <p:ext uri="{BB962C8B-B14F-4D97-AF65-F5344CB8AC3E}">
+        <p14:creationId xmlns:p14="http://schemas.microsoft.com/office/powerpoint/2010/main" val="1956968138"/>
+      </p:ext>
+    </p:extLst>
+  </p:cSld>
+  <p:clrMapOvr>
+    <a:masterClrMapping/>
+  </p:clrMapOvr>
+  <mc:AlternateContent xmlns:mc="http://schemas.openxmlformats.org/markup-compatibility/2006" xmlns:p14="http://schemas.microsoft.com/office/powerpoint/2010/main">
+    <mc:Choice Requires="p14">
+      <p:transition spd="med" p14:dur="700">
+        <p:fade/>
+      </p:transition>
+    </mc:Choice>
+    <mc:Fallback xmlns="">
+      <p:transition spd="med">
+        <p:fade/>
+      </p:transition>
+    </mc:Fallback>
+  </mc:AlternateContent>
+</p:sld>
+</file>
+
+<file path=ppt/slides/slide16.xml><?xml version="1.0" encoding="utf-8"?>
+<p:sld xmlns:a="http://schemas.openxmlformats.org/drawingml/2006/main" xmlns:r="http://schemas.openxmlformats.org/officeDocument/2006/relationships" xmlns:p="http://schemas.openxmlformats.org/presentationml/2006/main">
+  <p:cSld>
+    <p:spTree>
+      <p:nvGrpSpPr>
+        <p:cNvPr id="1" name=""/>
+        <p:cNvGrpSpPr/>
+        <p:nvPr/>
+      </p:nvGrpSpPr>
+      <p:grpSpPr>
+        <a:xfrm>
+          <a:off x="0" y="0"/>
+          <a:ext cx="0" cy="0"/>
+          <a:chOff x="0" y="0"/>
+          <a:chExt cx="0" cy="0"/>
+        </a:xfrm>
+      </p:grpSpPr>
+      <p:sp>
+        <p:nvSpPr>
+          <p:cNvPr id="4" name="TextBox 3">
+            <a:extLst>
+              <a:ext uri="{FF2B5EF4-FFF2-40B4-BE49-F238E27FC236}">
+                <a16:creationId xmlns:a16="http://schemas.microsoft.com/office/drawing/2014/main" id="{89784007-D1C8-8853-A3EA-348189272ABF}"/>
+              </a:ext>
+            </a:extLst>
+          </p:cNvPr>
+          <p:cNvSpPr txBox="1"/>
+          <p:nvPr/>
+        </p:nvSpPr>
+        <p:spPr>
+          <a:xfrm>
+            <a:off x="981844" y="764704"/>
+            <a:ext cx="4360489" cy="443198"/>
+          </a:xfrm>
+          <a:prstGeom prst="rect">
+            <a:avLst/>
+          </a:prstGeom>
+          <a:noFill/>
+        </p:spPr>
+        <p:txBody>
+          <a:bodyPr wrap="none" rtlCol="0">
+            <a:spAutoFit/>
+          </a:bodyPr>
+          <a:lstStyle>
+            <a:defPPr>
+              <a:defRPr lang="en-US"/>
+            </a:defPPr>
+            <a:lvl1pPr>
+              <a:lnSpc>
+                <a:spcPct val="95000"/>
+              </a:lnSpc>
+              <a:defRPr sz="2200" b="1">
+                <a:solidFill>
+                  <a:srgbClr val="FF0000"/>
+                </a:solidFill>
+              </a:defRPr>
+            </a:lvl1pPr>
+          </a:lstStyle>
+          <a:p>
+            <a:r>
+              <a:rPr lang="en-US" dirty="0"/>
+              <a:t>Level 3: UI / End-to-End Tests</a:t>
+            </a:r>
+            <a:endParaRPr lang="en-IN" dirty="0"/>
+          </a:p>
+        </p:txBody>
+      </p:sp>
+      <p:sp>
+        <p:nvSpPr>
+          <p:cNvPr id="5" name="TextBox 4">
+            <a:extLst>
+              <a:ext uri="{FF2B5EF4-FFF2-40B4-BE49-F238E27FC236}">
+                <a16:creationId xmlns:a16="http://schemas.microsoft.com/office/drawing/2014/main" id="{2E1115EC-2E0F-0749-F2C3-E70745DA17FB}"/>
+              </a:ext>
+            </a:extLst>
+          </p:cNvPr>
+          <p:cNvSpPr txBox="1"/>
+          <p:nvPr/>
+        </p:nvSpPr>
+        <p:spPr>
+          <a:xfrm>
+            <a:off x="981844" y="260648"/>
+            <a:ext cx="3563796" cy="413959"/>
+          </a:xfrm>
+          <a:prstGeom prst="rect">
+            <a:avLst/>
+          </a:prstGeom>
+          <a:noFill/>
+        </p:spPr>
+        <p:txBody>
+          <a:bodyPr wrap="none" rtlCol="0">
+            <a:spAutoFit/>
+          </a:bodyPr>
+          <a:lstStyle>
+            <a:defPPr>
+              <a:defRPr lang="en-US"/>
+            </a:defPPr>
+            <a:lvl1pPr>
+              <a:lnSpc>
+                <a:spcPct val="95000"/>
+              </a:lnSpc>
+              <a:defRPr sz="2200" b="1">
+                <a:solidFill>
+                  <a:srgbClr val="FF0000"/>
+                </a:solidFill>
+              </a:defRPr>
+            </a:lvl1pPr>
+          </a:lstStyle>
+          <a:p>
+            <a:r>
+              <a:rPr lang="en-IN" dirty="0"/>
+              <a:t>Test Automation Pyramid</a:t>
+            </a:r>
+          </a:p>
+        </p:txBody>
+      </p:sp>
+      <p:sp>
+        <p:nvSpPr>
+          <p:cNvPr id="6" name="TextBox 5">
+            <a:extLst>
+              <a:ext uri="{FF2B5EF4-FFF2-40B4-BE49-F238E27FC236}">
+                <a16:creationId xmlns:a16="http://schemas.microsoft.com/office/drawing/2014/main" id="{8B7AA3C7-4694-5FCE-9CB0-62B618F3E27D}"/>
+              </a:ext>
+            </a:extLst>
+          </p:cNvPr>
+          <p:cNvSpPr txBox="1"/>
+          <p:nvPr/>
+        </p:nvSpPr>
+        <p:spPr>
+          <a:xfrm>
+            <a:off x="981845" y="1268760"/>
+            <a:ext cx="5723042" cy="2059282"/>
+          </a:xfrm>
+          <a:prstGeom prst="rect">
+            <a:avLst/>
+          </a:prstGeom>
+          <a:noFill/>
+        </p:spPr>
+        <p:txBody>
+          <a:bodyPr wrap="square" rtlCol="0">
+            <a:spAutoFit/>
+          </a:bodyPr>
+          <a:lstStyle>
+            <a:defPPr>
+              <a:defRPr lang="en-US"/>
+            </a:defPPr>
+            <a:lvl1pPr>
+              <a:lnSpc>
+                <a:spcPct val="150000"/>
+              </a:lnSpc>
+              <a:defRPr sz="2200"/>
+            </a:lvl1pPr>
+          </a:lstStyle>
+          <a:p>
+            <a:r>
+              <a:rPr lang="en-US" dirty="0"/>
+              <a:t>This is the top of the pyramid.</a:t>
+            </a:r>
+          </a:p>
+          <a:p>
+            <a:r>
+              <a:rPr lang="en-US" dirty="0"/>
+              <a:t>Here we test the complete application from the user's point of view.</a:t>
+            </a:r>
+          </a:p>
+          <a:p>
+            <a:endParaRPr lang="en-IN" dirty="0"/>
+          </a:p>
+        </p:txBody>
+      </p:sp>
+      <p:sp>
+        <p:nvSpPr>
+          <p:cNvPr id="7" name="TextBox 6">
+            <a:extLst>
+              <a:ext uri="{FF2B5EF4-FFF2-40B4-BE49-F238E27FC236}">
+                <a16:creationId xmlns:a16="http://schemas.microsoft.com/office/drawing/2014/main" id="{AC0CAAA0-9B1D-4086-4C8A-49869FC3F080}"/>
+              </a:ext>
+            </a:extLst>
+          </p:cNvPr>
+          <p:cNvSpPr txBox="1"/>
+          <p:nvPr/>
+        </p:nvSpPr>
+        <p:spPr>
+          <a:xfrm>
+            <a:off x="981845" y="3150245"/>
+            <a:ext cx="5723042" cy="535788"/>
+          </a:xfrm>
+          <a:prstGeom prst="rect">
+            <a:avLst/>
+          </a:prstGeom>
+          <a:noFill/>
+        </p:spPr>
+        <p:txBody>
+          <a:bodyPr wrap="square" rtlCol="0">
+            <a:spAutoFit/>
+          </a:bodyPr>
+          <a:lstStyle>
+            <a:defPPr>
+              <a:defRPr lang="en-US"/>
+            </a:defPPr>
+            <a:lvl1pPr>
+              <a:lnSpc>
+                <a:spcPct val="150000"/>
+              </a:lnSpc>
+              <a:defRPr sz="2200"/>
+            </a:lvl1pPr>
+          </a:lstStyle>
+          <a:p>
+            <a:r>
+              <a:rPr lang="en-US" dirty="0"/>
+              <a:t>Imagine an online shopping application.</a:t>
+            </a:r>
+            <a:endParaRPr lang="en-IN" dirty="0"/>
+          </a:p>
+        </p:txBody>
+      </p:sp>
+      <p:sp>
+        <p:nvSpPr>
+          <p:cNvPr id="8" name="TextBox 7">
+            <a:extLst>
+              <a:ext uri="{FF2B5EF4-FFF2-40B4-BE49-F238E27FC236}">
+                <a16:creationId xmlns:a16="http://schemas.microsoft.com/office/drawing/2014/main" id="{3FF39DD3-5480-7FDB-4A1B-AD6C56F2B26E}"/>
+              </a:ext>
+            </a:extLst>
+          </p:cNvPr>
+          <p:cNvSpPr txBox="1"/>
+          <p:nvPr/>
+        </p:nvSpPr>
+        <p:spPr>
+          <a:xfrm>
+            <a:off x="7462564" y="467627"/>
+            <a:ext cx="3857146" cy="5847755"/>
+          </a:xfrm>
+          <a:prstGeom prst="rect">
+            <a:avLst/>
+          </a:prstGeom>
+          <a:noFill/>
+        </p:spPr>
+        <p:txBody>
+          <a:bodyPr wrap="square" rtlCol="0">
+            <a:spAutoFit/>
+          </a:bodyPr>
+          <a:lstStyle>
+            <a:defPPr>
+              <a:defRPr lang="en-US"/>
+            </a:defPPr>
+            <a:lvl1pPr>
+              <a:lnSpc>
+                <a:spcPct val="150000"/>
+              </a:lnSpc>
+              <a:defRPr sz="2200"/>
+            </a:lvl1pPr>
+          </a:lstStyle>
+          <a:p>
+            <a:pPr>
+              <a:lnSpc>
+                <a:spcPct val="100000"/>
+              </a:lnSpc>
+            </a:pPr>
+            <a:r>
+              <a:rPr lang="en-IN" dirty="0"/>
+              <a:t>Open Browser</a:t>
+            </a:r>
+          </a:p>
+          <a:p>
+            <a:pPr>
+              <a:lnSpc>
+                <a:spcPct val="100000"/>
+              </a:lnSpc>
+            </a:pPr>
+            <a:r>
+              <a:rPr lang="en-IN" dirty="0"/>
+              <a:t>     ↓</a:t>
+            </a:r>
+          </a:p>
+          <a:p>
+            <a:pPr>
+              <a:lnSpc>
+                <a:spcPct val="100000"/>
+              </a:lnSpc>
+            </a:pPr>
+            <a:r>
+              <a:rPr lang="en-IN" dirty="0"/>
+              <a:t>Open Amazon-like website</a:t>
+            </a:r>
+          </a:p>
+          <a:p>
+            <a:pPr>
+              <a:lnSpc>
+                <a:spcPct val="100000"/>
+              </a:lnSpc>
+            </a:pPr>
+            <a:r>
+              <a:rPr lang="en-IN" dirty="0"/>
+              <a:t>     ↓</a:t>
+            </a:r>
+          </a:p>
+          <a:p>
+            <a:pPr>
+              <a:lnSpc>
+                <a:spcPct val="100000"/>
+              </a:lnSpc>
+            </a:pPr>
+            <a:r>
+              <a:rPr lang="en-IN" dirty="0"/>
+              <a:t>Login</a:t>
+            </a:r>
+          </a:p>
+          <a:p>
+            <a:pPr>
+              <a:lnSpc>
+                <a:spcPct val="100000"/>
+              </a:lnSpc>
+            </a:pPr>
+            <a:r>
+              <a:rPr lang="en-IN" dirty="0"/>
+              <a:t>     ↓</a:t>
+            </a:r>
+          </a:p>
+          <a:p>
+            <a:pPr>
+              <a:lnSpc>
+                <a:spcPct val="100000"/>
+              </a:lnSpc>
+            </a:pPr>
+            <a:r>
+              <a:rPr lang="en-IN" dirty="0"/>
+              <a:t>Search "Laptop"</a:t>
+            </a:r>
+          </a:p>
+          <a:p>
+            <a:pPr>
+              <a:lnSpc>
+                <a:spcPct val="100000"/>
+              </a:lnSpc>
+            </a:pPr>
+            <a:r>
+              <a:rPr lang="en-IN" dirty="0"/>
+              <a:t>     ↓</a:t>
+            </a:r>
+          </a:p>
+          <a:p>
+            <a:pPr>
+              <a:lnSpc>
+                <a:spcPct val="100000"/>
+              </a:lnSpc>
+            </a:pPr>
+            <a:r>
+              <a:rPr lang="en-IN" dirty="0"/>
+              <a:t>Select Laptop</a:t>
+            </a:r>
+          </a:p>
+          <a:p>
+            <a:pPr>
+              <a:lnSpc>
+                <a:spcPct val="100000"/>
+              </a:lnSpc>
+            </a:pPr>
+            <a:r>
+              <a:rPr lang="en-IN" dirty="0"/>
+              <a:t>     ↓</a:t>
+            </a:r>
+          </a:p>
+          <a:p>
+            <a:pPr>
+              <a:lnSpc>
+                <a:spcPct val="100000"/>
+              </a:lnSpc>
+            </a:pPr>
+            <a:r>
+              <a:rPr lang="en-IN" dirty="0"/>
+              <a:t>Add to Cart</a:t>
+            </a:r>
+          </a:p>
+          <a:p>
+            <a:pPr>
+              <a:lnSpc>
+                <a:spcPct val="100000"/>
+              </a:lnSpc>
+            </a:pPr>
+            <a:r>
+              <a:rPr lang="en-IN" dirty="0"/>
+              <a:t>     ↓</a:t>
+            </a:r>
+          </a:p>
+          <a:p>
+            <a:pPr>
+              <a:lnSpc>
+                <a:spcPct val="100000"/>
+              </a:lnSpc>
+            </a:pPr>
+            <a:r>
+              <a:rPr lang="en-IN" dirty="0"/>
+              <a:t>Checkout</a:t>
+            </a:r>
+          </a:p>
+          <a:p>
+            <a:pPr>
+              <a:lnSpc>
+                <a:spcPct val="100000"/>
+              </a:lnSpc>
+            </a:pPr>
+            <a:r>
+              <a:rPr lang="en-IN" dirty="0"/>
+              <a:t>     ↓</a:t>
+            </a:r>
+          </a:p>
+          <a:p>
+            <a:pPr>
+              <a:lnSpc>
+                <a:spcPct val="100000"/>
+              </a:lnSpc>
+            </a:pPr>
+            <a:r>
+              <a:rPr lang="en-IN" dirty="0"/>
+              <a:t>Make Payment</a:t>
+            </a:r>
+          </a:p>
+          <a:p>
+            <a:pPr>
+              <a:lnSpc>
+                <a:spcPct val="100000"/>
+              </a:lnSpc>
+            </a:pPr>
+            <a:r>
+              <a:rPr lang="en-IN" dirty="0"/>
+              <a:t>     ↓</a:t>
+            </a:r>
+          </a:p>
+          <a:p>
+            <a:pPr>
+              <a:lnSpc>
+                <a:spcPct val="100000"/>
+              </a:lnSpc>
+            </a:pPr>
+            <a:r>
+              <a:rPr lang="en-IN" dirty="0"/>
+              <a:t>Verify Order</a:t>
+            </a:r>
+          </a:p>
+        </p:txBody>
+      </p:sp>
+    </p:spTree>
+    <p:extLst>
+      <p:ext uri="{BB962C8B-B14F-4D97-AF65-F5344CB8AC3E}">
+        <p14:creationId xmlns:p14="http://schemas.microsoft.com/office/powerpoint/2010/main" val="3752505209"/>
+      </p:ext>
+    </p:extLst>
+  </p:cSld>
+  <p:clrMapOvr>
+    <a:masterClrMapping/>
+  </p:clrMapOvr>
+  <mc:AlternateContent xmlns:mc="http://schemas.openxmlformats.org/markup-compatibility/2006" xmlns:p14="http://schemas.microsoft.com/office/powerpoint/2010/main">
+    <mc:Choice Requires="p14">
+      <p:transition spd="med" p14:dur="700">
+        <p:fade/>
+      </p:transition>
+    </mc:Choice>
+    <mc:Fallback xmlns="">
+      <p:transition spd="med">
+        <p:fade/>
+      </p:transition>
+    </mc:Fallback>
+  </mc:AlternateContent>
+</p:sld>
+</file>
+
+<file path=ppt/slides/slide17.xml><?xml version="1.0" encoding="utf-8"?>
+<p:sld xmlns:a="http://schemas.openxmlformats.org/drawingml/2006/main" xmlns:r="http://schemas.openxmlformats.org/officeDocument/2006/relationships" xmlns:p="http://schemas.openxmlformats.org/presentationml/2006/main">
+  <p:cSld>
+    <p:spTree>
+      <p:nvGrpSpPr>
+        <p:cNvPr id="1" name=""/>
+        <p:cNvGrpSpPr/>
+        <p:nvPr/>
+      </p:nvGrpSpPr>
+      <p:grpSpPr>
+        <a:xfrm>
+          <a:off x="0" y="0"/>
+          <a:ext cx="0" cy="0"/>
+          <a:chOff x="0" y="0"/>
+          <a:chExt cx="0" cy="0"/>
+        </a:xfrm>
+      </p:grpSpPr>
+      <p:sp>
+        <p:nvSpPr>
+          <p:cNvPr id="4" name="TextBox 3">
+            <a:extLst>
+              <a:ext uri="{FF2B5EF4-FFF2-40B4-BE49-F238E27FC236}">
+                <a16:creationId xmlns:a16="http://schemas.microsoft.com/office/drawing/2014/main" id="{81A2870F-93C8-4C04-844D-6CDF0A9BD8EA}"/>
+              </a:ext>
+            </a:extLst>
+          </p:cNvPr>
+          <p:cNvSpPr txBox="1"/>
+          <p:nvPr/>
+        </p:nvSpPr>
+        <p:spPr>
+          <a:xfrm>
+            <a:off x="1125860" y="188640"/>
+            <a:ext cx="6120680" cy="823302"/>
+          </a:xfrm>
+          <a:prstGeom prst="rect">
+            <a:avLst/>
+          </a:prstGeom>
+          <a:noFill/>
+        </p:spPr>
+        <p:txBody>
+          <a:bodyPr wrap="square" rtlCol="0">
+            <a:spAutoFit/>
+          </a:bodyPr>
+          <a:lstStyle>
+            <a:defPPr>
+              <a:defRPr lang="en-US"/>
+            </a:defPPr>
+            <a:lvl1pPr>
+              <a:lnSpc>
+                <a:spcPct val="95000"/>
+              </a:lnSpc>
+              <a:defRPr sz="2200" b="1">
+                <a:solidFill>
+                  <a:srgbClr val="FF0000"/>
+                </a:solidFill>
+              </a:defRPr>
+            </a:lvl1pPr>
+          </a:lstStyle>
+          <a:p>
+            <a:r>
+              <a:rPr lang="en-IN" dirty="0"/>
+              <a:t>Example: Pizza Ordering App </a:t>
+            </a:r>
+            <a:r>
+              <a:rPr lang="en-IN" sz="2800" dirty="0"/>
+              <a:t>🍕</a:t>
+            </a:r>
+          </a:p>
+          <a:p>
+            <a:endParaRPr lang="en-IN" dirty="0"/>
+          </a:p>
+        </p:txBody>
+      </p:sp>
+      <p:sp>
+        <p:nvSpPr>
+          <p:cNvPr id="6" name="Trapezoid 5">
+            <a:extLst>
+              <a:ext uri="{FF2B5EF4-FFF2-40B4-BE49-F238E27FC236}">
+                <a16:creationId xmlns:a16="http://schemas.microsoft.com/office/drawing/2014/main" id="{0A202AF7-C8D2-7D0A-CAE1-F3A64D467A1D}"/>
+              </a:ext>
+            </a:extLst>
+          </p:cNvPr>
+          <p:cNvSpPr/>
+          <p:nvPr/>
+        </p:nvSpPr>
+        <p:spPr>
+          <a:xfrm>
+            <a:off x="2169976" y="4869160"/>
+            <a:ext cx="7596844" cy="1584176"/>
+          </a:xfrm>
+          <a:prstGeom prst="trapezoid">
+            <a:avLst/>
+          </a:prstGeom>
+          <a:ln/>
+        </p:spPr>
+        <p:style>
+          <a:lnRef idx="2">
+            <a:schemeClr val="accent1">
+              <a:shade val="50000"/>
+            </a:schemeClr>
+          </a:lnRef>
+          <a:fillRef idx="1">
+            <a:schemeClr val="accent1"/>
+          </a:fillRef>
+          <a:effectRef idx="0">
+            <a:schemeClr val="accent1"/>
+          </a:effectRef>
+          <a:fontRef idx="minor">
+            <a:schemeClr val="lt1"/>
+          </a:fontRef>
+        </p:style>
+        <p:txBody>
+          <a:bodyPr rtlCol="0" anchor="ctr"/>
+          <a:lstStyle/>
+          <a:p>
+            <a:pPr algn="ctr"/>
+            <a:endParaRPr lang="en-IN" dirty="0"/>
+          </a:p>
+          <a:p>
+            <a:pPr algn="ctr"/>
+            <a:r>
+              <a:rPr lang="en-IN" sz="2000" b="1" dirty="0" err="1"/>
+              <a:t>calculatePizzaPrice</a:t>
+            </a:r>
+            <a:r>
+              <a:rPr lang="en-IN" sz="2000" b="1" dirty="0"/>
+              <a:t>()</a:t>
+            </a:r>
+          </a:p>
+          <a:p>
+            <a:pPr algn="ctr"/>
+            <a:r>
+              <a:rPr lang="en-IN" sz="2000" b="1" dirty="0" err="1"/>
+              <a:t>calculateGST</a:t>
+            </a:r>
+            <a:r>
+              <a:rPr lang="en-IN" sz="2000" b="1" dirty="0"/>
+              <a:t>()</a:t>
+            </a:r>
+          </a:p>
+          <a:p>
+            <a:pPr algn="ctr"/>
+            <a:r>
+              <a:rPr lang="en-IN" sz="2000" b="1" dirty="0" err="1"/>
+              <a:t>applyCoupon</a:t>
+            </a:r>
+            <a:r>
+              <a:rPr lang="en-IN" sz="2000" b="1" dirty="0"/>
+              <a:t>()</a:t>
+            </a:r>
+          </a:p>
+          <a:p>
+            <a:pPr algn="ctr"/>
+            <a:r>
+              <a:rPr lang="en-IN" sz="2000" b="1" dirty="0" err="1"/>
+              <a:t>calculateDeliveryCharge</a:t>
+            </a:r>
+            <a:r>
+              <a:rPr lang="en-IN" sz="2000" b="1" dirty="0"/>
+              <a:t>()</a:t>
+            </a:r>
+          </a:p>
+          <a:p>
+            <a:pPr algn="ctr"/>
+            <a:endParaRPr lang="en-IN" dirty="0"/>
+          </a:p>
+        </p:txBody>
+      </p:sp>
+      <p:sp>
+        <p:nvSpPr>
+          <p:cNvPr id="7" name="Trapezoid 6">
+            <a:extLst>
+              <a:ext uri="{FF2B5EF4-FFF2-40B4-BE49-F238E27FC236}">
+                <a16:creationId xmlns:a16="http://schemas.microsoft.com/office/drawing/2014/main" id="{258BA953-6F98-FCB4-700F-29ED593EA8F9}"/>
+              </a:ext>
+            </a:extLst>
+          </p:cNvPr>
+          <p:cNvSpPr/>
+          <p:nvPr/>
+        </p:nvSpPr>
+        <p:spPr>
+          <a:xfrm>
+            <a:off x="2638028" y="3140968"/>
+            <a:ext cx="6696744" cy="1656184"/>
+          </a:xfrm>
+          <a:prstGeom prst="trapezoid">
+            <a:avLst/>
+          </a:prstGeom>
+          <a:solidFill>
+            <a:schemeClr val="accent6"/>
+          </a:solidFill>
+          <a:ln/>
+        </p:spPr>
+        <p:style>
+          <a:lnRef idx="2">
+            <a:schemeClr val="accent1">
+              <a:shade val="50000"/>
+            </a:schemeClr>
+          </a:lnRef>
+          <a:fillRef idx="1">
+            <a:schemeClr val="accent1"/>
+          </a:fillRef>
+          <a:effectRef idx="0">
+            <a:schemeClr val="accent1"/>
+          </a:effectRef>
+          <a:fontRef idx="minor">
+            <a:schemeClr val="lt1"/>
+          </a:fontRef>
+        </p:style>
+        <p:txBody>
+          <a:bodyPr rtlCol="0" anchor="ctr"/>
+          <a:lstStyle/>
+          <a:p>
+            <a:pPr algn="ctr"/>
+            <a:r>
+              <a:rPr lang="en-US" sz="2000" b="1" dirty="0"/>
+              <a:t>Order System</a:t>
+            </a:r>
+          </a:p>
+          <a:p>
+            <a:pPr algn="ctr"/>
+            <a:r>
+              <a:rPr lang="en-US" sz="2000" b="1" dirty="0"/>
+              <a:t> Payment System</a:t>
+            </a:r>
+          </a:p>
+          <a:p>
+            <a:pPr algn="ctr"/>
+            <a:r>
+              <a:rPr lang="en-US" sz="2000" b="1" dirty="0"/>
+              <a:t>Database</a:t>
+            </a:r>
+            <a:endParaRPr lang="en-IN" sz="2000" b="1" dirty="0"/>
+          </a:p>
+        </p:txBody>
+      </p:sp>
+      <p:sp>
+        <p:nvSpPr>
+          <p:cNvPr id="8" name="Isosceles Triangle 7">
+            <a:extLst>
+              <a:ext uri="{FF2B5EF4-FFF2-40B4-BE49-F238E27FC236}">
+                <a16:creationId xmlns:a16="http://schemas.microsoft.com/office/drawing/2014/main" id="{69ED009D-C439-9552-20EC-A8D11E1F51F2}"/>
+              </a:ext>
+            </a:extLst>
+          </p:cNvPr>
+          <p:cNvSpPr/>
+          <p:nvPr/>
+        </p:nvSpPr>
+        <p:spPr>
+          <a:xfrm>
+            <a:off x="3070076" y="692696"/>
+            <a:ext cx="5832648" cy="2304256"/>
+          </a:xfrm>
+          <a:prstGeom prst="triangle">
+            <a:avLst/>
+          </a:prstGeom>
+          <a:ln/>
+        </p:spPr>
+        <p:style>
+          <a:lnRef idx="2">
+            <a:schemeClr val="accent1">
+              <a:shade val="50000"/>
+            </a:schemeClr>
+          </a:lnRef>
+          <a:fillRef idx="1">
+            <a:schemeClr val="accent1"/>
+          </a:fillRef>
+          <a:effectRef idx="0">
+            <a:schemeClr val="accent1"/>
+          </a:effectRef>
+          <a:fontRef idx="minor">
+            <a:schemeClr val="lt1"/>
+          </a:fontRef>
+        </p:style>
+        <p:txBody>
+          <a:bodyPr rtlCol="0" anchor="ctr"/>
+          <a:lstStyle/>
+          <a:p>
+            <a:pPr algn="ctr"/>
+            <a:r>
+              <a:rPr lang="en-US" sz="1800" b="1" dirty="0"/>
+              <a:t>Open App -&gt; Login -&gt; Choose Pizza -&gt; Add to Cart -&gt; Apply Coupon-&gt; Pay- &gt; Order Confirmed</a:t>
+            </a:r>
+            <a:endParaRPr lang="en-IN" sz="1800" b="1" dirty="0"/>
+          </a:p>
+        </p:txBody>
+      </p:sp>
+      <p:sp>
+        <p:nvSpPr>
+          <p:cNvPr id="9" name="TextBox 8">
+            <a:extLst>
+              <a:ext uri="{FF2B5EF4-FFF2-40B4-BE49-F238E27FC236}">
+                <a16:creationId xmlns:a16="http://schemas.microsoft.com/office/drawing/2014/main" id="{29C524AC-C937-18EC-1AC0-0D4E1EF71227}"/>
+              </a:ext>
+            </a:extLst>
+          </p:cNvPr>
+          <p:cNvSpPr txBox="1"/>
+          <p:nvPr/>
+        </p:nvSpPr>
+        <p:spPr>
+          <a:xfrm>
+            <a:off x="9694812" y="5373216"/>
+            <a:ext cx="2053767" cy="443198"/>
+          </a:xfrm>
+          <a:prstGeom prst="rect">
+            <a:avLst/>
+          </a:prstGeom>
+          <a:noFill/>
+        </p:spPr>
+        <p:txBody>
+          <a:bodyPr wrap="none" rtlCol="0">
+            <a:spAutoFit/>
+          </a:bodyPr>
+          <a:lstStyle/>
+          <a:p>
+            <a:pPr>
+              <a:lnSpc>
+                <a:spcPct val="95000"/>
+              </a:lnSpc>
+            </a:pPr>
+            <a:r>
+              <a:rPr lang="en-IN" b="1" dirty="0"/>
+              <a:t>500 unit tests</a:t>
+            </a:r>
+          </a:p>
+        </p:txBody>
+      </p:sp>
+      <p:sp>
+        <p:nvSpPr>
+          <p:cNvPr id="10" name="TextBox 9">
+            <a:extLst>
+              <a:ext uri="{FF2B5EF4-FFF2-40B4-BE49-F238E27FC236}">
+                <a16:creationId xmlns:a16="http://schemas.microsoft.com/office/drawing/2014/main" id="{73C1FAF7-1F4B-15A3-5954-5E152801B8DD}"/>
+              </a:ext>
+            </a:extLst>
+          </p:cNvPr>
+          <p:cNvSpPr txBox="1"/>
+          <p:nvPr/>
+        </p:nvSpPr>
+        <p:spPr>
+          <a:xfrm>
+            <a:off x="9334773" y="3501008"/>
+            <a:ext cx="2232248" cy="794064"/>
+          </a:xfrm>
+          <a:prstGeom prst="rect">
+            <a:avLst/>
+          </a:prstGeom>
+          <a:noFill/>
+        </p:spPr>
+        <p:txBody>
+          <a:bodyPr wrap="square" rtlCol="0">
+            <a:spAutoFit/>
+          </a:bodyPr>
+          <a:lstStyle/>
+          <a:p>
+            <a:pPr>
+              <a:lnSpc>
+                <a:spcPct val="95000"/>
+              </a:lnSpc>
+            </a:pPr>
+            <a:r>
+              <a:rPr lang="en-IN" b="1" dirty="0"/>
+              <a:t>50 integration tests</a:t>
+            </a:r>
+          </a:p>
+        </p:txBody>
+      </p:sp>
+      <p:sp>
+        <p:nvSpPr>
+          <p:cNvPr id="11" name="TextBox 10">
+            <a:extLst>
+              <a:ext uri="{FF2B5EF4-FFF2-40B4-BE49-F238E27FC236}">
+                <a16:creationId xmlns:a16="http://schemas.microsoft.com/office/drawing/2014/main" id="{2AFA1735-1A67-CB74-4E37-F14E640C80DC}"/>
+              </a:ext>
+            </a:extLst>
+          </p:cNvPr>
+          <p:cNvSpPr txBox="1"/>
+          <p:nvPr/>
+        </p:nvSpPr>
+        <p:spPr>
+          <a:xfrm>
+            <a:off x="9190756" y="1591808"/>
+            <a:ext cx="2808312" cy="794064"/>
+          </a:xfrm>
+          <a:prstGeom prst="rect">
+            <a:avLst/>
+          </a:prstGeom>
+          <a:noFill/>
+        </p:spPr>
+        <p:txBody>
+          <a:bodyPr wrap="square" rtlCol="0">
+            <a:spAutoFit/>
+          </a:bodyPr>
+          <a:lstStyle/>
+          <a:p>
+            <a:pPr>
+              <a:lnSpc>
+                <a:spcPct val="95000"/>
+              </a:lnSpc>
+            </a:pPr>
+            <a:r>
+              <a:rPr lang="en-IN" b="1" dirty="0"/>
+              <a:t>10–20 important UI tests</a:t>
+            </a:r>
+          </a:p>
+        </p:txBody>
+      </p:sp>
+    </p:spTree>
+    <p:extLst>
+      <p:ext uri="{BB962C8B-B14F-4D97-AF65-F5344CB8AC3E}">
+        <p14:creationId xmlns:p14="http://schemas.microsoft.com/office/powerpoint/2010/main" val="372157685"/>
+      </p:ext>
+    </p:extLst>
+  </p:cSld>
+  <p:clrMapOvr>
+    <a:masterClrMapping/>
+  </p:clrMapOvr>
+  <mc:AlternateContent xmlns:mc="http://schemas.openxmlformats.org/markup-compatibility/2006" xmlns:p14="http://schemas.microsoft.com/office/powerpoint/2010/main">
+    <mc:Choice Requires="p14">
+      <p:transition spd="med" p14:dur="700">
+        <p:fade/>
+      </p:transition>
+    </mc:Choice>
+    <mc:Fallback xmlns="">
+      <p:transition spd="med">
+        <p:fade/>
+      </p:transition>
+    </mc:Fallback>
+  </mc:AlternateContent>
+</p:sld>
+</file>
+
+<file path=ppt/slides/slide18.xml><?xml version="1.0" encoding="utf-8"?>
+<p:sld xmlns:a="http://schemas.openxmlformats.org/drawingml/2006/main" xmlns:r="http://schemas.openxmlformats.org/officeDocument/2006/relationships" xmlns:p="http://schemas.openxmlformats.org/presentationml/2006/main">
+  <p:cSld>
+    <p:spTree>
+      <p:nvGrpSpPr>
+        <p:cNvPr id="1" name=""/>
+        <p:cNvGrpSpPr/>
+        <p:nvPr/>
+      </p:nvGrpSpPr>
+      <p:grpSpPr>
+        <a:xfrm>
+          <a:off x="0" y="0"/>
+          <a:ext cx="0" cy="0"/>
+          <a:chOff x="0" y="0"/>
+          <a:chExt cx="0" cy="0"/>
+        </a:xfrm>
+      </p:grpSpPr>
+      <p:sp>
+        <p:nvSpPr>
+          <p:cNvPr id="4" name="TextBox 3">
+            <a:extLst>
+              <a:ext uri="{FF2B5EF4-FFF2-40B4-BE49-F238E27FC236}">
+                <a16:creationId xmlns:a16="http://schemas.microsoft.com/office/drawing/2014/main" id="{9A80D9B8-3AA7-55D9-BB7E-0F39FEE0503A}"/>
+              </a:ext>
+            </a:extLst>
+          </p:cNvPr>
+          <p:cNvSpPr txBox="1"/>
+          <p:nvPr/>
+        </p:nvSpPr>
+        <p:spPr>
+          <a:xfrm>
+            <a:off x="621805" y="260648"/>
+            <a:ext cx="10369152" cy="5614101"/>
+          </a:xfrm>
+          <a:prstGeom prst="rect">
+            <a:avLst/>
+          </a:prstGeom>
+          <a:noFill/>
+        </p:spPr>
+        <p:txBody>
+          <a:bodyPr wrap="square" rtlCol="0">
+            <a:spAutoFit/>
+          </a:bodyPr>
+          <a:lstStyle>
+            <a:defPPr>
+              <a:defRPr lang="en-US"/>
+            </a:defPPr>
+            <a:lvl1pPr>
+              <a:lnSpc>
+                <a:spcPct val="150000"/>
+              </a:lnSpc>
+              <a:defRPr sz="2200"/>
+            </a:lvl1pPr>
+          </a:lstStyle>
+          <a:p>
+            <a:r>
+              <a:rPr lang="en-US" dirty="0"/>
+              <a:t>⭐ Golden Rule</a:t>
+            </a:r>
+          </a:p>
+          <a:p>
+            <a:r>
+              <a:rPr lang="en-US" dirty="0"/>
+              <a:t>Remember this:</a:t>
+            </a:r>
+          </a:p>
+          <a:p>
+            <a:r>
+              <a:rPr lang="en-US" dirty="0"/>
+              <a:t>Test as low in the pyramid as possible.</a:t>
+            </a:r>
+          </a:p>
+          <a:p>
+            <a:r>
+              <a:rPr lang="en-US" dirty="0"/>
+              <a:t>If something can be tested using a Unit Test, don't unnecessarily test it through the UI.</a:t>
+            </a:r>
+          </a:p>
+          <a:p>
+            <a:endParaRPr lang="en-US" dirty="0"/>
+          </a:p>
+          <a:p>
+            <a:r>
+              <a:rPr lang="en-US" dirty="0"/>
+              <a:t>For example:</a:t>
+            </a:r>
+          </a:p>
+          <a:p>
+            <a:r>
+              <a:rPr lang="en-US" dirty="0"/>
+              <a:t>❌ Don't open a browser just to check whether:</a:t>
+            </a:r>
+          </a:p>
+          <a:p>
+            <a:r>
+              <a:rPr lang="en-US" dirty="0"/>
+              <a:t>2 + 3 = 5</a:t>
+            </a:r>
+          </a:p>
+          <a:p>
+            <a:endParaRPr lang="en-US" dirty="0"/>
+          </a:p>
+          <a:p>
+            <a:r>
+              <a:rPr lang="en-US" dirty="0"/>
+              <a:t>Use a Unit Test!</a:t>
+            </a:r>
+            <a:endParaRPr lang="en-IN" dirty="0"/>
+          </a:p>
+        </p:txBody>
+      </p:sp>
+    </p:spTree>
+    <p:extLst>
+      <p:ext uri="{BB962C8B-B14F-4D97-AF65-F5344CB8AC3E}">
+        <p14:creationId xmlns:p14="http://schemas.microsoft.com/office/powerpoint/2010/main" val="1119898205"/>
+      </p:ext>
+    </p:extLst>
+  </p:cSld>
+  <p:clrMapOvr>
+    <a:masterClrMapping/>
+  </p:clrMapOvr>
+  <mc:AlternateContent xmlns:mc="http://schemas.openxmlformats.org/markup-compatibility/2006" xmlns:p14="http://schemas.microsoft.com/office/powerpoint/2010/main">
+    <mc:Choice Requires="p14">
+      <p:transition spd="med" p14:dur="700">
+        <p:fade/>
+      </p:transition>
+    </mc:Choice>
+    <mc:Fallback xmlns="">
+      <p:transition spd="med">
+        <p:fade/>
+      </p:transition>
+    </mc:Fallback>
+  </mc:AlternateContent>
+</p:sld>
+</file>
+
+<file path=ppt/slides/slide19.xml><?xml version="1.0" encoding="utf-8"?>
+<p:sld xmlns:a="http://schemas.openxmlformats.org/drawingml/2006/main" xmlns:r="http://schemas.openxmlformats.org/officeDocument/2006/relationships" xmlns:p="http://schemas.openxmlformats.org/presentationml/2006/main">
+  <p:cSld>
+    <p:spTree>
+      <p:nvGrpSpPr>
+        <p:cNvPr id="1" name=""/>
+        <p:cNvGrpSpPr/>
+        <p:nvPr/>
+      </p:nvGrpSpPr>
+      <p:grpSpPr>
+        <a:xfrm>
+          <a:off x="0" y="0"/>
+          <a:ext cx="0" cy="0"/>
+          <a:chOff x="0" y="0"/>
+          <a:chExt cx="0" cy="0"/>
+        </a:xfrm>
+      </p:grpSpPr>
+      <p:sp>
+        <p:nvSpPr>
+          <p:cNvPr id="4" name="TextBox 3">
+            <a:extLst>
+              <a:ext uri="{FF2B5EF4-FFF2-40B4-BE49-F238E27FC236}">
+                <a16:creationId xmlns:a16="http://schemas.microsoft.com/office/drawing/2014/main" id="{A91270E2-4042-EFF3-0876-9C9EF9338B10}"/>
+              </a:ext>
+            </a:extLst>
+          </p:cNvPr>
+          <p:cNvSpPr txBox="1"/>
+          <p:nvPr/>
+        </p:nvSpPr>
+        <p:spPr>
+          <a:xfrm>
+            <a:off x="909836" y="260648"/>
+            <a:ext cx="3482043" cy="443198"/>
+          </a:xfrm>
+          <a:prstGeom prst="rect">
+            <a:avLst/>
+          </a:prstGeom>
+          <a:noFill/>
+        </p:spPr>
+        <p:txBody>
+          <a:bodyPr wrap="none" rtlCol="0">
+            <a:spAutoFit/>
+          </a:bodyPr>
+          <a:lstStyle>
+            <a:defPPr>
+              <a:defRPr lang="en-US"/>
+            </a:defPPr>
+            <a:lvl1pPr>
+              <a:lnSpc>
+                <a:spcPct val="95000"/>
+              </a:lnSpc>
+              <a:defRPr sz="2200" b="1">
+                <a:solidFill>
+                  <a:srgbClr val="FF0000"/>
+                </a:solidFill>
+              </a:defRPr>
+            </a:lvl1pPr>
+          </a:lstStyle>
+          <a:p>
+            <a:r>
+              <a:rPr lang="en-IN" dirty="0"/>
+              <a:t>Agile Testing Workflow</a:t>
+            </a:r>
+          </a:p>
+        </p:txBody>
+      </p:sp>
+      <p:sp>
+        <p:nvSpPr>
+          <p:cNvPr id="5" name="TextBox 4">
+            <a:extLst>
+              <a:ext uri="{FF2B5EF4-FFF2-40B4-BE49-F238E27FC236}">
+                <a16:creationId xmlns:a16="http://schemas.microsoft.com/office/drawing/2014/main" id="{40A86348-A6CF-5AA4-7ED1-F84A489A700C}"/>
+              </a:ext>
+            </a:extLst>
+          </p:cNvPr>
+          <p:cNvSpPr txBox="1"/>
+          <p:nvPr/>
+        </p:nvSpPr>
+        <p:spPr>
+          <a:xfrm>
+            <a:off x="4654252" y="908720"/>
+            <a:ext cx="3462807" cy="5647700"/>
+          </a:xfrm>
+          <a:prstGeom prst="rect">
+            <a:avLst/>
+          </a:prstGeom>
+          <a:noFill/>
+        </p:spPr>
+        <p:txBody>
+          <a:bodyPr wrap="none" rtlCol="0">
+            <a:spAutoFit/>
+          </a:bodyPr>
+          <a:lstStyle/>
+          <a:p>
+            <a:pPr>
+              <a:lnSpc>
+                <a:spcPct val="95000"/>
+              </a:lnSpc>
+            </a:pPr>
+            <a:r>
+              <a:rPr lang="en-IN" sz="2000" dirty="0"/>
+              <a:t>Requirement</a:t>
+            </a:r>
+          </a:p>
+          <a:p>
+            <a:pPr>
+              <a:lnSpc>
+                <a:spcPct val="95000"/>
+              </a:lnSpc>
+            </a:pPr>
+            <a:r>
+              <a:rPr lang="en-IN" sz="2000" dirty="0"/>
+              <a:t>      ↓</a:t>
+            </a:r>
+          </a:p>
+          <a:p>
+            <a:pPr>
+              <a:lnSpc>
+                <a:spcPct val="95000"/>
+              </a:lnSpc>
+            </a:pPr>
+            <a:r>
+              <a:rPr lang="en-IN" sz="2000" dirty="0"/>
+              <a:t>Write Acceptance Criteria</a:t>
+            </a:r>
+          </a:p>
+          <a:p>
+            <a:pPr>
+              <a:lnSpc>
+                <a:spcPct val="95000"/>
+              </a:lnSpc>
+            </a:pPr>
+            <a:r>
+              <a:rPr lang="en-IN" sz="2000" dirty="0"/>
+              <a:t>      ↓</a:t>
+            </a:r>
+          </a:p>
+          <a:p>
+            <a:pPr>
+              <a:lnSpc>
+                <a:spcPct val="95000"/>
+              </a:lnSpc>
+            </a:pPr>
+            <a:r>
+              <a:rPr lang="en-IN" sz="2000" dirty="0"/>
+              <a:t>Write Unit Tests (TDD)</a:t>
+            </a:r>
+          </a:p>
+          <a:p>
+            <a:pPr>
+              <a:lnSpc>
+                <a:spcPct val="95000"/>
+              </a:lnSpc>
+            </a:pPr>
+            <a:r>
+              <a:rPr lang="en-IN" sz="2000" dirty="0"/>
+              <a:t>      ↓</a:t>
+            </a:r>
+          </a:p>
+          <a:p>
+            <a:pPr>
+              <a:lnSpc>
+                <a:spcPct val="95000"/>
+              </a:lnSpc>
+            </a:pPr>
+            <a:r>
+              <a:rPr lang="en-IN" sz="2000" dirty="0"/>
+              <a:t>Develop Feature</a:t>
+            </a:r>
+          </a:p>
+          <a:p>
+            <a:pPr>
+              <a:lnSpc>
+                <a:spcPct val="95000"/>
+              </a:lnSpc>
+            </a:pPr>
+            <a:r>
+              <a:rPr lang="en-IN" sz="2000" dirty="0"/>
+              <a:t>      ↓</a:t>
+            </a:r>
+          </a:p>
+          <a:p>
+            <a:pPr>
+              <a:lnSpc>
+                <a:spcPct val="95000"/>
+              </a:lnSpc>
+            </a:pPr>
+            <a:r>
+              <a:rPr lang="en-IN" sz="2000" dirty="0"/>
+              <a:t>Run Unit Tests</a:t>
+            </a:r>
+          </a:p>
+          <a:p>
+            <a:pPr>
+              <a:lnSpc>
+                <a:spcPct val="95000"/>
+              </a:lnSpc>
+            </a:pPr>
+            <a:r>
+              <a:rPr lang="en-IN" sz="2000" dirty="0"/>
+              <a:t>      ↓</a:t>
+            </a:r>
+          </a:p>
+          <a:p>
+            <a:pPr>
+              <a:lnSpc>
+                <a:spcPct val="95000"/>
+              </a:lnSpc>
+            </a:pPr>
+            <a:r>
+              <a:rPr lang="en-IN" sz="2000" dirty="0"/>
+              <a:t>Run Integration Tests</a:t>
+            </a:r>
+          </a:p>
+          <a:p>
+            <a:pPr>
+              <a:lnSpc>
+                <a:spcPct val="95000"/>
+              </a:lnSpc>
+            </a:pPr>
+            <a:r>
+              <a:rPr lang="en-IN" sz="2000" dirty="0"/>
+              <a:t>      ↓</a:t>
+            </a:r>
+          </a:p>
+          <a:p>
+            <a:pPr>
+              <a:lnSpc>
+                <a:spcPct val="95000"/>
+              </a:lnSpc>
+            </a:pPr>
+            <a:r>
+              <a:rPr lang="en-IN" sz="2000" dirty="0"/>
+              <a:t>Run UI Tests</a:t>
+            </a:r>
+          </a:p>
+          <a:p>
+            <a:pPr>
+              <a:lnSpc>
+                <a:spcPct val="95000"/>
+              </a:lnSpc>
+            </a:pPr>
+            <a:r>
+              <a:rPr lang="en-IN" sz="2000" dirty="0"/>
+              <a:t>      ↓</a:t>
+            </a:r>
+          </a:p>
+          <a:p>
+            <a:pPr>
+              <a:lnSpc>
+                <a:spcPct val="95000"/>
+              </a:lnSpc>
+            </a:pPr>
+            <a:r>
+              <a:rPr lang="en-IN" sz="2000" dirty="0"/>
+              <a:t>Acceptance Testing</a:t>
+            </a:r>
+          </a:p>
+          <a:p>
+            <a:pPr>
+              <a:lnSpc>
+                <a:spcPct val="95000"/>
+              </a:lnSpc>
+            </a:pPr>
+            <a:r>
+              <a:rPr lang="en-IN" sz="2000" dirty="0"/>
+              <a:t>      ↓</a:t>
+            </a:r>
+          </a:p>
+          <a:p>
+            <a:pPr>
+              <a:lnSpc>
+                <a:spcPct val="95000"/>
+              </a:lnSpc>
+            </a:pPr>
+            <a:r>
+              <a:rPr lang="en-IN" sz="2000" dirty="0"/>
+              <a:t>Refactor Code</a:t>
+            </a:r>
+          </a:p>
+          <a:p>
+            <a:pPr>
+              <a:lnSpc>
+                <a:spcPct val="95000"/>
+              </a:lnSpc>
+            </a:pPr>
+            <a:r>
+              <a:rPr lang="en-IN" sz="2000" dirty="0"/>
+              <a:t>      ↓</a:t>
+            </a:r>
+          </a:p>
+          <a:p>
+            <a:pPr>
+              <a:lnSpc>
+                <a:spcPct val="95000"/>
+              </a:lnSpc>
+            </a:pPr>
+            <a:r>
+              <a:rPr lang="en-IN" sz="2000" dirty="0"/>
+              <a:t>Deploy</a:t>
+            </a:r>
+          </a:p>
+        </p:txBody>
+      </p:sp>
+    </p:spTree>
+    <p:extLst>
+      <p:ext uri="{BB962C8B-B14F-4D97-AF65-F5344CB8AC3E}">
+        <p14:creationId xmlns:p14="http://schemas.microsoft.com/office/powerpoint/2010/main" val="3157462598"/>
       </p:ext>
     </p:extLst>
   </p:cSld>
@@ -5098,12 +8274,2004 @@
           <a:chExt cx="0" cy="0"/>
         </a:xfrm>
       </p:grpSpPr>
+      <p:sp>
+        <p:nvSpPr>
+          <p:cNvPr id="4" name="TextBox 3">
+            <a:extLst>
+              <a:ext uri="{FF2B5EF4-FFF2-40B4-BE49-F238E27FC236}">
+                <a16:creationId xmlns:a16="http://schemas.microsoft.com/office/drawing/2014/main" id="{8AE79CEB-1724-9739-AF42-B3A4680F0AAC}"/>
+              </a:ext>
+            </a:extLst>
+          </p:cNvPr>
+          <p:cNvSpPr txBox="1"/>
+          <p:nvPr/>
+        </p:nvSpPr>
+        <p:spPr>
+          <a:xfrm>
+            <a:off x="765820" y="404664"/>
+            <a:ext cx="2037737" cy="443198"/>
+          </a:xfrm>
+          <a:prstGeom prst="rect">
+            <a:avLst/>
+          </a:prstGeom>
+          <a:noFill/>
+        </p:spPr>
+        <p:txBody>
+          <a:bodyPr wrap="none" rtlCol="0">
+            <a:spAutoFit/>
+          </a:bodyPr>
+          <a:lstStyle>
+            <a:defPPr>
+              <a:defRPr lang="en-US"/>
+            </a:defPPr>
+            <a:lvl1pPr>
+              <a:lnSpc>
+                <a:spcPct val="95000"/>
+              </a:lnSpc>
+              <a:defRPr sz="2200" b="1">
+                <a:solidFill>
+                  <a:srgbClr val="FF0000"/>
+                </a:solidFill>
+              </a:defRPr>
+            </a:lvl1pPr>
+          </a:lstStyle>
+          <a:p>
+            <a:r>
+              <a:rPr lang="en-IN" dirty="0"/>
+              <a:t>Agile Testing</a:t>
+            </a:r>
+          </a:p>
+        </p:txBody>
+      </p:sp>
+      <p:sp>
+        <p:nvSpPr>
+          <p:cNvPr id="5" name="TextBox 4">
+            <a:extLst>
+              <a:ext uri="{FF2B5EF4-FFF2-40B4-BE49-F238E27FC236}">
+                <a16:creationId xmlns:a16="http://schemas.microsoft.com/office/drawing/2014/main" id="{585E1F6C-FC22-B464-B8D0-70662524F8D8}"/>
+              </a:ext>
+            </a:extLst>
+          </p:cNvPr>
+          <p:cNvSpPr txBox="1"/>
+          <p:nvPr/>
+        </p:nvSpPr>
+        <p:spPr>
+          <a:xfrm>
+            <a:off x="756388" y="980728"/>
+            <a:ext cx="10729191" cy="1057212"/>
+          </a:xfrm>
+          <a:prstGeom prst="rect">
+            <a:avLst/>
+          </a:prstGeom>
+          <a:noFill/>
+        </p:spPr>
+        <p:txBody>
+          <a:bodyPr wrap="square" rtlCol="0">
+            <a:spAutoFit/>
+          </a:bodyPr>
+          <a:lstStyle>
+            <a:defPPr>
+              <a:defRPr lang="en-US"/>
+            </a:defPPr>
+            <a:lvl1pPr>
+              <a:lnSpc>
+                <a:spcPct val="95000"/>
+              </a:lnSpc>
+              <a:defRPr sz="2200"/>
+            </a:lvl1pPr>
+          </a:lstStyle>
+          <a:p>
+            <a:r>
+              <a:rPr lang="en-US" dirty="0"/>
+              <a:t>Agile Testing is a software testing approach where testing is performed continuously throughout the development process, instead of waiting until coding is complete</a:t>
+            </a:r>
+            <a:endParaRPr lang="en-IN" dirty="0"/>
+          </a:p>
+        </p:txBody>
+      </p:sp>
+      <p:sp>
+        <p:nvSpPr>
+          <p:cNvPr id="6" name="TextBox 5">
+            <a:extLst>
+              <a:ext uri="{FF2B5EF4-FFF2-40B4-BE49-F238E27FC236}">
+                <a16:creationId xmlns:a16="http://schemas.microsoft.com/office/drawing/2014/main" id="{5750EEA0-81C0-8DD3-15EE-F0D84598C31C}"/>
+              </a:ext>
+            </a:extLst>
+          </p:cNvPr>
+          <p:cNvSpPr txBox="1"/>
+          <p:nvPr/>
+        </p:nvSpPr>
+        <p:spPr>
+          <a:xfrm>
+            <a:off x="981844" y="2276872"/>
+            <a:ext cx="2598788" cy="413959"/>
+          </a:xfrm>
+          <a:prstGeom prst="rect">
+            <a:avLst/>
+          </a:prstGeom>
+          <a:noFill/>
+        </p:spPr>
+        <p:txBody>
+          <a:bodyPr wrap="none" rtlCol="0">
+            <a:spAutoFit/>
+          </a:bodyPr>
+          <a:lstStyle>
+            <a:defPPr>
+              <a:defRPr lang="en-US"/>
+            </a:defPPr>
+            <a:lvl1pPr>
+              <a:lnSpc>
+                <a:spcPct val="95000"/>
+              </a:lnSpc>
+              <a:defRPr sz="2200" b="1">
+                <a:solidFill>
+                  <a:srgbClr val="FF0000"/>
+                </a:solidFill>
+              </a:defRPr>
+            </a:lvl1pPr>
+          </a:lstStyle>
+          <a:p>
+            <a:r>
+              <a:rPr lang="en-IN" dirty="0">
+                <a:solidFill>
+                  <a:schemeClr val="tx1"/>
+                </a:solidFill>
+              </a:rPr>
+              <a:t>Traditional Testing</a:t>
+            </a:r>
+          </a:p>
+        </p:txBody>
+      </p:sp>
+      <p:sp>
+        <p:nvSpPr>
+          <p:cNvPr id="7" name="TextBox 6">
+            <a:extLst>
+              <a:ext uri="{FF2B5EF4-FFF2-40B4-BE49-F238E27FC236}">
+                <a16:creationId xmlns:a16="http://schemas.microsoft.com/office/drawing/2014/main" id="{3DB3A0AD-5052-A49F-983E-11B179E4A52B}"/>
+              </a:ext>
+            </a:extLst>
+          </p:cNvPr>
+          <p:cNvSpPr txBox="1"/>
+          <p:nvPr/>
+        </p:nvSpPr>
+        <p:spPr>
+          <a:xfrm>
+            <a:off x="7490443" y="2200045"/>
+            <a:ext cx="1904689" cy="413959"/>
+          </a:xfrm>
+          <a:prstGeom prst="rect">
+            <a:avLst/>
+          </a:prstGeom>
+          <a:noFill/>
+        </p:spPr>
+        <p:txBody>
+          <a:bodyPr wrap="none" rtlCol="0">
+            <a:spAutoFit/>
+          </a:bodyPr>
+          <a:lstStyle>
+            <a:defPPr>
+              <a:defRPr lang="en-US"/>
+            </a:defPPr>
+            <a:lvl1pPr>
+              <a:lnSpc>
+                <a:spcPct val="95000"/>
+              </a:lnSpc>
+              <a:defRPr sz="2200" b="1">
+                <a:solidFill>
+                  <a:srgbClr val="FF0000"/>
+                </a:solidFill>
+              </a:defRPr>
+            </a:lvl1pPr>
+          </a:lstStyle>
+          <a:p>
+            <a:r>
+              <a:rPr lang="en-IN" dirty="0">
+                <a:solidFill>
+                  <a:schemeClr val="tx1"/>
+                </a:solidFill>
+              </a:rPr>
+              <a:t>Agile Testing</a:t>
+            </a:r>
+          </a:p>
+        </p:txBody>
+      </p:sp>
+      <p:sp>
+        <p:nvSpPr>
+          <p:cNvPr id="8" name="TextBox 7">
+            <a:extLst>
+              <a:ext uri="{FF2B5EF4-FFF2-40B4-BE49-F238E27FC236}">
+                <a16:creationId xmlns:a16="http://schemas.microsoft.com/office/drawing/2014/main" id="{8DE2381E-6483-F884-5411-8231C556C56D}"/>
+              </a:ext>
+            </a:extLst>
+          </p:cNvPr>
+          <p:cNvSpPr txBox="1"/>
+          <p:nvPr/>
+        </p:nvSpPr>
+        <p:spPr>
+          <a:xfrm>
+            <a:off x="1053852" y="2890300"/>
+            <a:ext cx="2050561" cy="2986972"/>
+          </a:xfrm>
+          <a:prstGeom prst="rect">
+            <a:avLst/>
+          </a:prstGeom>
+          <a:noFill/>
+        </p:spPr>
+        <p:txBody>
+          <a:bodyPr wrap="square" rtlCol="0">
+            <a:spAutoFit/>
+          </a:bodyPr>
+          <a:lstStyle>
+            <a:defPPr>
+              <a:defRPr lang="en-US"/>
+            </a:defPPr>
+            <a:lvl1pPr>
+              <a:lnSpc>
+                <a:spcPct val="95000"/>
+              </a:lnSpc>
+              <a:defRPr sz="2200"/>
+            </a:lvl1pPr>
+          </a:lstStyle>
+          <a:p>
+            <a:r>
+              <a:rPr lang="en-US" dirty="0"/>
+              <a:t>Requirements</a:t>
+            </a:r>
+          </a:p>
+          <a:p>
+            <a:r>
+              <a:rPr lang="en-US" dirty="0"/>
+              <a:t>      ↓</a:t>
+            </a:r>
+          </a:p>
+          <a:p>
+            <a:r>
+              <a:rPr lang="en-US" dirty="0"/>
+              <a:t>Design</a:t>
+            </a:r>
+          </a:p>
+          <a:p>
+            <a:r>
+              <a:rPr lang="en-US" dirty="0"/>
+              <a:t>      ↓</a:t>
+            </a:r>
+          </a:p>
+          <a:p>
+            <a:r>
+              <a:rPr lang="en-US" dirty="0"/>
+              <a:t>Coding</a:t>
+            </a:r>
+          </a:p>
+          <a:p>
+            <a:r>
+              <a:rPr lang="en-US" dirty="0"/>
+              <a:t>      ↓</a:t>
+            </a:r>
+          </a:p>
+          <a:p>
+            <a:r>
+              <a:rPr lang="en-US" dirty="0"/>
+              <a:t>Testing</a:t>
+            </a:r>
+          </a:p>
+          <a:p>
+            <a:r>
+              <a:rPr lang="en-US" dirty="0"/>
+              <a:t>      ↓</a:t>
+            </a:r>
+          </a:p>
+          <a:p>
+            <a:r>
+              <a:rPr lang="en-US" dirty="0"/>
+              <a:t>Deployment</a:t>
+            </a:r>
+            <a:endParaRPr lang="en-IN" dirty="0"/>
+          </a:p>
+        </p:txBody>
+      </p:sp>
+      <p:sp>
+        <p:nvSpPr>
+          <p:cNvPr id="9" name="TextBox 8">
+            <a:extLst>
+              <a:ext uri="{FF2B5EF4-FFF2-40B4-BE49-F238E27FC236}">
+                <a16:creationId xmlns:a16="http://schemas.microsoft.com/office/drawing/2014/main" id="{E7643B90-4748-5317-4891-41D5860E3308}"/>
+              </a:ext>
+            </a:extLst>
+          </p:cNvPr>
+          <p:cNvSpPr txBox="1"/>
+          <p:nvPr/>
+        </p:nvSpPr>
+        <p:spPr>
+          <a:xfrm>
+            <a:off x="7519349" y="2692656"/>
+            <a:ext cx="2140330" cy="3630225"/>
+          </a:xfrm>
+          <a:prstGeom prst="rect">
+            <a:avLst/>
+          </a:prstGeom>
+          <a:noFill/>
+        </p:spPr>
+        <p:txBody>
+          <a:bodyPr wrap="square" rtlCol="0">
+            <a:spAutoFit/>
+          </a:bodyPr>
+          <a:lstStyle>
+            <a:defPPr>
+              <a:defRPr lang="en-US"/>
+            </a:defPPr>
+            <a:lvl1pPr>
+              <a:lnSpc>
+                <a:spcPct val="95000"/>
+              </a:lnSpc>
+              <a:defRPr sz="2200"/>
+            </a:lvl1pPr>
+          </a:lstStyle>
+          <a:p>
+            <a:r>
+              <a:rPr lang="en-US" dirty="0"/>
+              <a:t>Plan</a:t>
+            </a:r>
+          </a:p>
+          <a:p>
+            <a:r>
+              <a:rPr lang="en-US" dirty="0"/>
+              <a:t> ↓</a:t>
+            </a:r>
+          </a:p>
+          <a:p>
+            <a:r>
+              <a:rPr lang="en-US" dirty="0"/>
+              <a:t>Develop</a:t>
+            </a:r>
+          </a:p>
+          <a:p>
+            <a:r>
+              <a:rPr lang="en-US" dirty="0"/>
+              <a:t> ↓</a:t>
+            </a:r>
+          </a:p>
+          <a:p>
+            <a:r>
+              <a:rPr lang="en-US" dirty="0"/>
+              <a:t>Test</a:t>
+            </a:r>
+          </a:p>
+          <a:p>
+            <a:r>
+              <a:rPr lang="en-US" dirty="0"/>
+              <a:t> ↓</a:t>
+            </a:r>
+          </a:p>
+          <a:p>
+            <a:r>
+              <a:rPr lang="en-US" dirty="0"/>
+              <a:t>Improve</a:t>
+            </a:r>
+          </a:p>
+          <a:p>
+            <a:r>
+              <a:rPr lang="en-US" dirty="0"/>
+              <a:t> ↓</a:t>
+            </a:r>
+          </a:p>
+          <a:p>
+            <a:r>
+              <a:rPr lang="en-US" dirty="0"/>
+              <a:t>Develop More</a:t>
+            </a:r>
+          </a:p>
+          <a:p>
+            <a:r>
+              <a:rPr lang="en-US" dirty="0"/>
+              <a:t> ↓</a:t>
+            </a:r>
+          </a:p>
+          <a:p>
+            <a:r>
+              <a:rPr lang="en-US" dirty="0"/>
+              <a:t>Test Again</a:t>
+            </a:r>
+            <a:endParaRPr lang="en-IN" dirty="0"/>
+          </a:p>
+        </p:txBody>
+      </p:sp>
+    </p:spTree>
+    <p:extLst>
+      <p:ext uri="{BB962C8B-B14F-4D97-AF65-F5344CB8AC3E}">
+        <p14:creationId xmlns:p14="http://schemas.microsoft.com/office/powerpoint/2010/main" val="2412174486"/>
+      </p:ext>
+    </p:extLst>
+  </p:cSld>
+  <p:clrMapOvr>
+    <a:masterClrMapping/>
+  </p:clrMapOvr>
+  <mc:AlternateContent xmlns:mc="http://schemas.openxmlformats.org/markup-compatibility/2006" xmlns:p14="http://schemas.microsoft.com/office/powerpoint/2010/main">
+    <mc:Choice Requires="p14">
+      <p:transition spd="med" p14:dur="700">
+        <p:fade/>
+      </p:transition>
+    </mc:Choice>
+    <mc:Fallback xmlns="">
+      <p:transition spd="med">
+        <p:fade/>
+      </p:transition>
+    </mc:Fallback>
+  </mc:AlternateContent>
+</p:sld>
+</file>
+
+<file path=ppt/slides/slide4.xml><?xml version="1.0" encoding="utf-8"?>
+<p:sld xmlns:a="http://schemas.openxmlformats.org/drawingml/2006/main" xmlns:r="http://schemas.openxmlformats.org/officeDocument/2006/relationships" xmlns:p="http://schemas.openxmlformats.org/presentationml/2006/main">
+  <p:cSld>
+    <p:spTree>
+      <p:nvGrpSpPr>
+        <p:cNvPr id="1" name=""/>
+        <p:cNvGrpSpPr/>
+        <p:nvPr/>
+      </p:nvGrpSpPr>
+      <p:grpSpPr>
+        <a:xfrm>
+          <a:off x="0" y="0"/>
+          <a:ext cx="0" cy="0"/>
+          <a:chOff x="0" y="0"/>
+          <a:chExt cx="0" cy="0"/>
+        </a:xfrm>
+      </p:grpSpPr>
+      <p:sp>
+        <p:nvSpPr>
+          <p:cNvPr id="4" name="TextBox 3">
+            <a:extLst>
+              <a:ext uri="{FF2B5EF4-FFF2-40B4-BE49-F238E27FC236}">
+                <a16:creationId xmlns:a16="http://schemas.microsoft.com/office/drawing/2014/main" id="{7AE08547-2BAF-3B7B-124E-8C6B6C51573F}"/>
+              </a:ext>
+            </a:extLst>
+          </p:cNvPr>
+          <p:cNvSpPr txBox="1"/>
+          <p:nvPr/>
+        </p:nvSpPr>
+        <p:spPr>
+          <a:xfrm>
+            <a:off x="1125860" y="332656"/>
+            <a:ext cx="3584636" cy="413959"/>
+          </a:xfrm>
+          <a:prstGeom prst="rect">
+            <a:avLst/>
+          </a:prstGeom>
+          <a:noFill/>
+        </p:spPr>
+        <p:txBody>
+          <a:bodyPr wrap="none" rtlCol="0">
+            <a:spAutoFit/>
+          </a:bodyPr>
+          <a:lstStyle>
+            <a:defPPr>
+              <a:defRPr lang="en-US"/>
+            </a:defPPr>
+            <a:lvl1pPr>
+              <a:lnSpc>
+                <a:spcPct val="95000"/>
+              </a:lnSpc>
+              <a:defRPr sz="2200" b="1">
+                <a:solidFill>
+                  <a:srgbClr val="FF0000"/>
+                </a:solidFill>
+              </a:defRPr>
+            </a:lvl1pPr>
+          </a:lstStyle>
+          <a:p>
+            <a:r>
+              <a:rPr lang="en-IN" dirty="0"/>
+              <a:t>Principles of Agile Testers</a:t>
+            </a:r>
+          </a:p>
+        </p:txBody>
+      </p:sp>
+      <p:sp>
+        <p:nvSpPr>
+          <p:cNvPr id="5" name="TextBox 4">
+            <a:extLst>
+              <a:ext uri="{FF2B5EF4-FFF2-40B4-BE49-F238E27FC236}">
+                <a16:creationId xmlns:a16="http://schemas.microsoft.com/office/drawing/2014/main" id="{0B6DB340-8AD1-8B27-F70E-B70D82281055}"/>
+              </a:ext>
+            </a:extLst>
+          </p:cNvPr>
+          <p:cNvSpPr txBox="1"/>
+          <p:nvPr/>
+        </p:nvSpPr>
+        <p:spPr>
+          <a:xfrm>
+            <a:off x="1125860" y="836712"/>
+            <a:ext cx="10009112" cy="794064"/>
+          </a:xfrm>
+          <a:prstGeom prst="rect">
+            <a:avLst/>
+          </a:prstGeom>
+          <a:noFill/>
+        </p:spPr>
+        <p:txBody>
+          <a:bodyPr wrap="square" rtlCol="0">
+            <a:spAutoFit/>
+          </a:bodyPr>
+          <a:lstStyle>
+            <a:defPPr>
+              <a:defRPr lang="en-US"/>
+            </a:defPPr>
+            <a:lvl1pPr>
+              <a:lnSpc>
+                <a:spcPct val="95000"/>
+              </a:lnSpc>
+              <a:defRPr sz="2200"/>
+            </a:lvl1pPr>
+          </a:lstStyle>
+          <a:p>
+            <a:r>
+              <a:rPr lang="en-US" dirty="0"/>
+              <a:t>An Agile Tester is not just someone who finds bugs. They help the team build quality software</a:t>
+            </a:r>
+            <a:endParaRPr lang="en-IN" dirty="0"/>
+          </a:p>
+        </p:txBody>
+      </p:sp>
+      <p:sp>
+        <p:nvSpPr>
+          <p:cNvPr id="6" name="TextBox 5">
+            <a:extLst>
+              <a:ext uri="{FF2B5EF4-FFF2-40B4-BE49-F238E27FC236}">
+                <a16:creationId xmlns:a16="http://schemas.microsoft.com/office/drawing/2014/main" id="{31D65286-B7D8-4DC5-6785-064B94A15DCC}"/>
+              </a:ext>
+            </a:extLst>
+          </p:cNvPr>
+          <p:cNvSpPr txBox="1"/>
+          <p:nvPr/>
+        </p:nvSpPr>
+        <p:spPr>
+          <a:xfrm>
+            <a:off x="1133669" y="1772816"/>
+            <a:ext cx="2988319" cy="413959"/>
+          </a:xfrm>
+          <a:prstGeom prst="rect">
+            <a:avLst/>
+          </a:prstGeom>
+          <a:noFill/>
+        </p:spPr>
+        <p:txBody>
+          <a:bodyPr wrap="none" rtlCol="0">
+            <a:spAutoFit/>
+          </a:bodyPr>
+          <a:lstStyle>
+            <a:defPPr>
+              <a:defRPr lang="en-US"/>
+            </a:defPPr>
+            <a:lvl1pPr>
+              <a:lnSpc>
+                <a:spcPct val="95000"/>
+              </a:lnSpc>
+              <a:defRPr sz="2200" b="1"/>
+            </a:lvl1pPr>
+          </a:lstStyle>
+          <a:p>
+            <a:r>
+              <a:rPr lang="en-IN" dirty="0"/>
+              <a:t>Principle 1: Test Early</a:t>
+            </a:r>
+          </a:p>
+        </p:txBody>
+      </p:sp>
+      <p:sp>
+        <p:nvSpPr>
+          <p:cNvPr id="7" name="TextBox 6">
+            <a:extLst>
+              <a:ext uri="{FF2B5EF4-FFF2-40B4-BE49-F238E27FC236}">
+                <a16:creationId xmlns:a16="http://schemas.microsoft.com/office/drawing/2014/main" id="{E860058F-BB13-66B8-E63A-6E8272FC0BDE}"/>
+              </a:ext>
+            </a:extLst>
+          </p:cNvPr>
+          <p:cNvSpPr txBox="1"/>
+          <p:nvPr/>
+        </p:nvSpPr>
+        <p:spPr>
+          <a:xfrm>
+            <a:off x="1137422" y="2367288"/>
+            <a:ext cx="4597734" cy="413959"/>
+          </a:xfrm>
+          <a:prstGeom prst="rect">
+            <a:avLst/>
+          </a:prstGeom>
+          <a:noFill/>
+        </p:spPr>
+        <p:txBody>
+          <a:bodyPr wrap="square" rtlCol="0">
+            <a:spAutoFit/>
+          </a:bodyPr>
+          <a:lstStyle>
+            <a:defPPr>
+              <a:defRPr lang="en-US"/>
+            </a:defPPr>
+            <a:lvl1pPr>
+              <a:lnSpc>
+                <a:spcPct val="95000"/>
+              </a:lnSpc>
+              <a:defRPr sz="2200"/>
+            </a:lvl1pPr>
+          </a:lstStyle>
+          <a:p>
+            <a:r>
+              <a:rPr lang="en-US" dirty="0"/>
+              <a:t>Don't wait until coding is finished</a:t>
+            </a:r>
+            <a:endParaRPr lang="en-IN" dirty="0"/>
+          </a:p>
+        </p:txBody>
+      </p:sp>
+      <p:sp>
+        <p:nvSpPr>
+          <p:cNvPr id="8" name="TextBox 7">
+            <a:extLst>
+              <a:ext uri="{FF2B5EF4-FFF2-40B4-BE49-F238E27FC236}">
+                <a16:creationId xmlns:a16="http://schemas.microsoft.com/office/drawing/2014/main" id="{870F9E53-E52F-D86C-B037-7E9B5F164A5D}"/>
+              </a:ext>
+            </a:extLst>
+          </p:cNvPr>
+          <p:cNvSpPr txBox="1"/>
+          <p:nvPr/>
+        </p:nvSpPr>
+        <p:spPr>
+          <a:xfrm>
+            <a:off x="2180431" y="2904894"/>
+            <a:ext cx="1941557" cy="2343719"/>
+          </a:xfrm>
+          <a:prstGeom prst="rect">
+            <a:avLst/>
+          </a:prstGeom>
+          <a:noFill/>
+        </p:spPr>
+        <p:txBody>
+          <a:bodyPr wrap="square" rtlCol="0">
+            <a:spAutoFit/>
+          </a:bodyPr>
+          <a:lstStyle>
+            <a:defPPr>
+              <a:defRPr lang="en-US"/>
+            </a:defPPr>
+            <a:lvl1pPr>
+              <a:lnSpc>
+                <a:spcPct val="95000"/>
+              </a:lnSpc>
+              <a:defRPr sz="2200"/>
+            </a:lvl1pPr>
+          </a:lstStyle>
+          <a:p>
+            <a:r>
+              <a:rPr lang="en-US" dirty="0"/>
+              <a:t>Requirement</a:t>
+            </a:r>
+          </a:p>
+          <a:p>
+            <a:r>
+              <a:rPr lang="en-US" dirty="0"/>
+              <a:t>   ↓</a:t>
+            </a:r>
+          </a:p>
+          <a:p>
+            <a:r>
+              <a:rPr lang="en-US" dirty="0"/>
+              <a:t>Test Idea</a:t>
+            </a:r>
+          </a:p>
+          <a:p>
+            <a:r>
+              <a:rPr lang="en-US" dirty="0"/>
+              <a:t>   ↓</a:t>
+            </a:r>
+          </a:p>
+          <a:p>
+            <a:r>
+              <a:rPr lang="en-US" dirty="0"/>
+              <a:t>Coding</a:t>
+            </a:r>
+          </a:p>
+          <a:p>
+            <a:r>
+              <a:rPr lang="en-US" dirty="0"/>
+              <a:t>   ↓</a:t>
+            </a:r>
+          </a:p>
+          <a:p>
+            <a:r>
+              <a:rPr lang="en-US" dirty="0"/>
+              <a:t>Testing</a:t>
+            </a:r>
+            <a:endParaRPr lang="en-IN" dirty="0"/>
+          </a:p>
+        </p:txBody>
+      </p:sp>
+      <p:sp>
+        <p:nvSpPr>
+          <p:cNvPr id="9" name="TextBox 8">
+            <a:extLst>
+              <a:ext uri="{FF2B5EF4-FFF2-40B4-BE49-F238E27FC236}">
+                <a16:creationId xmlns:a16="http://schemas.microsoft.com/office/drawing/2014/main" id="{A867FE8A-9880-94FA-4890-2B299D9BEB2A}"/>
+              </a:ext>
+            </a:extLst>
+          </p:cNvPr>
+          <p:cNvSpPr txBox="1"/>
+          <p:nvPr/>
+        </p:nvSpPr>
+        <p:spPr>
+          <a:xfrm>
+            <a:off x="1205677" y="5604895"/>
+            <a:ext cx="4942379" cy="413959"/>
+          </a:xfrm>
+          <a:prstGeom prst="rect">
+            <a:avLst/>
+          </a:prstGeom>
+          <a:noFill/>
+        </p:spPr>
+        <p:txBody>
+          <a:bodyPr wrap="square" rtlCol="0">
+            <a:spAutoFit/>
+          </a:bodyPr>
+          <a:lstStyle>
+            <a:defPPr>
+              <a:defRPr lang="en-US"/>
+            </a:defPPr>
+            <a:lvl1pPr>
+              <a:lnSpc>
+                <a:spcPct val="95000"/>
+              </a:lnSpc>
+              <a:defRPr sz="2200"/>
+            </a:lvl1pPr>
+          </a:lstStyle>
+          <a:p>
+            <a:r>
+              <a:rPr lang="en-US" dirty="0"/>
+              <a:t>Early testing catches bugs cheaply</a:t>
+            </a:r>
+            <a:endParaRPr lang="en-IN" dirty="0"/>
+          </a:p>
+        </p:txBody>
+      </p:sp>
+      <p:sp>
+        <p:nvSpPr>
+          <p:cNvPr id="10" name="TextBox 9">
+            <a:extLst>
+              <a:ext uri="{FF2B5EF4-FFF2-40B4-BE49-F238E27FC236}">
+                <a16:creationId xmlns:a16="http://schemas.microsoft.com/office/drawing/2014/main" id="{5324DAA5-FFCA-2195-A485-C4FCDF2E6B7F}"/>
+              </a:ext>
+            </a:extLst>
+          </p:cNvPr>
+          <p:cNvSpPr txBox="1"/>
+          <p:nvPr/>
+        </p:nvSpPr>
+        <p:spPr>
+          <a:xfrm>
+            <a:off x="7030516" y="1668869"/>
+            <a:ext cx="4104456" cy="413959"/>
+          </a:xfrm>
+          <a:prstGeom prst="rect">
+            <a:avLst/>
+          </a:prstGeom>
+          <a:noFill/>
+        </p:spPr>
+        <p:txBody>
+          <a:bodyPr wrap="square" rtlCol="0">
+            <a:spAutoFit/>
+          </a:bodyPr>
+          <a:lstStyle>
+            <a:defPPr>
+              <a:defRPr lang="en-US"/>
+            </a:defPPr>
+            <a:lvl1pPr>
+              <a:lnSpc>
+                <a:spcPct val="95000"/>
+              </a:lnSpc>
+              <a:defRPr sz="2200" b="1"/>
+            </a:lvl1pPr>
+          </a:lstStyle>
+          <a:p>
+            <a:r>
+              <a:rPr lang="en-IN" dirty="0"/>
+              <a:t>Principle 2: Test Continuously</a:t>
+            </a:r>
+          </a:p>
+        </p:txBody>
+      </p:sp>
+      <p:sp>
+        <p:nvSpPr>
+          <p:cNvPr id="11" name="TextBox 10">
+            <a:extLst>
+              <a:ext uri="{FF2B5EF4-FFF2-40B4-BE49-F238E27FC236}">
+                <a16:creationId xmlns:a16="http://schemas.microsoft.com/office/drawing/2014/main" id="{1C3BB055-85DA-7205-4E78-5C9A1425FA65}"/>
+              </a:ext>
+            </a:extLst>
+          </p:cNvPr>
+          <p:cNvSpPr txBox="1"/>
+          <p:nvPr/>
+        </p:nvSpPr>
+        <p:spPr>
+          <a:xfrm>
+            <a:off x="7091665" y="2292459"/>
+            <a:ext cx="3959738" cy="413959"/>
+          </a:xfrm>
+          <a:prstGeom prst="rect">
+            <a:avLst/>
+          </a:prstGeom>
+          <a:noFill/>
+        </p:spPr>
+        <p:txBody>
+          <a:bodyPr wrap="square" rtlCol="0">
+            <a:spAutoFit/>
+          </a:bodyPr>
+          <a:lstStyle>
+            <a:defPPr>
+              <a:defRPr lang="en-US"/>
+            </a:defPPr>
+            <a:lvl1pPr>
+              <a:lnSpc>
+                <a:spcPct val="95000"/>
+              </a:lnSpc>
+              <a:defRPr sz="2200"/>
+            </a:lvl1pPr>
+          </a:lstStyle>
+          <a:p>
+            <a:r>
+              <a:rPr lang="en-IN" dirty="0"/>
+              <a:t>Every sprint includes testing.</a:t>
+            </a:r>
+          </a:p>
+        </p:txBody>
+      </p:sp>
+      <p:sp>
+        <p:nvSpPr>
+          <p:cNvPr id="12" name="TextBox 11">
+            <a:extLst>
+              <a:ext uri="{FF2B5EF4-FFF2-40B4-BE49-F238E27FC236}">
+                <a16:creationId xmlns:a16="http://schemas.microsoft.com/office/drawing/2014/main" id="{550F4EDE-A4B1-E488-E9CD-2087E904A565}"/>
+              </a:ext>
+            </a:extLst>
+          </p:cNvPr>
+          <p:cNvSpPr txBox="1"/>
+          <p:nvPr/>
+        </p:nvSpPr>
+        <p:spPr>
+          <a:xfrm>
+            <a:off x="7822604" y="2916049"/>
+            <a:ext cx="1874869" cy="3630225"/>
+          </a:xfrm>
+          <a:prstGeom prst="rect">
+            <a:avLst/>
+          </a:prstGeom>
+          <a:noFill/>
+        </p:spPr>
+        <p:txBody>
+          <a:bodyPr wrap="square" rtlCol="0">
+            <a:spAutoFit/>
+          </a:bodyPr>
+          <a:lstStyle>
+            <a:defPPr>
+              <a:defRPr lang="en-US"/>
+            </a:defPPr>
+            <a:lvl1pPr>
+              <a:lnSpc>
+                <a:spcPct val="95000"/>
+              </a:lnSpc>
+              <a:defRPr sz="2200"/>
+            </a:lvl1pPr>
+          </a:lstStyle>
+          <a:p>
+            <a:r>
+              <a:rPr lang="en-US" dirty="0"/>
+              <a:t>Sprint 1</a:t>
+            </a:r>
+          </a:p>
+          <a:p>
+            <a:r>
+              <a:rPr lang="en-US" dirty="0"/>
+              <a:t>Develop</a:t>
+            </a:r>
+          </a:p>
+          <a:p>
+            <a:r>
+              <a:rPr lang="en-US" dirty="0"/>
+              <a:t>Test</a:t>
+            </a:r>
+          </a:p>
+          <a:p>
+            <a:endParaRPr lang="en-US" dirty="0"/>
+          </a:p>
+          <a:p>
+            <a:r>
+              <a:rPr lang="en-US" dirty="0"/>
+              <a:t>Sprint 2</a:t>
+            </a:r>
+          </a:p>
+          <a:p>
+            <a:r>
+              <a:rPr lang="en-US" dirty="0"/>
+              <a:t>Develop</a:t>
+            </a:r>
+          </a:p>
+          <a:p>
+            <a:r>
+              <a:rPr lang="en-US" dirty="0"/>
+              <a:t>Test</a:t>
+            </a:r>
+          </a:p>
+          <a:p>
+            <a:endParaRPr lang="en-US" dirty="0"/>
+          </a:p>
+          <a:p>
+            <a:r>
+              <a:rPr lang="en-US" dirty="0"/>
+              <a:t>Sprint 3</a:t>
+            </a:r>
+          </a:p>
+          <a:p>
+            <a:r>
+              <a:rPr lang="en-US" dirty="0"/>
+              <a:t>Develop</a:t>
+            </a:r>
+          </a:p>
+          <a:p>
+            <a:r>
+              <a:rPr lang="en-US" dirty="0"/>
+              <a:t>Test</a:t>
+            </a:r>
+            <a:endParaRPr lang="en-IN" dirty="0"/>
+          </a:p>
+        </p:txBody>
+      </p:sp>
+    </p:spTree>
+    <p:extLst>
+      <p:ext uri="{BB962C8B-B14F-4D97-AF65-F5344CB8AC3E}">
+        <p14:creationId xmlns:p14="http://schemas.microsoft.com/office/powerpoint/2010/main" val="3220249504"/>
+      </p:ext>
+    </p:extLst>
+  </p:cSld>
+  <p:clrMapOvr>
+    <a:masterClrMapping/>
+  </p:clrMapOvr>
+  <mc:AlternateContent xmlns:mc="http://schemas.openxmlformats.org/markup-compatibility/2006" xmlns:p14="http://schemas.microsoft.com/office/powerpoint/2010/main">
+    <mc:Choice Requires="p14">
+      <p:transition spd="med" p14:dur="700">
+        <p:fade/>
+      </p:transition>
+    </mc:Choice>
+    <mc:Fallback xmlns="">
+      <p:transition spd="med">
+        <p:fade/>
+      </p:transition>
+    </mc:Fallback>
+  </mc:AlternateContent>
+</p:sld>
+</file>
+
+<file path=ppt/slides/slide5.xml><?xml version="1.0" encoding="utf-8"?>
+<p:sld xmlns:a="http://schemas.openxmlformats.org/drawingml/2006/main" xmlns:r="http://schemas.openxmlformats.org/officeDocument/2006/relationships" xmlns:p="http://schemas.openxmlformats.org/presentationml/2006/main">
+  <p:cSld>
+    <p:spTree>
+      <p:nvGrpSpPr>
+        <p:cNvPr id="1" name=""/>
+        <p:cNvGrpSpPr/>
+        <p:nvPr/>
+      </p:nvGrpSpPr>
+      <p:grpSpPr>
+        <a:xfrm>
+          <a:off x="0" y="0"/>
+          <a:ext cx="0" cy="0"/>
+          <a:chOff x="0" y="0"/>
+          <a:chExt cx="0" cy="0"/>
+        </a:xfrm>
+      </p:grpSpPr>
+      <p:sp>
+        <p:nvSpPr>
+          <p:cNvPr id="4" name="TextBox 3">
+            <a:extLst>
+              <a:ext uri="{FF2B5EF4-FFF2-40B4-BE49-F238E27FC236}">
+                <a16:creationId xmlns:a16="http://schemas.microsoft.com/office/drawing/2014/main" id="{7A558CCD-86B0-F0E8-2D7E-A7055DEFCDF0}"/>
+              </a:ext>
+            </a:extLst>
+          </p:cNvPr>
+          <p:cNvSpPr txBox="1"/>
+          <p:nvPr/>
+        </p:nvSpPr>
+        <p:spPr>
+          <a:xfrm>
+            <a:off x="1125860" y="332656"/>
+            <a:ext cx="3584636" cy="413959"/>
+          </a:xfrm>
+          <a:prstGeom prst="rect">
+            <a:avLst/>
+          </a:prstGeom>
+          <a:noFill/>
+        </p:spPr>
+        <p:txBody>
+          <a:bodyPr wrap="none" rtlCol="0">
+            <a:spAutoFit/>
+          </a:bodyPr>
+          <a:lstStyle>
+            <a:defPPr>
+              <a:defRPr lang="en-US"/>
+            </a:defPPr>
+            <a:lvl1pPr>
+              <a:lnSpc>
+                <a:spcPct val="95000"/>
+              </a:lnSpc>
+              <a:defRPr sz="2200" b="1">
+                <a:solidFill>
+                  <a:srgbClr val="FF0000"/>
+                </a:solidFill>
+              </a:defRPr>
+            </a:lvl1pPr>
+          </a:lstStyle>
+          <a:p>
+            <a:r>
+              <a:rPr lang="en-IN" dirty="0"/>
+              <a:t>Principles of Agile Testers</a:t>
+            </a:r>
+          </a:p>
+        </p:txBody>
+      </p:sp>
+      <p:sp>
+        <p:nvSpPr>
+          <p:cNvPr id="5" name="TextBox 4">
+            <a:extLst>
+              <a:ext uri="{FF2B5EF4-FFF2-40B4-BE49-F238E27FC236}">
+                <a16:creationId xmlns:a16="http://schemas.microsoft.com/office/drawing/2014/main" id="{C16739F5-D511-192E-C3CD-72F1649D1293}"/>
+              </a:ext>
+            </a:extLst>
+          </p:cNvPr>
+          <p:cNvSpPr txBox="1"/>
+          <p:nvPr/>
+        </p:nvSpPr>
+        <p:spPr>
+          <a:xfrm>
+            <a:off x="1091073" y="836712"/>
+            <a:ext cx="5319085" cy="413959"/>
+          </a:xfrm>
+          <a:prstGeom prst="rect">
+            <a:avLst/>
+          </a:prstGeom>
+          <a:noFill/>
+        </p:spPr>
+        <p:txBody>
+          <a:bodyPr wrap="none" rtlCol="0">
+            <a:spAutoFit/>
+          </a:bodyPr>
+          <a:lstStyle>
+            <a:defPPr>
+              <a:defRPr lang="en-US"/>
+            </a:defPPr>
+            <a:lvl1pPr>
+              <a:lnSpc>
+                <a:spcPct val="95000"/>
+              </a:lnSpc>
+              <a:defRPr sz="2200" b="1"/>
+            </a:lvl1pPr>
+          </a:lstStyle>
+          <a:p>
+            <a:r>
+              <a:rPr lang="en-US" dirty="0"/>
+              <a:t>Principle 3: Whole Team Owns Quality</a:t>
+            </a:r>
+            <a:endParaRPr lang="en-IN" dirty="0"/>
+          </a:p>
+        </p:txBody>
+      </p:sp>
+      <p:sp>
+        <p:nvSpPr>
+          <p:cNvPr id="6" name="TextBox 5">
+            <a:extLst>
+              <a:ext uri="{FF2B5EF4-FFF2-40B4-BE49-F238E27FC236}">
+                <a16:creationId xmlns:a16="http://schemas.microsoft.com/office/drawing/2014/main" id="{067CDC76-9BD3-1A7A-E0DC-C4DA1D071F92}"/>
+              </a:ext>
+            </a:extLst>
+          </p:cNvPr>
+          <p:cNvSpPr txBox="1"/>
+          <p:nvPr/>
+        </p:nvSpPr>
+        <p:spPr>
+          <a:xfrm>
+            <a:off x="1125860" y="1412776"/>
+            <a:ext cx="2332690" cy="1057212"/>
+          </a:xfrm>
+          <a:prstGeom prst="rect">
+            <a:avLst/>
+          </a:prstGeom>
+          <a:noFill/>
+        </p:spPr>
+        <p:txBody>
+          <a:bodyPr wrap="square" rtlCol="0">
+            <a:spAutoFit/>
+          </a:bodyPr>
+          <a:lstStyle>
+            <a:defPPr>
+              <a:defRPr lang="en-US"/>
+            </a:defPPr>
+            <a:lvl1pPr>
+              <a:lnSpc>
+                <a:spcPct val="95000"/>
+              </a:lnSpc>
+              <a:defRPr sz="2200"/>
+            </a:lvl1pPr>
+          </a:lstStyle>
+          <a:p>
+            <a:r>
+              <a:rPr lang="en-US" dirty="0"/>
+              <a:t>Not only testers.</a:t>
+            </a:r>
+          </a:p>
+          <a:p>
+            <a:r>
+              <a:rPr lang="en-US" dirty="0"/>
+              <a:t>Everyone tests</a:t>
+            </a:r>
+          </a:p>
+          <a:p>
+            <a:endParaRPr lang="en-IN" dirty="0"/>
+          </a:p>
+        </p:txBody>
+      </p:sp>
+      <p:sp>
+        <p:nvSpPr>
+          <p:cNvPr id="7" name="TextBox 6">
+            <a:extLst>
+              <a:ext uri="{FF2B5EF4-FFF2-40B4-BE49-F238E27FC236}">
+                <a16:creationId xmlns:a16="http://schemas.microsoft.com/office/drawing/2014/main" id="{3012B39D-2840-0E45-F138-65B50DD40EB0}"/>
+              </a:ext>
+            </a:extLst>
+          </p:cNvPr>
+          <p:cNvSpPr txBox="1"/>
+          <p:nvPr/>
+        </p:nvSpPr>
+        <p:spPr>
+          <a:xfrm>
+            <a:off x="1091073" y="2276872"/>
+            <a:ext cx="3134191" cy="3074944"/>
+          </a:xfrm>
+          <a:prstGeom prst="rect">
+            <a:avLst/>
+          </a:prstGeom>
+          <a:noFill/>
+        </p:spPr>
+        <p:txBody>
+          <a:bodyPr wrap="square" rtlCol="0">
+            <a:spAutoFit/>
+          </a:bodyPr>
+          <a:lstStyle>
+            <a:defPPr>
+              <a:defRPr lang="en-US"/>
+            </a:defPPr>
+            <a:lvl1pPr>
+              <a:lnSpc>
+                <a:spcPct val="95000"/>
+              </a:lnSpc>
+              <a:defRPr sz="2200"/>
+            </a:lvl1pPr>
+          </a:lstStyle>
+          <a:p>
+            <a:pPr marL="342900" indent="-342900">
+              <a:lnSpc>
+                <a:spcPct val="150000"/>
+              </a:lnSpc>
+              <a:buFont typeface="Arial" panose="020B0604020202020204" pitchFamily="34" charset="0"/>
+              <a:buChar char="•"/>
+            </a:pPr>
+            <a:r>
+              <a:rPr lang="en-US" dirty="0"/>
+              <a:t>Developer </a:t>
+            </a:r>
+          </a:p>
+          <a:p>
+            <a:pPr marL="342900" indent="-342900">
+              <a:lnSpc>
+                <a:spcPct val="150000"/>
+              </a:lnSpc>
+              <a:buFont typeface="Arial" panose="020B0604020202020204" pitchFamily="34" charset="0"/>
+              <a:buChar char="•"/>
+            </a:pPr>
+            <a:r>
+              <a:rPr lang="en-US" dirty="0"/>
+              <a:t>Tester </a:t>
+            </a:r>
+          </a:p>
+          <a:p>
+            <a:pPr marL="342900" indent="-342900">
+              <a:lnSpc>
+                <a:spcPct val="150000"/>
+              </a:lnSpc>
+              <a:buFont typeface="Arial" panose="020B0604020202020204" pitchFamily="34" charset="0"/>
+              <a:buChar char="•"/>
+            </a:pPr>
+            <a:r>
+              <a:rPr lang="en-US" dirty="0"/>
+              <a:t>Product Owner </a:t>
+            </a:r>
+          </a:p>
+          <a:p>
+            <a:pPr marL="342900" indent="-342900">
+              <a:lnSpc>
+                <a:spcPct val="150000"/>
+              </a:lnSpc>
+              <a:buFont typeface="Arial" panose="020B0604020202020204" pitchFamily="34" charset="0"/>
+              <a:buChar char="•"/>
+            </a:pPr>
+            <a:r>
+              <a:rPr lang="en-US" dirty="0"/>
+              <a:t>Customer </a:t>
+            </a:r>
+          </a:p>
+          <a:p>
+            <a:pPr>
+              <a:lnSpc>
+                <a:spcPct val="150000"/>
+              </a:lnSpc>
+            </a:pPr>
+            <a:r>
+              <a:rPr lang="en-US" dirty="0"/>
+              <a:t>Everyone contributes.</a:t>
+            </a:r>
+          </a:p>
+          <a:p>
+            <a:pPr>
+              <a:lnSpc>
+                <a:spcPct val="150000"/>
+              </a:lnSpc>
+            </a:pPr>
+            <a:endParaRPr lang="en-IN" dirty="0"/>
+          </a:p>
+        </p:txBody>
+      </p:sp>
+      <p:sp>
+        <p:nvSpPr>
+          <p:cNvPr id="8" name="TextBox 7">
+            <a:extLst>
+              <a:ext uri="{FF2B5EF4-FFF2-40B4-BE49-F238E27FC236}">
+                <a16:creationId xmlns:a16="http://schemas.microsoft.com/office/drawing/2014/main" id="{2BB13C2C-4E4C-118B-4A2E-D9DAE98B405E}"/>
+              </a:ext>
+            </a:extLst>
+          </p:cNvPr>
+          <p:cNvSpPr txBox="1"/>
+          <p:nvPr/>
+        </p:nvSpPr>
+        <p:spPr>
+          <a:xfrm>
+            <a:off x="6410158" y="1734402"/>
+            <a:ext cx="5008102" cy="413959"/>
+          </a:xfrm>
+          <a:prstGeom prst="rect">
+            <a:avLst/>
+          </a:prstGeom>
+          <a:noFill/>
+        </p:spPr>
+        <p:txBody>
+          <a:bodyPr wrap="none" rtlCol="0">
+            <a:spAutoFit/>
+          </a:bodyPr>
+          <a:lstStyle>
+            <a:defPPr>
+              <a:defRPr lang="en-US"/>
+            </a:defPPr>
+            <a:lvl1pPr>
+              <a:lnSpc>
+                <a:spcPct val="95000"/>
+              </a:lnSpc>
+              <a:defRPr sz="2200" b="1"/>
+            </a:lvl1pPr>
+          </a:lstStyle>
+          <a:p>
+            <a:r>
+              <a:rPr lang="en-IN" dirty="0"/>
+              <a:t>Principle 4: Customer Collaboration</a:t>
+            </a:r>
+          </a:p>
+        </p:txBody>
+      </p:sp>
+      <p:sp>
+        <p:nvSpPr>
+          <p:cNvPr id="9" name="TextBox 8">
+            <a:extLst>
+              <a:ext uri="{FF2B5EF4-FFF2-40B4-BE49-F238E27FC236}">
+                <a16:creationId xmlns:a16="http://schemas.microsoft.com/office/drawing/2014/main" id="{61F34134-3B24-504C-AD0D-B88A610345DC}"/>
+              </a:ext>
+            </a:extLst>
+          </p:cNvPr>
+          <p:cNvSpPr txBox="1"/>
+          <p:nvPr/>
+        </p:nvSpPr>
+        <p:spPr>
+          <a:xfrm>
+            <a:off x="6410158" y="2204864"/>
+            <a:ext cx="5084854" cy="735586"/>
+          </a:xfrm>
+          <a:prstGeom prst="rect">
+            <a:avLst/>
+          </a:prstGeom>
+          <a:noFill/>
+        </p:spPr>
+        <p:txBody>
+          <a:bodyPr wrap="square" rtlCol="0">
+            <a:spAutoFit/>
+          </a:bodyPr>
+          <a:lstStyle>
+            <a:defPPr>
+              <a:defRPr lang="en-US"/>
+            </a:defPPr>
+            <a:lvl1pPr>
+              <a:lnSpc>
+                <a:spcPct val="95000"/>
+              </a:lnSpc>
+              <a:defRPr sz="2200"/>
+            </a:lvl1pPr>
+          </a:lstStyle>
+          <a:p>
+            <a:r>
+              <a:rPr lang="en-US" dirty="0"/>
+              <a:t>Customer checks whether the software meets expectations</a:t>
+            </a:r>
+            <a:endParaRPr lang="en-IN" dirty="0"/>
+          </a:p>
+        </p:txBody>
+      </p:sp>
+      <p:sp>
+        <p:nvSpPr>
+          <p:cNvPr id="10" name="TextBox 9">
+            <a:extLst>
+              <a:ext uri="{FF2B5EF4-FFF2-40B4-BE49-F238E27FC236}">
+                <a16:creationId xmlns:a16="http://schemas.microsoft.com/office/drawing/2014/main" id="{5796EBE5-21CB-6FA8-0065-0813F664D803}"/>
+              </a:ext>
+            </a:extLst>
+          </p:cNvPr>
+          <p:cNvSpPr txBox="1"/>
+          <p:nvPr/>
+        </p:nvSpPr>
+        <p:spPr>
+          <a:xfrm>
+            <a:off x="6410158" y="3068960"/>
+            <a:ext cx="4543231" cy="2059282"/>
+          </a:xfrm>
+          <a:prstGeom prst="rect">
+            <a:avLst/>
+          </a:prstGeom>
+          <a:noFill/>
+        </p:spPr>
+        <p:txBody>
+          <a:bodyPr wrap="square" rtlCol="0">
+            <a:spAutoFit/>
+          </a:bodyPr>
+          <a:lstStyle>
+            <a:defPPr>
+              <a:defRPr lang="en-US"/>
+            </a:defPPr>
+            <a:lvl1pPr marL="342900" indent="-342900">
+              <a:lnSpc>
+                <a:spcPct val="150000"/>
+              </a:lnSpc>
+              <a:buFont typeface="Arial" panose="020B0604020202020204" pitchFamily="34" charset="0"/>
+              <a:buChar char="•"/>
+              <a:defRPr sz="2200"/>
+            </a:lvl1pPr>
+          </a:lstStyle>
+          <a:p>
+            <a:pPr marL="0" indent="0">
+              <a:buNone/>
+            </a:pPr>
+            <a:r>
+              <a:rPr lang="en-US" dirty="0"/>
+              <a:t>Instead of</a:t>
+            </a:r>
+          </a:p>
+          <a:p>
+            <a:pPr marL="0" indent="0">
+              <a:buNone/>
+            </a:pPr>
+            <a:r>
+              <a:rPr lang="en-US" dirty="0"/>
+              <a:t>"Did we build it correctly?"</a:t>
+            </a:r>
+          </a:p>
+          <a:p>
+            <a:pPr marL="0" indent="0">
+              <a:buNone/>
+            </a:pPr>
+            <a:r>
+              <a:rPr lang="en-US" dirty="0"/>
+              <a:t>Ask</a:t>
+            </a:r>
+          </a:p>
+          <a:p>
+            <a:pPr marL="0" indent="0">
+              <a:buNone/>
+            </a:pPr>
+            <a:r>
+              <a:rPr lang="en-US" dirty="0"/>
+              <a:t>"Did we build the right thing?"</a:t>
+            </a:r>
+            <a:endParaRPr lang="en-IN" dirty="0"/>
+          </a:p>
+        </p:txBody>
+      </p:sp>
+    </p:spTree>
+    <p:extLst>
+      <p:ext uri="{BB962C8B-B14F-4D97-AF65-F5344CB8AC3E}">
+        <p14:creationId xmlns:p14="http://schemas.microsoft.com/office/powerpoint/2010/main" val="2534940488"/>
+      </p:ext>
+    </p:extLst>
+  </p:cSld>
+  <p:clrMapOvr>
+    <a:masterClrMapping/>
+  </p:clrMapOvr>
+  <mc:AlternateContent xmlns:mc="http://schemas.openxmlformats.org/markup-compatibility/2006" xmlns:p14="http://schemas.microsoft.com/office/powerpoint/2010/main">
+    <mc:Choice Requires="p14">
+      <p:transition spd="med" p14:dur="700">
+        <p:fade/>
+      </p:transition>
+    </mc:Choice>
+    <mc:Fallback xmlns="">
+      <p:transition spd="med">
+        <p:fade/>
+      </p:transition>
+    </mc:Fallback>
+  </mc:AlternateContent>
+</p:sld>
+</file>
+
+<file path=ppt/slides/slide6.xml><?xml version="1.0" encoding="utf-8"?>
+<p:sld xmlns:a="http://schemas.openxmlformats.org/drawingml/2006/main" xmlns:r="http://schemas.openxmlformats.org/officeDocument/2006/relationships" xmlns:p="http://schemas.openxmlformats.org/presentationml/2006/main">
+  <p:cSld>
+    <p:spTree>
+      <p:nvGrpSpPr>
+        <p:cNvPr id="1" name=""/>
+        <p:cNvGrpSpPr/>
+        <p:nvPr/>
+      </p:nvGrpSpPr>
+      <p:grpSpPr>
+        <a:xfrm>
+          <a:off x="0" y="0"/>
+          <a:ext cx="0" cy="0"/>
+          <a:chOff x="0" y="0"/>
+          <a:chExt cx="0" cy="0"/>
+        </a:xfrm>
+      </p:grpSpPr>
+      <p:sp>
+        <p:nvSpPr>
+          <p:cNvPr id="4" name="TextBox 3">
+            <a:extLst>
+              <a:ext uri="{FF2B5EF4-FFF2-40B4-BE49-F238E27FC236}">
+                <a16:creationId xmlns:a16="http://schemas.microsoft.com/office/drawing/2014/main" id="{32DEC985-14CF-4D02-527A-8265057117FD}"/>
+              </a:ext>
+            </a:extLst>
+          </p:cNvPr>
+          <p:cNvSpPr txBox="1"/>
+          <p:nvPr/>
+        </p:nvSpPr>
+        <p:spPr>
+          <a:xfrm>
+            <a:off x="1125860" y="332656"/>
+            <a:ext cx="3584636" cy="413959"/>
+          </a:xfrm>
+          <a:prstGeom prst="rect">
+            <a:avLst/>
+          </a:prstGeom>
+          <a:noFill/>
+        </p:spPr>
+        <p:txBody>
+          <a:bodyPr wrap="none" rtlCol="0">
+            <a:spAutoFit/>
+          </a:bodyPr>
+          <a:lstStyle>
+            <a:defPPr>
+              <a:defRPr lang="en-US"/>
+            </a:defPPr>
+            <a:lvl1pPr>
+              <a:lnSpc>
+                <a:spcPct val="95000"/>
+              </a:lnSpc>
+              <a:defRPr sz="2200" b="1">
+                <a:solidFill>
+                  <a:srgbClr val="FF0000"/>
+                </a:solidFill>
+              </a:defRPr>
+            </a:lvl1pPr>
+          </a:lstStyle>
+          <a:p>
+            <a:r>
+              <a:rPr lang="en-IN" dirty="0"/>
+              <a:t>Principles of Agile Testers</a:t>
+            </a:r>
+          </a:p>
+        </p:txBody>
+      </p:sp>
+      <p:sp>
+        <p:nvSpPr>
+          <p:cNvPr id="5" name="TextBox 4">
+            <a:extLst>
+              <a:ext uri="{FF2B5EF4-FFF2-40B4-BE49-F238E27FC236}">
+                <a16:creationId xmlns:a16="http://schemas.microsoft.com/office/drawing/2014/main" id="{A63BB58B-B16F-44F8-21CF-A4F58705FAF1}"/>
+              </a:ext>
+            </a:extLst>
+          </p:cNvPr>
+          <p:cNvSpPr txBox="1"/>
+          <p:nvPr/>
+        </p:nvSpPr>
+        <p:spPr>
+          <a:xfrm>
+            <a:off x="1125860" y="980728"/>
+            <a:ext cx="3754554" cy="413959"/>
+          </a:xfrm>
+          <a:prstGeom prst="rect">
+            <a:avLst/>
+          </a:prstGeom>
+          <a:noFill/>
+        </p:spPr>
+        <p:txBody>
+          <a:bodyPr wrap="none" rtlCol="0">
+            <a:spAutoFit/>
+          </a:bodyPr>
+          <a:lstStyle>
+            <a:defPPr>
+              <a:defRPr lang="en-US"/>
+            </a:defPPr>
+            <a:lvl1pPr>
+              <a:lnSpc>
+                <a:spcPct val="95000"/>
+              </a:lnSpc>
+              <a:defRPr sz="2200" b="1"/>
+            </a:lvl1pPr>
+          </a:lstStyle>
+          <a:p>
+            <a:r>
+              <a:rPr lang="en-IN" dirty="0"/>
+              <a:t>Principle 5: Fast Feedback</a:t>
+            </a:r>
+          </a:p>
+        </p:txBody>
+      </p:sp>
+      <p:sp>
+        <p:nvSpPr>
+          <p:cNvPr id="6" name="TextBox 5">
+            <a:extLst>
+              <a:ext uri="{FF2B5EF4-FFF2-40B4-BE49-F238E27FC236}">
+                <a16:creationId xmlns:a16="http://schemas.microsoft.com/office/drawing/2014/main" id="{FD7D75F5-7926-A287-CFAA-FD3350B4CD9F}"/>
+              </a:ext>
+            </a:extLst>
+          </p:cNvPr>
+          <p:cNvSpPr txBox="1"/>
+          <p:nvPr/>
+        </p:nvSpPr>
+        <p:spPr>
+          <a:xfrm>
+            <a:off x="1184370" y="1628800"/>
+            <a:ext cx="3347391" cy="2259080"/>
+          </a:xfrm>
+          <a:prstGeom prst="rect">
+            <a:avLst/>
+          </a:prstGeom>
+          <a:noFill/>
+        </p:spPr>
+        <p:txBody>
+          <a:bodyPr wrap="square" rtlCol="0">
+            <a:spAutoFit/>
+          </a:bodyPr>
+          <a:lstStyle>
+            <a:defPPr>
+              <a:defRPr lang="en-US"/>
+            </a:defPPr>
+            <a:lvl1pPr>
+              <a:lnSpc>
+                <a:spcPct val="95000"/>
+              </a:lnSpc>
+              <a:defRPr sz="2200"/>
+            </a:lvl1pPr>
+          </a:lstStyle>
+          <a:p>
+            <a:pPr>
+              <a:lnSpc>
+                <a:spcPct val="150000"/>
+              </a:lnSpc>
+            </a:pPr>
+            <a:r>
+              <a:rPr lang="en-US" dirty="0"/>
+              <a:t>If a bug is found today,</a:t>
+            </a:r>
+            <a:br>
+              <a:rPr lang="en-US" dirty="0"/>
+            </a:br>
+            <a:r>
+              <a:rPr lang="en-US" dirty="0"/>
+              <a:t>fix it today.</a:t>
+            </a:r>
+          </a:p>
+          <a:p>
+            <a:pPr>
+              <a:lnSpc>
+                <a:spcPct val="150000"/>
+              </a:lnSpc>
+            </a:pPr>
+            <a:endParaRPr lang="en-US" dirty="0"/>
+          </a:p>
+          <a:p>
+            <a:r>
+              <a:rPr lang="en-US" dirty="0"/>
+              <a:t>Not after three months.</a:t>
+            </a:r>
+          </a:p>
+          <a:p>
+            <a:endParaRPr lang="en-IN" dirty="0"/>
+          </a:p>
+        </p:txBody>
+      </p:sp>
+      <p:sp>
+        <p:nvSpPr>
+          <p:cNvPr id="7" name="TextBox 6">
+            <a:extLst>
+              <a:ext uri="{FF2B5EF4-FFF2-40B4-BE49-F238E27FC236}">
+                <a16:creationId xmlns:a16="http://schemas.microsoft.com/office/drawing/2014/main" id="{DED5202C-EDC9-5850-39B2-50DD2841C80E}"/>
+              </a:ext>
+            </a:extLst>
+          </p:cNvPr>
+          <p:cNvSpPr txBox="1"/>
+          <p:nvPr/>
+        </p:nvSpPr>
+        <p:spPr>
+          <a:xfrm>
+            <a:off x="5878388" y="980728"/>
+            <a:ext cx="5896166" cy="413959"/>
+          </a:xfrm>
+          <a:prstGeom prst="rect">
+            <a:avLst/>
+          </a:prstGeom>
+          <a:noFill/>
+        </p:spPr>
+        <p:txBody>
+          <a:bodyPr wrap="none" rtlCol="0">
+            <a:spAutoFit/>
+          </a:bodyPr>
+          <a:lstStyle>
+            <a:defPPr>
+              <a:defRPr lang="en-US"/>
+            </a:defPPr>
+            <a:lvl1pPr>
+              <a:lnSpc>
+                <a:spcPct val="95000"/>
+              </a:lnSpc>
+              <a:defRPr sz="2200" b="1"/>
+            </a:lvl1pPr>
+          </a:lstStyle>
+          <a:p>
+            <a:r>
+              <a:rPr lang="en-IN" dirty="0"/>
+              <a:t>Principle 6: Automation Wherever Possible</a:t>
+            </a:r>
+          </a:p>
+        </p:txBody>
+      </p:sp>
+      <p:sp>
+        <p:nvSpPr>
+          <p:cNvPr id="8" name="TextBox 7">
+            <a:extLst>
+              <a:ext uri="{FF2B5EF4-FFF2-40B4-BE49-F238E27FC236}">
+                <a16:creationId xmlns:a16="http://schemas.microsoft.com/office/drawing/2014/main" id="{7FE861D6-0591-C1E0-EA70-93F1F732FEC0}"/>
+              </a:ext>
+            </a:extLst>
+          </p:cNvPr>
+          <p:cNvSpPr txBox="1"/>
+          <p:nvPr/>
+        </p:nvSpPr>
+        <p:spPr>
+          <a:xfrm>
+            <a:off x="5878388" y="1556792"/>
+            <a:ext cx="5976664" cy="3074944"/>
+          </a:xfrm>
+          <a:prstGeom prst="rect">
+            <a:avLst/>
+          </a:prstGeom>
+          <a:noFill/>
+        </p:spPr>
+        <p:txBody>
+          <a:bodyPr wrap="square" rtlCol="0">
+            <a:spAutoFit/>
+          </a:bodyPr>
+          <a:lstStyle>
+            <a:defPPr>
+              <a:defRPr lang="en-US"/>
+            </a:defPPr>
+            <a:lvl1pPr>
+              <a:lnSpc>
+                <a:spcPct val="150000"/>
+              </a:lnSpc>
+              <a:defRPr sz="2200"/>
+            </a:lvl1pPr>
+          </a:lstStyle>
+          <a:p>
+            <a:r>
+              <a:rPr lang="en-US" dirty="0"/>
+              <a:t>Instead of repeating manual tests every sprint, Use automation tools.</a:t>
+            </a:r>
+          </a:p>
+          <a:p>
+            <a:r>
+              <a:rPr lang="en-US" dirty="0"/>
+              <a:t>Example</a:t>
+            </a:r>
+          </a:p>
+          <a:p>
+            <a:r>
+              <a:rPr lang="en-US" dirty="0"/>
+              <a:t>Instead of testing login manually 500 times,</a:t>
+            </a:r>
+          </a:p>
+          <a:p>
+            <a:r>
+              <a:rPr lang="en-US" dirty="0"/>
+              <a:t>Run automated script.</a:t>
+            </a:r>
+          </a:p>
+          <a:p>
+            <a:endParaRPr lang="en-IN" dirty="0"/>
+          </a:p>
+        </p:txBody>
+      </p:sp>
+      <p:sp>
+        <p:nvSpPr>
+          <p:cNvPr id="9" name="TextBox 8">
+            <a:extLst>
+              <a:ext uri="{FF2B5EF4-FFF2-40B4-BE49-F238E27FC236}">
+                <a16:creationId xmlns:a16="http://schemas.microsoft.com/office/drawing/2014/main" id="{117AA839-221C-D463-04B8-101727ADD8CC}"/>
+              </a:ext>
+            </a:extLst>
+          </p:cNvPr>
+          <p:cNvSpPr txBox="1"/>
+          <p:nvPr/>
+        </p:nvSpPr>
+        <p:spPr>
+          <a:xfrm>
+            <a:off x="1269876" y="4293096"/>
+            <a:ext cx="3228769" cy="443198"/>
+          </a:xfrm>
+          <a:prstGeom prst="rect">
+            <a:avLst/>
+          </a:prstGeom>
+          <a:noFill/>
+        </p:spPr>
+        <p:txBody>
+          <a:bodyPr wrap="none" rtlCol="0">
+            <a:spAutoFit/>
+          </a:bodyPr>
+          <a:lstStyle>
+            <a:defPPr>
+              <a:defRPr lang="en-US"/>
+            </a:defPPr>
+            <a:lvl1pPr>
+              <a:lnSpc>
+                <a:spcPct val="95000"/>
+              </a:lnSpc>
+              <a:defRPr sz="2200" b="1"/>
+            </a:lvl1pPr>
+          </a:lstStyle>
+          <a:p>
+            <a:r>
+              <a:rPr lang="en-IN" dirty="0"/>
+              <a:t>Principle 7: Simplicity</a:t>
+            </a:r>
+          </a:p>
+        </p:txBody>
+      </p:sp>
+      <p:sp>
+        <p:nvSpPr>
+          <p:cNvPr id="10" name="TextBox 9">
+            <a:extLst>
+              <a:ext uri="{FF2B5EF4-FFF2-40B4-BE49-F238E27FC236}">
+                <a16:creationId xmlns:a16="http://schemas.microsoft.com/office/drawing/2014/main" id="{CE0B30D0-256F-6C6B-E7E9-08AA64BF2104}"/>
+              </a:ext>
+            </a:extLst>
+          </p:cNvPr>
+          <p:cNvSpPr txBox="1"/>
+          <p:nvPr/>
+        </p:nvSpPr>
+        <p:spPr>
+          <a:xfrm>
+            <a:off x="1236509" y="4869160"/>
+            <a:ext cx="4172937" cy="1551450"/>
+          </a:xfrm>
+          <a:prstGeom prst="rect">
+            <a:avLst/>
+          </a:prstGeom>
+          <a:noFill/>
+        </p:spPr>
+        <p:txBody>
+          <a:bodyPr wrap="square" rtlCol="0">
+            <a:spAutoFit/>
+          </a:bodyPr>
+          <a:lstStyle>
+            <a:defPPr>
+              <a:defRPr lang="en-US"/>
+            </a:defPPr>
+            <a:lvl1pPr>
+              <a:lnSpc>
+                <a:spcPct val="150000"/>
+              </a:lnSpc>
+              <a:defRPr sz="2200"/>
+            </a:lvl1pPr>
+          </a:lstStyle>
+          <a:p>
+            <a:r>
+              <a:rPr lang="en-US" dirty="0"/>
+              <a:t>Don't write unnecessary tests.</a:t>
+            </a:r>
+          </a:p>
+          <a:p>
+            <a:r>
+              <a:rPr lang="en-US" dirty="0"/>
+              <a:t>Write useful tests.</a:t>
+            </a:r>
+          </a:p>
+          <a:p>
+            <a:endParaRPr lang="en-IN" dirty="0"/>
+          </a:p>
+        </p:txBody>
+      </p:sp>
+    </p:spTree>
+    <p:extLst>
+      <p:ext uri="{BB962C8B-B14F-4D97-AF65-F5344CB8AC3E}">
+        <p14:creationId xmlns:p14="http://schemas.microsoft.com/office/powerpoint/2010/main" val="2876457559"/>
+      </p:ext>
+    </p:extLst>
+  </p:cSld>
+  <p:clrMapOvr>
+    <a:masterClrMapping/>
+  </p:clrMapOvr>
+  <mc:AlternateContent xmlns:mc="http://schemas.openxmlformats.org/markup-compatibility/2006" xmlns:p14="http://schemas.microsoft.com/office/powerpoint/2010/main">
+    <mc:Choice Requires="p14">
+      <p:transition spd="med" p14:dur="700">
+        <p:fade/>
+      </p:transition>
+    </mc:Choice>
+    <mc:Fallback xmlns="">
+      <p:transition spd="med">
+        <p:fade/>
+      </p:transition>
+    </mc:Fallback>
+  </mc:AlternateContent>
+</p:sld>
+</file>
+
+<file path=ppt/slides/slide7.xml><?xml version="1.0" encoding="utf-8"?>
+<p:sld xmlns:a="http://schemas.openxmlformats.org/drawingml/2006/main" xmlns:r="http://schemas.openxmlformats.org/officeDocument/2006/relationships" xmlns:p="http://schemas.openxmlformats.org/presentationml/2006/main">
+  <p:cSld>
+    <p:spTree>
+      <p:nvGrpSpPr>
+        <p:cNvPr id="1" name=""/>
+        <p:cNvGrpSpPr/>
+        <p:nvPr/>
+      </p:nvGrpSpPr>
+      <p:grpSpPr>
+        <a:xfrm>
+          <a:off x="0" y="0"/>
+          <a:ext cx="0" cy="0"/>
+          <a:chOff x="0" y="0"/>
+          <a:chExt cx="0" cy="0"/>
+        </a:xfrm>
+      </p:grpSpPr>
+      <p:sp>
+        <p:nvSpPr>
+          <p:cNvPr id="4" name="TextBox 3">
+            <a:extLst>
+              <a:ext uri="{FF2B5EF4-FFF2-40B4-BE49-F238E27FC236}">
+                <a16:creationId xmlns:a16="http://schemas.microsoft.com/office/drawing/2014/main" id="{44BA4EEE-74BB-6F4B-314D-364F851C67BD}"/>
+              </a:ext>
+            </a:extLst>
+          </p:cNvPr>
+          <p:cNvSpPr txBox="1"/>
+          <p:nvPr/>
+        </p:nvSpPr>
+        <p:spPr>
+          <a:xfrm>
+            <a:off x="977686" y="116632"/>
+            <a:ext cx="3416320" cy="413959"/>
+          </a:xfrm>
+          <a:prstGeom prst="rect">
+            <a:avLst/>
+          </a:prstGeom>
+          <a:noFill/>
+        </p:spPr>
+        <p:txBody>
+          <a:bodyPr wrap="none" rtlCol="0">
+            <a:spAutoFit/>
+          </a:bodyPr>
+          <a:lstStyle>
+            <a:defPPr>
+              <a:defRPr lang="en-US"/>
+            </a:defPPr>
+            <a:lvl1pPr>
+              <a:lnSpc>
+                <a:spcPct val="95000"/>
+              </a:lnSpc>
+              <a:defRPr sz="2200" b="1">
+                <a:solidFill>
+                  <a:srgbClr val="FF0000"/>
+                </a:solidFill>
+              </a:defRPr>
+            </a:lvl1pPr>
+          </a:lstStyle>
+          <a:p>
+            <a:r>
+              <a:rPr lang="en-IN" dirty="0"/>
+              <a:t>Agile Testing Quadrants</a:t>
+            </a:r>
+          </a:p>
+        </p:txBody>
+      </p:sp>
+      <p:sp>
+        <p:nvSpPr>
+          <p:cNvPr id="5" name="TextBox 4">
+            <a:extLst>
+              <a:ext uri="{FF2B5EF4-FFF2-40B4-BE49-F238E27FC236}">
+                <a16:creationId xmlns:a16="http://schemas.microsoft.com/office/drawing/2014/main" id="{47D8CF4A-DC1E-F9C0-0CF0-346511821912}"/>
+              </a:ext>
+            </a:extLst>
+          </p:cNvPr>
+          <p:cNvSpPr txBox="1"/>
+          <p:nvPr/>
+        </p:nvSpPr>
+        <p:spPr>
+          <a:xfrm>
+            <a:off x="909836" y="558149"/>
+            <a:ext cx="10081120" cy="735586"/>
+          </a:xfrm>
+          <a:prstGeom prst="rect">
+            <a:avLst/>
+          </a:prstGeom>
+          <a:noFill/>
+        </p:spPr>
+        <p:txBody>
+          <a:bodyPr wrap="square" rtlCol="0">
+            <a:spAutoFit/>
+          </a:bodyPr>
+          <a:lstStyle>
+            <a:defPPr>
+              <a:defRPr lang="en-US"/>
+            </a:defPPr>
+            <a:lvl1pPr>
+              <a:lnSpc>
+                <a:spcPct val="95000"/>
+              </a:lnSpc>
+              <a:defRPr sz="2200"/>
+            </a:lvl1pPr>
+          </a:lstStyle>
+          <a:p>
+            <a:r>
+              <a:rPr lang="en-US" dirty="0"/>
+              <a:t>Created by </a:t>
+            </a:r>
+            <a:r>
+              <a:rPr lang="en-US" b="1" dirty="0"/>
+              <a:t>Brian </a:t>
+            </a:r>
+            <a:r>
+              <a:rPr lang="en-US" b="1" dirty="0" err="1"/>
+              <a:t>Marick</a:t>
+            </a:r>
+            <a:r>
+              <a:rPr lang="en-US" b="1" dirty="0"/>
+              <a:t>. </a:t>
+            </a:r>
+            <a:r>
+              <a:rPr lang="en-US" dirty="0"/>
+              <a:t>It divides testing into four categories.</a:t>
+            </a:r>
+          </a:p>
+          <a:p>
+            <a:endParaRPr lang="en-IN" dirty="0"/>
+          </a:p>
+        </p:txBody>
+      </p:sp>
       <p:pic>
         <p:nvPicPr>
-          <p:cNvPr id="1026" name="Picture 2" descr="Agile Testing Best Practices | SmartBear Learn">
+          <p:cNvPr id="6" name="Picture 2" descr="Agile Testing Best Practices | SmartBear Learn">
             <a:extLst>
               <a:ext uri="{FF2B5EF4-FFF2-40B4-BE49-F238E27FC236}">
-                <a16:creationId xmlns:a16="http://schemas.microsoft.com/office/drawing/2014/main" id="{9945AACC-7A01-FAF9-0482-1A18A87BBEF8}"/>
+                <a16:creationId xmlns:a16="http://schemas.microsoft.com/office/drawing/2014/main" id="{2DFF8D79-B920-496B-CAED-53F4DDB12A10}"/>
               </a:ext>
             </a:extLst>
           </p:cNvPr>
@@ -5127,8 +10295,8 @@
         </p:blipFill>
         <p:spPr bwMode="auto">
           <a:xfrm>
-            <a:off x="1759530" y="332656"/>
-            <a:ext cx="8583353" cy="6130966"/>
+            <a:off x="1658719" y="1052736"/>
+            <a:ext cx="7964085" cy="5688632"/>
           </a:xfrm>
           <a:prstGeom prst="rect">
             <a:avLst/>
@@ -5148,7 +10316,709 @@
     </p:spTree>
     <p:extLst>
       <p:ext uri="{BB962C8B-B14F-4D97-AF65-F5344CB8AC3E}">
+        <p14:creationId xmlns:p14="http://schemas.microsoft.com/office/powerpoint/2010/main" val="4124122628"/>
+      </p:ext>
+    </p:extLst>
+  </p:cSld>
+  <p:clrMapOvr>
+    <a:masterClrMapping/>
+  </p:clrMapOvr>
+  <mc:AlternateContent xmlns:mc="http://schemas.openxmlformats.org/markup-compatibility/2006" xmlns:p14="http://schemas.microsoft.com/office/powerpoint/2010/main">
+    <mc:Choice Requires="p14">
+      <p:transition spd="med" p14:dur="700">
+        <p:fade/>
+      </p:transition>
+    </mc:Choice>
+    <mc:Fallback xmlns="">
+      <p:transition spd="med">
+        <p:fade/>
+      </p:transition>
+    </mc:Fallback>
+  </mc:AlternateContent>
+</p:sld>
+</file>
+
+<file path=ppt/slides/slide8.xml><?xml version="1.0" encoding="utf-8"?>
+<p:sld xmlns:a="http://schemas.openxmlformats.org/drawingml/2006/main" xmlns:r="http://schemas.openxmlformats.org/officeDocument/2006/relationships" xmlns:p="http://schemas.openxmlformats.org/presentationml/2006/main">
+  <p:cSld>
+    <p:spTree>
+      <p:nvGrpSpPr>
+        <p:cNvPr id="1" name=""/>
+        <p:cNvGrpSpPr/>
+        <p:nvPr/>
+      </p:nvGrpSpPr>
+      <p:grpSpPr>
+        <a:xfrm>
+          <a:off x="0" y="0"/>
+          <a:ext cx="0" cy="0"/>
+          <a:chOff x="0" y="0"/>
+          <a:chExt cx="0" cy="0"/>
+        </a:xfrm>
+      </p:grpSpPr>
+      <p:sp>
+        <p:nvSpPr>
+          <p:cNvPr id="2" name="TextBox 1">
+            <a:extLst>
+              <a:ext uri="{FF2B5EF4-FFF2-40B4-BE49-F238E27FC236}">
+                <a16:creationId xmlns:a16="http://schemas.microsoft.com/office/drawing/2014/main" id="{8DFEF54D-A96F-7C65-0B1C-F4207AC2CA88}"/>
+              </a:ext>
+            </a:extLst>
+          </p:cNvPr>
+          <p:cNvSpPr txBox="1"/>
+          <p:nvPr/>
+        </p:nvSpPr>
+        <p:spPr>
+          <a:xfrm>
+            <a:off x="977686" y="116632"/>
+            <a:ext cx="3416320" cy="413959"/>
+          </a:xfrm>
+          <a:prstGeom prst="rect">
+            <a:avLst/>
+          </a:prstGeom>
+          <a:noFill/>
+        </p:spPr>
+        <p:txBody>
+          <a:bodyPr wrap="none" rtlCol="0">
+            <a:spAutoFit/>
+          </a:bodyPr>
+          <a:lstStyle>
+            <a:defPPr>
+              <a:defRPr lang="en-US"/>
+            </a:defPPr>
+            <a:lvl1pPr>
+              <a:lnSpc>
+                <a:spcPct val="95000"/>
+              </a:lnSpc>
+              <a:defRPr sz="2200" b="1">
+                <a:solidFill>
+                  <a:srgbClr val="FF0000"/>
+                </a:solidFill>
+              </a:defRPr>
+            </a:lvl1pPr>
+          </a:lstStyle>
+          <a:p>
+            <a:r>
+              <a:rPr lang="en-IN" dirty="0"/>
+              <a:t>Agile Testing Quadrants</a:t>
+            </a:r>
+          </a:p>
+        </p:txBody>
+      </p:sp>
+      <p:sp>
+        <p:nvSpPr>
+          <p:cNvPr id="3" name="TextBox 2">
+            <a:extLst>
+              <a:ext uri="{FF2B5EF4-FFF2-40B4-BE49-F238E27FC236}">
+                <a16:creationId xmlns:a16="http://schemas.microsoft.com/office/drawing/2014/main" id="{23C47D4A-24E1-6EA1-1C9F-891A5CF6CACC}"/>
+              </a:ext>
+            </a:extLst>
+          </p:cNvPr>
+          <p:cNvSpPr txBox="1"/>
+          <p:nvPr/>
+        </p:nvSpPr>
+        <p:spPr>
+          <a:xfrm>
+            <a:off x="977686" y="563045"/>
+            <a:ext cx="4324638" cy="6121932"/>
+          </a:xfrm>
+          <a:prstGeom prst="rect">
+            <a:avLst/>
+          </a:prstGeom>
+          <a:noFill/>
+        </p:spPr>
+        <p:txBody>
+          <a:bodyPr wrap="square" rtlCol="0">
+            <a:spAutoFit/>
+          </a:bodyPr>
+          <a:lstStyle>
+            <a:defPPr>
+              <a:defRPr lang="en-US"/>
+            </a:defPPr>
+            <a:lvl1pPr>
+              <a:lnSpc>
+                <a:spcPct val="150000"/>
+              </a:lnSpc>
+              <a:defRPr sz="2200"/>
+            </a:lvl1pPr>
+          </a:lstStyle>
+          <a:p>
+            <a:r>
+              <a:rPr lang="en-US" b="1" dirty="0"/>
+              <a:t>Quadrant 1 (Q1)</a:t>
+            </a:r>
+          </a:p>
+          <a:p>
+            <a:pPr marL="342900" indent="-342900">
+              <a:buFont typeface="Arial" panose="020B0604020202020204" pitchFamily="34" charset="0"/>
+              <a:buChar char="•"/>
+            </a:pPr>
+            <a:r>
+              <a:rPr lang="en-US" dirty="0"/>
+              <a:t>Technology Facing</a:t>
+            </a:r>
+          </a:p>
+          <a:p>
+            <a:pPr marL="342900" indent="-342900">
+              <a:buFont typeface="Arial" panose="020B0604020202020204" pitchFamily="34" charset="0"/>
+              <a:buChar char="•"/>
+            </a:pPr>
+            <a:r>
+              <a:rPr lang="en-US" dirty="0"/>
+              <a:t>Supports Developers</a:t>
+            </a:r>
+          </a:p>
+          <a:p>
+            <a:r>
+              <a:rPr lang="en-US" dirty="0"/>
+              <a:t>Purpose</a:t>
+            </a:r>
+          </a:p>
+          <a:p>
+            <a:pPr marL="342900" indent="-342900">
+              <a:buFont typeface="Arial" panose="020B0604020202020204" pitchFamily="34" charset="0"/>
+              <a:buChar char="•"/>
+            </a:pPr>
+            <a:r>
+              <a:rPr lang="en-US" dirty="0"/>
+              <a:t>Ensure code works correctly</a:t>
+            </a:r>
+          </a:p>
+          <a:p>
+            <a:r>
+              <a:rPr lang="en-US" dirty="0"/>
+              <a:t>Examples</a:t>
+            </a:r>
+          </a:p>
+          <a:p>
+            <a:pPr marL="342900" indent="-342900">
+              <a:buFont typeface="Arial" panose="020B0604020202020204" pitchFamily="34" charset="0"/>
+              <a:buChar char="•"/>
+            </a:pPr>
+            <a:r>
+              <a:rPr lang="en-US" dirty="0"/>
+              <a:t>Unit Testing </a:t>
+            </a:r>
+          </a:p>
+          <a:p>
+            <a:pPr marL="342900" indent="-342900">
+              <a:buFont typeface="Arial" panose="020B0604020202020204" pitchFamily="34" charset="0"/>
+              <a:buChar char="•"/>
+            </a:pPr>
+            <a:r>
+              <a:rPr lang="en-US" dirty="0"/>
+              <a:t>Component Testing </a:t>
+            </a:r>
+          </a:p>
+          <a:p>
+            <a:pPr marL="342900" indent="-342900">
+              <a:buFont typeface="Arial" panose="020B0604020202020204" pitchFamily="34" charset="0"/>
+              <a:buChar char="•"/>
+            </a:pPr>
+            <a:r>
+              <a:rPr lang="en-US" dirty="0"/>
+              <a:t>API Testing </a:t>
+            </a:r>
+          </a:p>
+          <a:p>
+            <a:pPr marL="342900" indent="-342900">
+              <a:buFont typeface="Arial" panose="020B0604020202020204" pitchFamily="34" charset="0"/>
+              <a:buChar char="•"/>
+            </a:pPr>
+            <a:endParaRPr lang="en-US" dirty="0"/>
+          </a:p>
+          <a:p>
+            <a:r>
+              <a:rPr lang="en-US" dirty="0"/>
+              <a:t>Example: If user is able to login</a:t>
+            </a:r>
+          </a:p>
+          <a:p>
+            <a:endParaRPr lang="en-IN" dirty="0"/>
+          </a:p>
+        </p:txBody>
+      </p:sp>
+      <p:sp>
+        <p:nvSpPr>
+          <p:cNvPr id="4" name="TextBox 3">
+            <a:extLst>
+              <a:ext uri="{FF2B5EF4-FFF2-40B4-BE49-F238E27FC236}">
+                <a16:creationId xmlns:a16="http://schemas.microsoft.com/office/drawing/2014/main" id="{6F47EFB3-6CE2-12FF-9FAB-82677019D6C2}"/>
+              </a:ext>
+            </a:extLst>
+          </p:cNvPr>
+          <p:cNvSpPr txBox="1"/>
+          <p:nvPr/>
+        </p:nvSpPr>
+        <p:spPr>
+          <a:xfrm>
+            <a:off x="6094412" y="500939"/>
+            <a:ext cx="5544616" cy="6628674"/>
+          </a:xfrm>
+          <a:prstGeom prst="rect">
+            <a:avLst/>
+          </a:prstGeom>
+          <a:noFill/>
+        </p:spPr>
+        <p:txBody>
+          <a:bodyPr wrap="square" rtlCol="0">
+            <a:spAutoFit/>
+          </a:bodyPr>
+          <a:lstStyle>
+            <a:defPPr>
+              <a:defRPr lang="en-US"/>
+            </a:defPPr>
+            <a:lvl1pPr>
+              <a:lnSpc>
+                <a:spcPct val="150000"/>
+              </a:lnSpc>
+              <a:defRPr sz="2200" b="1"/>
+            </a:lvl1pPr>
+          </a:lstStyle>
+          <a:p>
+            <a:r>
+              <a:rPr lang="en-US" dirty="0"/>
+              <a:t>Quadrant 2 (Q2)</a:t>
+            </a:r>
+          </a:p>
+          <a:p>
+            <a:pPr marL="342900" indent="-342900">
+              <a:buFont typeface="Arial" panose="020B0604020202020204" pitchFamily="34" charset="0"/>
+              <a:buChar char="•"/>
+            </a:pPr>
+            <a:r>
+              <a:rPr lang="en-US" b="0" dirty="0"/>
+              <a:t>Business Facing</a:t>
+            </a:r>
+          </a:p>
+          <a:p>
+            <a:pPr marL="342900" indent="-342900">
+              <a:buFont typeface="Arial" panose="020B0604020202020204" pitchFamily="34" charset="0"/>
+              <a:buChar char="•"/>
+            </a:pPr>
+            <a:r>
+              <a:rPr lang="en-US" b="0" dirty="0"/>
+              <a:t>Supports Team</a:t>
+            </a:r>
+          </a:p>
+          <a:p>
+            <a:r>
+              <a:rPr lang="en-US" b="0" dirty="0"/>
+              <a:t>Checks whether business requirements are met.</a:t>
+            </a:r>
+          </a:p>
+          <a:p>
+            <a:r>
+              <a:rPr lang="en-US" b="0" dirty="0"/>
+              <a:t>Examples</a:t>
+            </a:r>
+          </a:p>
+          <a:p>
+            <a:pPr marL="342900" indent="-342900">
+              <a:buFont typeface="Arial" panose="020B0604020202020204" pitchFamily="34" charset="0"/>
+              <a:buChar char="•"/>
+            </a:pPr>
+            <a:r>
+              <a:rPr lang="en-US" b="0" dirty="0"/>
+              <a:t>Acceptance Testing </a:t>
+            </a:r>
+          </a:p>
+          <a:p>
+            <a:pPr marL="342900" indent="-342900">
+              <a:buFont typeface="Arial" panose="020B0604020202020204" pitchFamily="34" charset="0"/>
+              <a:buChar char="•"/>
+            </a:pPr>
+            <a:r>
+              <a:rPr lang="en-US" b="0" dirty="0"/>
+              <a:t>User Story Testing </a:t>
+            </a:r>
+          </a:p>
+          <a:p>
+            <a:pPr marL="342900" indent="-342900">
+              <a:buFont typeface="Arial" panose="020B0604020202020204" pitchFamily="34" charset="0"/>
+              <a:buChar char="•"/>
+            </a:pPr>
+            <a:r>
+              <a:rPr lang="en-US" b="0" dirty="0"/>
+              <a:t>Prototype Validation</a:t>
+            </a:r>
+          </a:p>
+          <a:p>
+            <a:endParaRPr lang="en-US" b="0" dirty="0"/>
+          </a:p>
+          <a:p>
+            <a:r>
+              <a:rPr lang="en-US" b="0" dirty="0"/>
+              <a:t>Example: If user is able to login and transfers money to another user</a:t>
+            </a:r>
+          </a:p>
+          <a:p>
+            <a:endParaRPr lang="en-IN" dirty="0"/>
+          </a:p>
+        </p:txBody>
+      </p:sp>
+    </p:spTree>
+    <p:extLst>
+      <p:ext uri="{BB962C8B-B14F-4D97-AF65-F5344CB8AC3E}">
         <p14:creationId xmlns:p14="http://schemas.microsoft.com/office/powerpoint/2010/main" val="364794472"/>
+      </p:ext>
+    </p:extLst>
+  </p:cSld>
+  <p:clrMapOvr>
+    <a:masterClrMapping/>
+  </p:clrMapOvr>
+  <mc:AlternateContent xmlns:mc="http://schemas.openxmlformats.org/markup-compatibility/2006" xmlns:p14="http://schemas.microsoft.com/office/powerpoint/2010/main">
+    <mc:Choice Requires="p14">
+      <p:transition spd="med" p14:dur="700">
+        <p:fade/>
+      </p:transition>
+    </mc:Choice>
+    <mc:Fallback xmlns="">
+      <p:transition spd="med">
+        <p:fade/>
+      </p:transition>
+    </mc:Fallback>
+  </mc:AlternateContent>
+</p:sld>
+</file>
+
+<file path=ppt/slides/slide9.xml><?xml version="1.0" encoding="utf-8"?>
+<p:sld xmlns:a="http://schemas.openxmlformats.org/drawingml/2006/main" xmlns:r="http://schemas.openxmlformats.org/officeDocument/2006/relationships" xmlns:p="http://schemas.openxmlformats.org/presentationml/2006/main">
+  <p:cSld>
+    <p:spTree>
+      <p:nvGrpSpPr>
+        <p:cNvPr id="1" name=""/>
+        <p:cNvGrpSpPr/>
+        <p:nvPr/>
+      </p:nvGrpSpPr>
+      <p:grpSpPr>
+        <a:xfrm>
+          <a:off x="0" y="0"/>
+          <a:ext cx="0" cy="0"/>
+          <a:chOff x="0" y="0"/>
+          <a:chExt cx="0" cy="0"/>
+        </a:xfrm>
+      </p:grpSpPr>
+      <p:sp>
+        <p:nvSpPr>
+          <p:cNvPr id="4" name="TextBox 3">
+            <a:extLst>
+              <a:ext uri="{FF2B5EF4-FFF2-40B4-BE49-F238E27FC236}">
+                <a16:creationId xmlns:a16="http://schemas.microsoft.com/office/drawing/2014/main" id="{52C82253-8F4A-83ED-080D-764E302C7676}"/>
+              </a:ext>
+            </a:extLst>
+          </p:cNvPr>
+          <p:cNvSpPr txBox="1"/>
+          <p:nvPr/>
+        </p:nvSpPr>
+        <p:spPr>
+          <a:xfrm>
+            <a:off x="981844" y="188640"/>
+            <a:ext cx="3416320" cy="413959"/>
+          </a:xfrm>
+          <a:prstGeom prst="rect">
+            <a:avLst/>
+          </a:prstGeom>
+          <a:noFill/>
+        </p:spPr>
+        <p:txBody>
+          <a:bodyPr wrap="none" rtlCol="0">
+            <a:spAutoFit/>
+          </a:bodyPr>
+          <a:lstStyle>
+            <a:defPPr>
+              <a:defRPr lang="en-US"/>
+            </a:defPPr>
+            <a:lvl1pPr>
+              <a:lnSpc>
+                <a:spcPct val="95000"/>
+              </a:lnSpc>
+              <a:defRPr sz="2200" b="1">
+                <a:solidFill>
+                  <a:srgbClr val="FF0000"/>
+                </a:solidFill>
+              </a:defRPr>
+            </a:lvl1pPr>
+          </a:lstStyle>
+          <a:p>
+            <a:r>
+              <a:rPr lang="en-IN" dirty="0"/>
+              <a:t>Agile Testing Quadrants</a:t>
+            </a:r>
+          </a:p>
+        </p:txBody>
+      </p:sp>
+      <p:sp>
+        <p:nvSpPr>
+          <p:cNvPr id="5" name="TextBox 4">
+            <a:extLst>
+              <a:ext uri="{FF2B5EF4-FFF2-40B4-BE49-F238E27FC236}">
+                <a16:creationId xmlns:a16="http://schemas.microsoft.com/office/drawing/2014/main" id="{1229098C-5675-054D-C3A3-FD03ECB4BD63}"/>
+              </a:ext>
+            </a:extLst>
+          </p:cNvPr>
+          <p:cNvSpPr txBox="1"/>
+          <p:nvPr/>
+        </p:nvSpPr>
+        <p:spPr>
+          <a:xfrm>
+            <a:off x="981844" y="602599"/>
+            <a:ext cx="3966150" cy="6120843"/>
+          </a:xfrm>
+          <a:prstGeom prst="rect">
+            <a:avLst/>
+          </a:prstGeom>
+          <a:noFill/>
+        </p:spPr>
+        <p:txBody>
+          <a:bodyPr wrap="square" rtlCol="0">
+            <a:spAutoFit/>
+          </a:bodyPr>
+          <a:lstStyle>
+            <a:defPPr>
+              <a:defRPr lang="en-US"/>
+            </a:defPPr>
+            <a:lvl1pPr>
+              <a:lnSpc>
+                <a:spcPct val="150000"/>
+              </a:lnSpc>
+              <a:defRPr sz="2200" b="1"/>
+            </a:lvl1pPr>
+          </a:lstStyle>
+          <a:p>
+            <a:r>
+              <a:rPr lang="en-US" dirty="0"/>
+              <a:t>Quadrant 3 (Q3)</a:t>
+            </a:r>
+          </a:p>
+          <a:p>
+            <a:pPr marL="342900" indent="-342900">
+              <a:buFont typeface="Arial" panose="020B0604020202020204" pitchFamily="34" charset="0"/>
+              <a:buChar char="•"/>
+            </a:pPr>
+            <a:r>
+              <a:rPr lang="en-US" b="0" dirty="0"/>
+              <a:t>Business Facing</a:t>
+            </a:r>
+          </a:p>
+          <a:p>
+            <a:pPr marL="342900" indent="-342900">
+              <a:buFont typeface="Arial" panose="020B0604020202020204" pitchFamily="34" charset="0"/>
+              <a:buChar char="•"/>
+            </a:pPr>
+            <a:r>
+              <a:rPr lang="en-US" b="0" dirty="0"/>
+              <a:t>Critiques Product</a:t>
+            </a:r>
+          </a:p>
+          <a:p>
+            <a:pPr marL="342900" indent="-342900">
+              <a:buFont typeface="Arial" panose="020B0604020202020204" pitchFamily="34" charset="0"/>
+              <a:buChar char="•"/>
+            </a:pPr>
+            <a:r>
+              <a:rPr lang="en-US" b="0" dirty="0"/>
+              <a:t>Human testing</a:t>
+            </a:r>
+          </a:p>
+          <a:p>
+            <a:r>
+              <a:rPr lang="en-US" b="0" dirty="0"/>
+              <a:t>Examples</a:t>
+            </a:r>
+          </a:p>
+          <a:p>
+            <a:pPr marL="342900" indent="-342900">
+              <a:buFont typeface="Arial" panose="020B0604020202020204" pitchFamily="34" charset="0"/>
+              <a:buChar char="•"/>
+            </a:pPr>
+            <a:r>
+              <a:rPr lang="en-US" b="0" dirty="0"/>
+              <a:t>Exploratory Testing </a:t>
+            </a:r>
+          </a:p>
+          <a:p>
+            <a:pPr marL="342900" indent="-342900">
+              <a:buFont typeface="Arial" panose="020B0604020202020204" pitchFamily="34" charset="0"/>
+              <a:buChar char="•"/>
+            </a:pPr>
+            <a:r>
+              <a:rPr lang="en-US" b="0" dirty="0"/>
+              <a:t>User Acceptance Testing </a:t>
+            </a:r>
+          </a:p>
+          <a:p>
+            <a:pPr marL="342900" indent="-342900">
+              <a:buFont typeface="Arial" panose="020B0604020202020204" pitchFamily="34" charset="0"/>
+              <a:buChar char="•"/>
+            </a:pPr>
+            <a:r>
+              <a:rPr lang="en-US" b="0" dirty="0"/>
+              <a:t>Usability Testing </a:t>
+            </a:r>
+          </a:p>
+          <a:p>
+            <a:r>
+              <a:rPr lang="en-US" b="0" dirty="0"/>
+              <a:t>Example:</a:t>
+            </a:r>
+          </a:p>
+          <a:p>
+            <a:r>
+              <a:rPr lang="en-US" b="0" dirty="0"/>
+              <a:t>Software works,</a:t>
+            </a:r>
+          </a:p>
+          <a:p>
+            <a:r>
+              <a:rPr lang="en-US" b="0" dirty="0"/>
+              <a:t>But user experience is poor.</a:t>
+            </a:r>
+          </a:p>
+          <a:p>
+            <a:endParaRPr lang="en-IN" dirty="0"/>
+          </a:p>
+        </p:txBody>
+      </p:sp>
+      <p:sp>
+        <p:nvSpPr>
+          <p:cNvPr id="6" name="TextBox 5">
+            <a:extLst>
+              <a:ext uri="{FF2B5EF4-FFF2-40B4-BE49-F238E27FC236}">
+                <a16:creationId xmlns:a16="http://schemas.microsoft.com/office/drawing/2014/main" id="{8CD41123-3DC1-1529-1F1F-536AEA96A46E}"/>
+              </a:ext>
+            </a:extLst>
+          </p:cNvPr>
+          <p:cNvSpPr txBox="1"/>
+          <p:nvPr/>
+        </p:nvSpPr>
+        <p:spPr>
+          <a:xfrm>
+            <a:off x="6598468" y="476672"/>
+            <a:ext cx="4824536" cy="6120843"/>
+          </a:xfrm>
+          <a:prstGeom prst="rect">
+            <a:avLst/>
+          </a:prstGeom>
+          <a:noFill/>
+        </p:spPr>
+        <p:txBody>
+          <a:bodyPr wrap="square" rtlCol="0">
+            <a:spAutoFit/>
+          </a:bodyPr>
+          <a:lstStyle>
+            <a:defPPr>
+              <a:defRPr lang="en-US"/>
+            </a:defPPr>
+            <a:lvl1pPr>
+              <a:lnSpc>
+                <a:spcPct val="150000"/>
+              </a:lnSpc>
+              <a:defRPr sz="2200" b="1"/>
+            </a:lvl1pPr>
+          </a:lstStyle>
+          <a:p>
+            <a:r>
+              <a:rPr lang="en-US" dirty="0"/>
+              <a:t>Quadrant 4 (Q4)</a:t>
+            </a:r>
+          </a:p>
+          <a:p>
+            <a:pPr marL="342900" indent="-342900">
+              <a:buFont typeface="Arial" panose="020B0604020202020204" pitchFamily="34" charset="0"/>
+              <a:buChar char="•"/>
+            </a:pPr>
+            <a:r>
+              <a:rPr lang="en-US" b="0" dirty="0"/>
+              <a:t>Technology Facing</a:t>
+            </a:r>
+          </a:p>
+          <a:p>
+            <a:pPr marL="342900" indent="-342900">
+              <a:buFont typeface="Arial" panose="020B0604020202020204" pitchFamily="34" charset="0"/>
+              <a:buChar char="•"/>
+            </a:pPr>
+            <a:r>
+              <a:rPr lang="en-US" b="0" dirty="0"/>
+              <a:t>Critiques Product</a:t>
+            </a:r>
+          </a:p>
+          <a:p>
+            <a:pPr marL="342900" indent="-342900">
+              <a:buFont typeface="Arial" panose="020B0604020202020204" pitchFamily="34" charset="0"/>
+              <a:buChar char="•"/>
+            </a:pPr>
+            <a:r>
+              <a:rPr lang="en-US" b="0" dirty="0"/>
+              <a:t>Checks quality</a:t>
+            </a:r>
+          </a:p>
+          <a:p>
+            <a:r>
+              <a:rPr lang="en-US" b="0" dirty="0"/>
+              <a:t>Examples</a:t>
+            </a:r>
+          </a:p>
+          <a:p>
+            <a:pPr marL="342900" indent="-342900">
+              <a:buFont typeface="Arial" panose="020B0604020202020204" pitchFamily="34" charset="0"/>
+              <a:buChar char="•"/>
+            </a:pPr>
+            <a:r>
+              <a:rPr lang="en-US" b="0" dirty="0"/>
+              <a:t>Performance Testing </a:t>
+            </a:r>
+          </a:p>
+          <a:p>
+            <a:pPr marL="342900" indent="-342900">
+              <a:buFont typeface="Arial" panose="020B0604020202020204" pitchFamily="34" charset="0"/>
+              <a:buChar char="•"/>
+            </a:pPr>
+            <a:r>
+              <a:rPr lang="en-US" b="0" dirty="0"/>
+              <a:t>Security Testing </a:t>
+            </a:r>
+          </a:p>
+          <a:p>
+            <a:pPr marL="342900" indent="-342900">
+              <a:buFont typeface="Arial" panose="020B0604020202020204" pitchFamily="34" charset="0"/>
+              <a:buChar char="•"/>
+            </a:pPr>
+            <a:r>
+              <a:rPr lang="en-US" b="0" dirty="0"/>
+              <a:t>Load Testing </a:t>
+            </a:r>
+          </a:p>
+          <a:p>
+            <a:pPr marL="342900" indent="-342900">
+              <a:buFont typeface="Arial" panose="020B0604020202020204" pitchFamily="34" charset="0"/>
+              <a:buChar char="•"/>
+            </a:pPr>
+            <a:r>
+              <a:rPr lang="en-US" b="0" dirty="0"/>
+              <a:t>Stress Testing </a:t>
+            </a:r>
+          </a:p>
+          <a:p>
+            <a:r>
+              <a:rPr lang="en-US" b="0" dirty="0"/>
+              <a:t>Example:</a:t>
+            </a:r>
+          </a:p>
+          <a:p>
+            <a:r>
+              <a:rPr lang="en-US" b="0" dirty="0"/>
+              <a:t>Can website handle 10000 users?</a:t>
+            </a:r>
+          </a:p>
+          <a:p>
+            <a:endParaRPr lang="en-IN" dirty="0"/>
+          </a:p>
+        </p:txBody>
+      </p:sp>
+    </p:spTree>
+    <p:extLst>
+      <p:ext uri="{BB962C8B-B14F-4D97-AF65-F5344CB8AC3E}">
+        <p14:creationId xmlns:p14="http://schemas.microsoft.com/office/powerpoint/2010/main" val="2038759541"/>
       </p:ext>
     </p:extLst>
   </p:cSld>
